--- a/PlantPulse_Web_Technologies_Presentation.pptx
+++ b/PlantPulse_Web_Technologies_Presentation.pptx
@@ -5,23 +5,18 @@
     <p:sldMasterId id="2147483648" r:id="rId1"/>
   </p:sldMasterIdLst>
   <p:sldIdLst>
-    <p:sldId id="256" r:id="rId7"/>
-    <p:sldId id="257" r:id="rId8"/>
-    <p:sldId id="258" r:id="rId9"/>
-    <p:sldId id="259" r:id="rId10"/>
-    <p:sldId id="260" r:id="rId11"/>
-    <p:sldId id="261" r:id="rId12"/>
-    <p:sldId id="262" r:id="rId13"/>
-    <p:sldId id="263" r:id="rId14"/>
-    <p:sldId id="264" r:id="rId15"/>
-    <p:sldId id="265" r:id="rId16"/>
-    <p:sldId id="266" r:id="rId17"/>
-    <p:sldId id="267" r:id="rId18"/>
-    <p:sldId id="268" r:id="rId19"/>
-    <p:sldId id="269" r:id="rId20"/>
-    <p:sldId id="270" r:id="rId21"/>
+    <p:sldId id="256" r:id="rId2"/>
+    <p:sldId id="257" r:id="rId3"/>
+    <p:sldId id="258" r:id="rId4"/>
+    <p:sldId id="259" r:id="rId5"/>
+    <p:sldId id="260" r:id="rId6"/>
+    <p:sldId id="261" r:id="rId7"/>
+    <p:sldId id="262" r:id="rId8"/>
+    <p:sldId id="263" r:id="rId9"/>
+    <p:sldId id="264" r:id="rId10"/>
+    <p:sldId id="265" r:id="rId11"/>
   </p:sldIdLst>
-  <p:sldSz cx="12191695" cy="6858000" type="screen4x3"/>
+  <p:sldSz cx="12192000" cy="6858000"/>
   <p:notesSz cx="6858000" cy="9144000"/>
   <p:defaultTextStyle>
     <a:defPPr>
@@ -118,6 +113,22 @@
       </a:defRPr>
     </a:lvl9pPr>
   </p:defaultTextStyle>
+  <p:extLst>
+    <p:ext uri="{EFAFB233-063F-42B5-8137-9DF3F51BA10A}">
+      <p15:sldGuideLst xmlns:p15="http://schemas.microsoft.com/office/powerpoint/2012/main">
+        <p15:guide id="1" orient="horz" pos="2160">
+          <p15:clr>
+            <a:srgbClr val="A4A3A4"/>
+          </p15:clr>
+        </p15:guide>
+        <p15:guide id="2" pos="2880">
+          <p15:clr>
+            <a:srgbClr val="A4A3A4"/>
+          </p15:clr>
+        </p15:guide>
+      </p15:sldGuideLst>
+    </p:ext>
+  </p:extLst>
 </p:presentation>
 </file>
 
@@ -159,10 +170,9 @@
           <a:lstStyle/>
           <a:p>
             <a:r>
-              <a:rPr lang="en-US" smtClean="0"/>
+              <a:rPr lang="en-US"/>
               <a:t>Click to edit Master title style</a:t>
             </a:r>
-            <a:endParaRPr lang="en-US"/>
           </a:p>
         </p:txBody>
       </p:sp>
@@ -278,10 +288,9 @@
           </a:lstStyle>
           <a:p>
             <a:r>
-              <a:rPr lang="en-US" smtClean="0"/>
+              <a:rPr lang="en-US"/>
               <a:t>Click to edit Master subtitle style</a:t>
             </a:r>
-            <a:endParaRPr lang="en-US"/>
           </a:p>
         </p:txBody>
       </p:sp>
@@ -302,7 +311,7 @@
           <a:p>
             <a:fld id="{5BCAD085-E8A6-8845-BD4E-CB4CCA059FC4}" type="datetimeFigureOut">
               <a:rPr lang="en-US" smtClean="0"/>
-              <a:t>1/27/13</a:t>
+              <a:t>10/7/2026</a:t>
             </a:fld>
             <a:endParaRPr lang="en-US"/>
           </a:p>
@@ -396,10 +405,9 @@
           <a:lstStyle/>
           <a:p>
             <a:r>
-              <a:rPr lang="en-US" smtClean="0"/>
+              <a:rPr lang="en-US"/>
               <a:t>Click to edit Master title style</a:t>
             </a:r>
-            <a:endParaRPr lang="en-US"/>
           </a:p>
         </p:txBody>
       </p:sp>
@@ -420,38 +428,37 @@
           <a:p>
             <a:pPr lvl="0"/>
             <a:r>
-              <a:rPr lang="en-US" smtClean="0"/>
+              <a:rPr lang="en-US"/>
               <a:t>Click to edit Master text styles</a:t>
             </a:r>
           </a:p>
           <a:p>
             <a:pPr lvl="1"/>
             <a:r>
-              <a:rPr lang="en-US" smtClean="0"/>
+              <a:rPr lang="en-US"/>
               <a:t>Second level</a:t>
             </a:r>
           </a:p>
           <a:p>
             <a:pPr lvl="2"/>
             <a:r>
-              <a:rPr lang="en-US" smtClean="0"/>
+              <a:rPr lang="en-US"/>
               <a:t>Third level</a:t>
             </a:r>
           </a:p>
           <a:p>
             <a:pPr lvl="3"/>
             <a:r>
-              <a:rPr lang="en-US" smtClean="0"/>
+              <a:rPr lang="en-US"/>
               <a:t>Fourth level</a:t>
             </a:r>
           </a:p>
           <a:p>
             <a:pPr lvl="4"/>
             <a:r>
-              <a:rPr lang="en-US" smtClean="0"/>
+              <a:rPr lang="en-US"/>
               <a:t>Fifth level</a:t>
             </a:r>
-            <a:endParaRPr lang="en-US"/>
           </a:p>
         </p:txBody>
       </p:sp>
@@ -472,7 +479,7 @@
           <a:p>
             <a:fld id="{5BCAD085-E8A6-8845-BD4E-CB4CCA059FC4}" type="datetimeFigureOut">
               <a:rPr lang="en-US" smtClean="0"/>
-              <a:t>1/27/13</a:t>
+              <a:t>10/7/2026</a:t>
             </a:fld>
             <a:endParaRPr lang="en-US"/>
           </a:p>
@@ -571,10 +578,9 @@
           <a:lstStyle/>
           <a:p>
             <a:r>
-              <a:rPr lang="en-US" smtClean="0"/>
+              <a:rPr lang="en-US"/>
               <a:t>Click to edit Master title style</a:t>
             </a:r>
-            <a:endParaRPr lang="en-US"/>
           </a:p>
         </p:txBody>
       </p:sp>
@@ -600,38 +606,37 @@
           <a:p>
             <a:pPr lvl="0"/>
             <a:r>
-              <a:rPr lang="en-US" smtClean="0"/>
+              <a:rPr lang="en-US"/>
               <a:t>Click to edit Master text styles</a:t>
             </a:r>
           </a:p>
           <a:p>
             <a:pPr lvl="1"/>
             <a:r>
-              <a:rPr lang="en-US" smtClean="0"/>
+              <a:rPr lang="en-US"/>
               <a:t>Second level</a:t>
             </a:r>
           </a:p>
           <a:p>
             <a:pPr lvl="2"/>
             <a:r>
-              <a:rPr lang="en-US" smtClean="0"/>
+              <a:rPr lang="en-US"/>
               <a:t>Third level</a:t>
             </a:r>
           </a:p>
           <a:p>
             <a:pPr lvl="3"/>
             <a:r>
-              <a:rPr lang="en-US" smtClean="0"/>
+              <a:rPr lang="en-US"/>
               <a:t>Fourth level</a:t>
             </a:r>
           </a:p>
           <a:p>
             <a:pPr lvl="4"/>
             <a:r>
-              <a:rPr lang="en-US" smtClean="0"/>
+              <a:rPr lang="en-US"/>
               <a:t>Fifth level</a:t>
             </a:r>
-            <a:endParaRPr lang="en-US"/>
           </a:p>
         </p:txBody>
       </p:sp>
@@ -652,7 +657,7 @@
           <a:p>
             <a:fld id="{5BCAD085-E8A6-8845-BD4E-CB4CCA059FC4}" type="datetimeFigureOut">
               <a:rPr lang="en-US" smtClean="0"/>
-              <a:t>1/27/13</a:t>
+              <a:t>10/7/2026</a:t>
             </a:fld>
             <a:endParaRPr lang="en-US"/>
           </a:p>
@@ -746,10 +751,9 @@
           <a:lstStyle/>
           <a:p>
             <a:r>
-              <a:rPr lang="en-US" smtClean="0"/>
+              <a:rPr lang="en-US"/>
               <a:t>Click to edit Master title style</a:t>
             </a:r>
-            <a:endParaRPr lang="en-US"/>
           </a:p>
         </p:txBody>
       </p:sp>
@@ -770,38 +774,37 @@
           <a:p>
             <a:pPr lvl="0"/>
             <a:r>
-              <a:rPr lang="en-US" smtClean="0"/>
+              <a:rPr lang="en-US"/>
               <a:t>Click to edit Master text styles</a:t>
             </a:r>
           </a:p>
           <a:p>
             <a:pPr lvl="1"/>
             <a:r>
-              <a:rPr lang="en-US" smtClean="0"/>
+              <a:rPr lang="en-US"/>
               <a:t>Second level</a:t>
             </a:r>
           </a:p>
           <a:p>
             <a:pPr lvl="2"/>
             <a:r>
-              <a:rPr lang="en-US" smtClean="0"/>
+              <a:rPr lang="en-US"/>
               <a:t>Third level</a:t>
             </a:r>
           </a:p>
           <a:p>
             <a:pPr lvl="3"/>
             <a:r>
-              <a:rPr lang="en-US" smtClean="0"/>
+              <a:rPr lang="en-US"/>
               <a:t>Fourth level</a:t>
             </a:r>
           </a:p>
           <a:p>
             <a:pPr lvl="4"/>
             <a:r>
-              <a:rPr lang="en-US" smtClean="0"/>
+              <a:rPr lang="en-US"/>
               <a:t>Fifth level</a:t>
             </a:r>
-            <a:endParaRPr lang="en-US"/>
           </a:p>
         </p:txBody>
       </p:sp>
@@ -822,7 +825,7 @@
           <a:p>
             <a:fld id="{5BCAD085-E8A6-8845-BD4E-CB4CCA059FC4}" type="datetimeFigureOut">
               <a:rPr lang="en-US" smtClean="0"/>
-              <a:t>1/27/13</a:t>
+              <a:t>10/7/2026</a:t>
             </a:fld>
             <a:endParaRPr lang="en-US"/>
           </a:p>
@@ -925,10 +928,9 @@
           </a:lstStyle>
           <a:p>
             <a:r>
-              <a:rPr lang="en-US" smtClean="0"/>
+              <a:rPr lang="en-US"/>
               <a:t>Click to edit Master title style</a:t>
             </a:r>
-            <a:endParaRPr lang="en-US"/>
           </a:p>
         </p:txBody>
       </p:sp>
@@ -1045,7 +1047,7 @@
           <a:p>
             <a:pPr lvl="0"/>
             <a:r>
-              <a:rPr lang="en-US" smtClean="0"/>
+              <a:rPr lang="en-US"/>
               <a:t>Click to edit Master text styles</a:t>
             </a:r>
           </a:p>
@@ -1068,7 +1070,7 @@
           <a:p>
             <a:fld id="{5BCAD085-E8A6-8845-BD4E-CB4CCA059FC4}" type="datetimeFigureOut">
               <a:rPr lang="en-US" smtClean="0"/>
-              <a:t>1/27/13</a:t>
+              <a:t>10/7/2026</a:t>
             </a:fld>
             <a:endParaRPr lang="en-US"/>
           </a:p>
@@ -1162,10 +1164,9 @@
           <a:lstStyle/>
           <a:p>
             <a:r>
-              <a:rPr lang="en-US" smtClean="0"/>
+              <a:rPr lang="en-US"/>
               <a:t>Click to edit Master title style</a:t>
             </a:r>
-            <a:endParaRPr lang="en-US"/>
           </a:p>
         </p:txBody>
       </p:sp>
@@ -1219,38 +1220,37 @@
           <a:p>
             <a:pPr lvl="0"/>
             <a:r>
-              <a:rPr lang="en-US" smtClean="0"/>
+              <a:rPr lang="en-US"/>
               <a:t>Click to edit Master text styles</a:t>
             </a:r>
           </a:p>
           <a:p>
             <a:pPr lvl="1"/>
             <a:r>
-              <a:rPr lang="en-US" smtClean="0"/>
+              <a:rPr lang="en-US"/>
               <a:t>Second level</a:t>
             </a:r>
           </a:p>
           <a:p>
             <a:pPr lvl="2"/>
             <a:r>
-              <a:rPr lang="en-US" smtClean="0"/>
+              <a:rPr lang="en-US"/>
               <a:t>Third level</a:t>
             </a:r>
           </a:p>
           <a:p>
             <a:pPr lvl="3"/>
             <a:r>
-              <a:rPr lang="en-US" smtClean="0"/>
+              <a:rPr lang="en-US"/>
               <a:t>Fourth level</a:t>
             </a:r>
           </a:p>
           <a:p>
             <a:pPr lvl="4"/>
             <a:r>
-              <a:rPr lang="en-US" smtClean="0"/>
+              <a:rPr lang="en-US"/>
               <a:t>Fifth level</a:t>
             </a:r>
-            <a:endParaRPr lang="en-US"/>
           </a:p>
         </p:txBody>
       </p:sp>
@@ -1304,38 +1304,37 @@
           <a:p>
             <a:pPr lvl="0"/>
             <a:r>
-              <a:rPr lang="en-US" smtClean="0"/>
+              <a:rPr lang="en-US"/>
               <a:t>Click to edit Master text styles</a:t>
             </a:r>
           </a:p>
           <a:p>
             <a:pPr lvl="1"/>
             <a:r>
-              <a:rPr lang="en-US" smtClean="0"/>
+              <a:rPr lang="en-US"/>
               <a:t>Second level</a:t>
             </a:r>
           </a:p>
           <a:p>
             <a:pPr lvl="2"/>
             <a:r>
-              <a:rPr lang="en-US" smtClean="0"/>
+              <a:rPr lang="en-US"/>
               <a:t>Third level</a:t>
             </a:r>
           </a:p>
           <a:p>
             <a:pPr lvl="3"/>
             <a:r>
-              <a:rPr lang="en-US" smtClean="0"/>
+              <a:rPr lang="en-US"/>
               <a:t>Fourth level</a:t>
             </a:r>
           </a:p>
           <a:p>
             <a:pPr lvl="4"/>
             <a:r>
-              <a:rPr lang="en-US" smtClean="0"/>
+              <a:rPr lang="en-US"/>
               <a:t>Fifth level</a:t>
             </a:r>
-            <a:endParaRPr lang="en-US"/>
           </a:p>
         </p:txBody>
       </p:sp>
@@ -1356,7 +1355,7 @@
           <a:p>
             <a:fld id="{5BCAD085-E8A6-8845-BD4E-CB4CCA059FC4}" type="datetimeFigureOut">
               <a:rPr lang="en-US" smtClean="0"/>
-              <a:t>1/27/13</a:t>
+              <a:t>10/7/2026</a:t>
             </a:fld>
             <a:endParaRPr lang="en-US"/>
           </a:p>
@@ -1454,10 +1453,9 @@
           </a:lstStyle>
           <a:p>
             <a:r>
-              <a:rPr lang="en-US" smtClean="0"/>
+              <a:rPr lang="en-US"/>
               <a:t>Click to edit Master title style</a:t>
             </a:r>
-            <a:endParaRPr lang="en-US"/>
           </a:p>
         </p:txBody>
       </p:sp>
@@ -1520,7 +1518,7 @@
           <a:p>
             <a:pPr lvl="0"/>
             <a:r>
-              <a:rPr lang="en-US" smtClean="0"/>
+              <a:rPr lang="en-US"/>
               <a:t>Click to edit Master text styles</a:t>
             </a:r>
           </a:p>
@@ -1576,38 +1574,37 @@
           <a:p>
             <a:pPr lvl="0"/>
             <a:r>
-              <a:rPr lang="en-US" smtClean="0"/>
+              <a:rPr lang="en-US"/>
               <a:t>Click to edit Master text styles</a:t>
             </a:r>
           </a:p>
           <a:p>
             <a:pPr lvl="1"/>
             <a:r>
-              <a:rPr lang="en-US" smtClean="0"/>
+              <a:rPr lang="en-US"/>
               <a:t>Second level</a:t>
             </a:r>
           </a:p>
           <a:p>
             <a:pPr lvl="2"/>
             <a:r>
-              <a:rPr lang="en-US" smtClean="0"/>
+              <a:rPr lang="en-US"/>
               <a:t>Third level</a:t>
             </a:r>
           </a:p>
           <a:p>
             <a:pPr lvl="3"/>
             <a:r>
-              <a:rPr lang="en-US" smtClean="0"/>
+              <a:rPr lang="en-US"/>
               <a:t>Fourth level</a:t>
             </a:r>
           </a:p>
           <a:p>
             <a:pPr lvl="4"/>
             <a:r>
-              <a:rPr lang="en-US" smtClean="0"/>
+              <a:rPr lang="en-US"/>
               <a:t>Fifth level</a:t>
             </a:r>
-            <a:endParaRPr lang="en-US"/>
           </a:p>
         </p:txBody>
       </p:sp>
@@ -1670,7 +1667,7 @@
           <a:p>
             <a:pPr lvl="0"/>
             <a:r>
-              <a:rPr lang="en-US" smtClean="0"/>
+              <a:rPr lang="en-US"/>
               <a:t>Click to edit Master text styles</a:t>
             </a:r>
           </a:p>
@@ -1726,38 +1723,37 @@
           <a:p>
             <a:pPr lvl="0"/>
             <a:r>
-              <a:rPr lang="en-US" smtClean="0"/>
+              <a:rPr lang="en-US"/>
               <a:t>Click to edit Master text styles</a:t>
             </a:r>
           </a:p>
           <a:p>
             <a:pPr lvl="1"/>
             <a:r>
-              <a:rPr lang="en-US" smtClean="0"/>
+              <a:rPr lang="en-US"/>
               <a:t>Second level</a:t>
             </a:r>
           </a:p>
           <a:p>
             <a:pPr lvl="2"/>
             <a:r>
-              <a:rPr lang="en-US" smtClean="0"/>
+              <a:rPr lang="en-US"/>
               <a:t>Third level</a:t>
             </a:r>
           </a:p>
           <a:p>
             <a:pPr lvl="3"/>
             <a:r>
-              <a:rPr lang="en-US" smtClean="0"/>
+              <a:rPr lang="en-US"/>
               <a:t>Fourth level</a:t>
             </a:r>
           </a:p>
           <a:p>
             <a:pPr lvl="4"/>
             <a:r>
-              <a:rPr lang="en-US" smtClean="0"/>
+              <a:rPr lang="en-US"/>
               <a:t>Fifth level</a:t>
             </a:r>
-            <a:endParaRPr lang="en-US"/>
           </a:p>
         </p:txBody>
       </p:sp>
@@ -1778,7 +1774,7 @@
           <a:p>
             <a:fld id="{5BCAD085-E8A6-8845-BD4E-CB4CCA059FC4}" type="datetimeFigureOut">
               <a:rPr lang="en-US" smtClean="0"/>
-              <a:t>1/27/13</a:t>
+              <a:t>10/7/2026</a:t>
             </a:fld>
             <a:endParaRPr lang="en-US"/>
           </a:p>
@@ -1872,10 +1868,9 @@
           <a:lstStyle/>
           <a:p>
             <a:r>
-              <a:rPr lang="en-US" smtClean="0"/>
+              <a:rPr lang="en-US"/>
               <a:t>Click to edit Master title style</a:t>
             </a:r>
-            <a:endParaRPr lang="en-US"/>
           </a:p>
         </p:txBody>
       </p:sp>
@@ -1896,7 +1891,7 @@
           <a:p>
             <a:fld id="{5BCAD085-E8A6-8845-BD4E-CB4CCA059FC4}" type="datetimeFigureOut">
               <a:rPr lang="en-US" smtClean="0"/>
-              <a:t>1/27/13</a:t>
+              <a:t>10/7/2026</a:t>
             </a:fld>
             <a:endParaRPr lang="en-US"/>
           </a:p>
@@ -1991,7 +1986,7 @@
           <a:p>
             <a:fld id="{5BCAD085-E8A6-8845-BD4E-CB4CCA059FC4}" type="datetimeFigureOut">
               <a:rPr lang="en-US" smtClean="0"/>
-              <a:t>1/27/13</a:t>
+              <a:t>10/7/2026</a:t>
             </a:fld>
             <a:endParaRPr lang="en-US"/>
           </a:p>
@@ -2094,10 +2089,9 @@
           </a:lstStyle>
           <a:p>
             <a:r>
-              <a:rPr lang="en-US" smtClean="0"/>
+              <a:rPr lang="en-US"/>
               <a:t>Click to edit Master title style</a:t>
             </a:r>
-            <a:endParaRPr lang="en-US"/>
           </a:p>
         </p:txBody>
       </p:sp>
@@ -2151,38 +2145,37 @@
           <a:p>
             <a:pPr lvl="0"/>
             <a:r>
-              <a:rPr lang="en-US" smtClean="0"/>
+              <a:rPr lang="en-US"/>
               <a:t>Click to edit Master text styles</a:t>
             </a:r>
           </a:p>
           <a:p>
             <a:pPr lvl="1"/>
             <a:r>
-              <a:rPr lang="en-US" smtClean="0"/>
+              <a:rPr lang="en-US"/>
               <a:t>Second level</a:t>
             </a:r>
           </a:p>
           <a:p>
             <a:pPr lvl="2"/>
             <a:r>
-              <a:rPr lang="en-US" smtClean="0"/>
+              <a:rPr lang="en-US"/>
               <a:t>Third level</a:t>
             </a:r>
           </a:p>
           <a:p>
             <a:pPr lvl="3"/>
             <a:r>
-              <a:rPr lang="en-US" smtClean="0"/>
+              <a:rPr lang="en-US"/>
               <a:t>Fourth level</a:t>
             </a:r>
           </a:p>
           <a:p>
             <a:pPr lvl="4"/>
             <a:r>
-              <a:rPr lang="en-US" smtClean="0"/>
+              <a:rPr lang="en-US"/>
               <a:t>Fifth level</a:t>
             </a:r>
-            <a:endParaRPr lang="en-US"/>
           </a:p>
         </p:txBody>
       </p:sp>
@@ -2245,7 +2238,7 @@
           <a:p>
             <a:pPr lvl="0"/>
             <a:r>
-              <a:rPr lang="en-US" smtClean="0"/>
+              <a:rPr lang="en-US"/>
               <a:t>Click to edit Master text styles</a:t>
             </a:r>
           </a:p>
@@ -2268,7 +2261,7 @@
           <a:p>
             <a:fld id="{5BCAD085-E8A6-8845-BD4E-CB4CCA059FC4}" type="datetimeFigureOut">
               <a:rPr lang="en-US" smtClean="0"/>
-              <a:t>1/27/13</a:t>
+              <a:t>10/7/2026</a:t>
             </a:fld>
             <a:endParaRPr lang="en-US"/>
           </a:p>
@@ -2371,10 +2364,9 @@
           </a:lstStyle>
           <a:p>
             <a:r>
-              <a:rPr lang="en-US" smtClean="0"/>
+              <a:rPr lang="en-US"/>
               <a:t>Click to edit Master title style</a:t>
             </a:r>
-            <a:endParaRPr lang="en-US"/>
           </a:p>
         </p:txBody>
       </p:sp>
@@ -2498,7 +2490,7 @@
           <a:p>
             <a:pPr lvl="0"/>
             <a:r>
-              <a:rPr lang="en-US" smtClean="0"/>
+              <a:rPr lang="en-US"/>
               <a:t>Click to edit Master text styles</a:t>
             </a:r>
           </a:p>
@@ -2521,7 +2513,7 @@
           <a:p>
             <a:fld id="{5BCAD085-E8A6-8845-BD4E-CB4CCA059FC4}" type="datetimeFigureOut">
               <a:rPr lang="en-US" smtClean="0"/>
-              <a:t>1/27/13</a:t>
+              <a:t>10/7/2026</a:t>
             </a:fld>
             <a:endParaRPr lang="en-US"/>
           </a:p>
@@ -2630,10 +2622,9 @@
           <a:lstStyle/>
           <a:p>
             <a:r>
-              <a:rPr lang="en-US" smtClean="0"/>
+              <a:rPr lang="en-US"/>
               <a:t>Click to edit Master title style</a:t>
             </a:r>
-            <a:endParaRPr lang="en-US"/>
           </a:p>
         </p:txBody>
       </p:sp>
@@ -2664,38 +2655,37 @@
           <a:p>
             <a:pPr lvl="0"/>
             <a:r>
-              <a:rPr lang="en-US" smtClean="0"/>
+              <a:rPr lang="en-US"/>
               <a:t>Click to edit Master text styles</a:t>
             </a:r>
           </a:p>
           <a:p>
             <a:pPr lvl="1"/>
             <a:r>
-              <a:rPr lang="en-US" smtClean="0"/>
+              <a:rPr lang="en-US"/>
               <a:t>Second level</a:t>
             </a:r>
           </a:p>
           <a:p>
             <a:pPr lvl="2"/>
             <a:r>
-              <a:rPr lang="en-US" smtClean="0"/>
+              <a:rPr lang="en-US"/>
               <a:t>Third level</a:t>
             </a:r>
           </a:p>
           <a:p>
             <a:pPr lvl="3"/>
             <a:r>
-              <a:rPr lang="en-US" smtClean="0"/>
+              <a:rPr lang="en-US"/>
               <a:t>Fourth level</a:t>
             </a:r>
           </a:p>
           <a:p>
             <a:pPr lvl="4"/>
             <a:r>
-              <a:rPr lang="en-US" smtClean="0"/>
+              <a:rPr lang="en-US"/>
               <a:t>Fifth level</a:t>
             </a:r>
-            <a:endParaRPr lang="en-US"/>
           </a:p>
         </p:txBody>
       </p:sp>
@@ -2734,7 +2724,7 @@
           <a:p>
             <a:fld id="{5BCAD085-E8A6-8845-BD4E-CB4CCA059FC4}" type="datetimeFigureOut">
               <a:rPr lang="en-US" smtClean="0"/>
-              <a:t>1/27/13</a:t>
+              <a:t>10/7/2026</a:t>
             </a:fld>
             <a:endParaRPr lang="en-US"/>
           </a:p>
@@ -3093,12 +3083,12 @@
 </file>
 
 <file path=ppt/slides/slide1.xml><?xml version="1.0" encoding="utf-8"?>
-<p:sld xmlns:a="http://schemas.openxmlformats.org/drawingml/2006/main" xmlns:p="http://schemas.openxmlformats.org/presentationml/2006/main" xmlns:r="http://schemas.openxmlformats.org/officeDocument/2006/relationships">
+<p:sld xmlns:a="http://schemas.openxmlformats.org/drawingml/2006/main" xmlns:r="http://schemas.openxmlformats.org/officeDocument/2006/relationships" xmlns:p="http://schemas.openxmlformats.org/presentationml/2006/main">
   <p:cSld>
     <p:bg>
       <p:bgPr>
         <a:solidFill>
-          <a:srgbClr val="0F172A"/>
+          <a:srgbClr val="0B132B"/>
         </a:solidFill>
         <a:effectLst/>
       </p:bgPr>
@@ -3109,7 +3099,14 @@
         <p:cNvGrpSpPr/>
         <p:nvPr/>
       </p:nvGrpSpPr>
-      <p:grpSpPr/>
+      <p:grpSpPr>
+        <a:xfrm>
+          <a:off x="0" y="0"/>
+          <a:ext cx="0" cy="0"/>
+          <a:chOff x="0" y="0"/>
+          <a:chExt cx="0" cy="0"/>
+        </a:xfrm>
+      </p:grpSpPr>
       <p:sp>
         <p:nvSpPr>
           <p:cNvPr id="2" name="Rectangle 1"/>
@@ -3118,18 +3115,18 @@
         </p:nvSpPr>
         <p:spPr>
           <a:xfrm>
-            <a:off x="1371600" y="731520"/>
-            <a:ext cx="9448495" cy="5394960"/>
+            <a:off x="1371600" y="640080"/>
+            <a:ext cx="9448495" cy="5577840"/>
           </a:xfrm>
           <a:prstGeom prst="rect">
             <a:avLst/>
           </a:prstGeom>
           <a:solidFill>
-            <a:srgbClr val="1E293B"/>
+            <a:srgbClr val="152238"/>
           </a:solidFill>
           <a:ln w="12700">
             <a:solidFill>
-              <a:srgbClr val="00F2FE"/>
+              <a:srgbClr val="F59E0B"/>
             </a:solidFill>
           </a:ln>
         </p:spPr>
@@ -3152,6 +3149,7 @@
           <a:lstStyle/>
           <a:p>
             <a:pPr algn="ctr"/>
+            <a:endParaRPr/>
           </a:p>
         </p:txBody>
       </p:sp>
@@ -3163,8 +3161,8 @@
         </p:nvSpPr>
         <p:spPr>
           <a:xfrm>
-            <a:off x="1645920" y="1005840"/>
-            <a:ext cx="8899855" cy="4846320"/>
+            <a:off x="1645920" y="1274564"/>
+            <a:ext cx="8899855" cy="4308872"/>
           </a:xfrm>
           <a:prstGeom prst="rect">
             <a:avLst/>
@@ -3178,142 +3176,182 @@
           <a:lstStyle/>
           <a:p>
             <a:pPr algn="ctr">
-              <a:defRPr sz="1400" b="1">
-                <a:solidFill>
-                  <a:srgbClr val="00F2FE"/>
+              <a:defRPr sz="1500" b="1">
+                <a:solidFill>
+                  <a:srgbClr val="38BDF8"/>
                 </a:solidFill>
                 <a:latin typeface="Arial"/>
               </a:defRPr>
             </a:pPr>
             <a:r>
+              <a:rPr sz="2800" dirty="0"/>
               <a:t>U21CS504 - WEB TECHNOLOGIES LABORATORY</a:t>
             </a:r>
           </a:p>
           <a:p>
             <a:pPr algn="ctr">
               <a:spcBef>
-                <a:spcPts val="1200"/>
-              </a:spcBef>
-              <a:defRPr sz="4000" b="1">
+                <a:spcPts val="1000"/>
+              </a:spcBef>
+              <a:defRPr sz="4400" b="1">
                 <a:solidFill>
                   <a:srgbClr val="FFFFFF"/>
                 </a:solidFill>
                 <a:latin typeface="Arial"/>
               </a:defRPr>
             </a:pPr>
-            <a:r>
-              <a:t>PlantPulse</a:t>
-            </a:r>
+            <a:endParaRPr lang="en-US" sz="1200" dirty="0"/>
           </a:p>
           <a:p>
             <a:pPr algn="ctr">
               <a:spcBef>
-                <a:spcPts val="600"/>
-              </a:spcBef>
-              <a:defRPr sz="1800" b="1">
-                <a:solidFill>
-                  <a:srgbClr val="CBD5E1"/>
+                <a:spcPts val="1000"/>
+              </a:spcBef>
+              <a:defRPr sz="4400" b="1">
+                <a:solidFill>
+                  <a:srgbClr val="FFFFFF"/>
                 </a:solidFill>
                 <a:latin typeface="Arial"/>
               </a:defRPr>
             </a:pPr>
             <a:r>
-              <a:t>Smart Industrial Asset &amp; Predictive Maintenance Platform</a:t>
-            </a:r>
+              <a:rPr sz="4000" dirty="0" err="1"/>
+              <a:t>PlantPulse</a:t>
+            </a:r>
+            <a:endParaRPr sz="4000" dirty="0"/>
           </a:p>
           <a:p>
             <a:pPr algn="ctr">
               <a:spcBef>
-                <a:spcPts val="400"/>
-              </a:spcBef>
-              <a:defRPr sz="1400" i="1">
-                <a:solidFill>
-                  <a:srgbClr val="00F2FE"/>
+                <a:spcPts val="600"/>
+              </a:spcBef>
+              <a:defRPr sz="1800" b="1">
+                <a:solidFill>
+                  <a:srgbClr val="E2E8F0"/>
                 </a:solidFill>
                 <a:latin typeface="Arial"/>
               </a:defRPr>
             </a:pPr>
             <a:r>
-              <a:t>(Monitor. Maintain. Predict.)</a:t>
+              <a:rPr dirty="0"/>
+              <a:t>Smart Industrial Asset &amp; Predictive Maintenance Platform</a:t>
             </a:r>
           </a:p>
           <a:p>
             <a:pPr algn="ctr">
               <a:spcBef>
-                <a:spcPts val="1600"/>
-              </a:spcBef>
-              <a:defRPr sz="1000">
-                <a:solidFill>
-                  <a:srgbClr val="334155"/>
+                <a:spcPts val="400"/>
+              </a:spcBef>
+              <a:defRPr sz="1400" b="1" i="1">
+                <a:solidFill>
+                  <a:srgbClr val="F59E0B"/>
                 </a:solidFill>
                 <a:latin typeface="Arial"/>
               </a:defRPr>
             </a:pPr>
             <a:r>
-              <a:t>____________________________________________________</a:t>
+              <a:rPr dirty="0"/>
+              <a:t>(Monitor. Maintain. Predict.)</a:t>
             </a:r>
           </a:p>
           <a:p>
             <a:pPr algn="ctr">
               <a:spcBef>
-                <a:spcPts val="1600"/>
-              </a:spcBef>
-              <a:defRPr sz="2000" b="1">
-                <a:solidFill>
-                  <a:srgbClr val="FFFFFF"/>
+                <a:spcPts val="1400"/>
+              </a:spcBef>
+              <a:defRPr sz="1000">
+                <a:solidFill>
+                  <a:srgbClr val="2A3C5A"/>
                 </a:solidFill>
                 <a:latin typeface="Arial"/>
               </a:defRPr>
             </a:pPr>
             <a:r>
-              <a:t>Tharun Pranav T</a:t>
-            </a:r>
+              <a:rPr dirty="0"/>
+              <a:t>__________________________________________________________</a:t>
+            </a:r>
+            <a:endParaRPr lang="en-US" dirty="0"/>
           </a:p>
           <a:p>
             <a:pPr algn="ctr">
               <a:spcBef>
-                <a:spcPts val="400"/>
-              </a:spcBef>
-              <a:defRPr sz="1600" b="1">
-                <a:solidFill>
-                  <a:srgbClr val="00F2FE"/>
+                <a:spcPts val="1600"/>
+              </a:spcBef>
+              <a:defRPr sz="2200" b="1">
+                <a:solidFill>
+                  <a:srgbClr val="FFFFFF"/>
                 </a:solidFill>
                 <a:latin typeface="Arial"/>
               </a:defRPr>
             </a:pPr>
             <a:r>
-              <a:t>24CS228</a:t>
+              <a:rPr dirty="0"/>
+              <a:t>Tharun Pranav T</a:t>
             </a:r>
           </a:p>
           <a:p>
             <a:pPr algn="ctr">
               <a:spcBef>
-                <a:spcPts val="800"/>
-              </a:spcBef>
-              <a:defRPr sz="1400">
-                <a:solidFill>
-                  <a:srgbClr val="CBD5E1"/>
+                <a:spcPts val="400"/>
+              </a:spcBef>
+              <a:defRPr sz="1600" b="1">
+                <a:solidFill>
+                  <a:srgbClr val="38BDF8"/>
                 </a:solidFill>
                 <a:latin typeface="Arial"/>
               </a:defRPr>
             </a:pPr>
             <a:r>
-              <a:t>Department of Computer Science and Engineering</a:t>
-            </a:r>
+              <a:rPr dirty="0"/>
+              <a:t>24CS228</a:t>
+            </a:r>
+            <a:endParaRPr lang="en-US" dirty="0"/>
           </a:p>
           <a:p>
             <a:pPr algn="ctr">
               <a:spcBef>
                 <a:spcPts val="400"/>
               </a:spcBef>
-              <a:defRPr sz="1500" b="1">
-                <a:solidFill>
-                  <a:srgbClr val="FFFFFF"/>
+              <a:defRPr sz="1600" b="1">
+                <a:solidFill>
+                  <a:srgbClr val="38BDF8"/>
                 </a:solidFill>
                 <a:latin typeface="Arial"/>
               </a:defRPr>
             </a:pPr>
-            <a:r>
+            <a:endParaRPr dirty="0"/>
+          </a:p>
+          <a:p>
+            <a:pPr algn="ctr">
+              <a:spcBef>
+                <a:spcPts val="600"/>
+              </a:spcBef>
+              <a:defRPr sz="1400">
+                <a:solidFill>
+                  <a:srgbClr val="E2E8F0"/>
+                </a:solidFill>
+                <a:latin typeface="Arial"/>
+              </a:defRPr>
+            </a:pPr>
+            <a:r>
+              <a:rPr dirty="0"/>
+              <a:t>Department of Computer Science and Engineering</a:t>
+            </a:r>
+          </a:p>
+          <a:p>
+            <a:pPr algn="ctr">
+              <a:spcBef>
+                <a:spcPts val="400"/>
+              </a:spcBef>
+              <a:defRPr sz="1500" b="1">
+                <a:solidFill>
+                  <a:srgbClr val="FFFFFF"/>
+                </a:solidFill>
+                <a:latin typeface="Arial"/>
+              </a:defRPr>
+            </a:pPr>
+            <a:r>
+              <a:rPr dirty="0"/>
               <a:t>KPR Institute of Engineering and Technology</a:t>
             </a:r>
           </a:p>
@@ -3328,12 +3366,12 @@
 </file>
 
 <file path=ppt/slides/slide10.xml><?xml version="1.0" encoding="utf-8"?>
-<p:sld xmlns:a="http://schemas.openxmlformats.org/drawingml/2006/main" xmlns:p="http://schemas.openxmlformats.org/presentationml/2006/main" xmlns:r="http://schemas.openxmlformats.org/officeDocument/2006/relationships">
+<p:sld xmlns:a="http://schemas.openxmlformats.org/drawingml/2006/main" xmlns:r="http://schemas.openxmlformats.org/officeDocument/2006/relationships" xmlns:p="http://schemas.openxmlformats.org/presentationml/2006/main">
   <p:cSld>
     <p:bg>
       <p:bgPr>
         <a:solidFill>
-          <a:srgbClr val="0F172A"/>
+          <a:srgbClr val="0B132B"/>
         </a:solidFill>
         <a:effectLst/>
       </p:bgPr>
@@ -3344,7 +3382,14 @@
         <p:cNvGrpSpPr/>
         <p:nvPr/>
       </p:nvGrpSpPr>
-      <p:grpSpPr/>
+      <p:grpSpPr>
+        <a:xfrm>
+          <a:off x="0" y="0"/>
+          <a:ext cx="0" cy="0"/>
+          <a:chOff x="0" y="0"/>
+          <a:chExt cx="0" cy="0"/>
+        </a:xfrm>
+      </p:grpSpPr>
       <p:sp>
         <p:nvSpPr>
           <p:cNvPr id="2" name="Rectangle 1"/>
@@ -3353,18 +3398,18 @@
         </p:nvSpPr>
         <p:spPr>
           <a:xfrm>
-            <a:off x="731520" y="365760"/>
-            <a:ext cx="10728655" cy="777240"/>
+            <a:off x="731520" y="320040"/>
+            <a:ext cx="10728655" cy="822960"/>
           </a:xfrm>
           <a:prstGeom prst="rect">
             <a:avLst/>
           </a:prstGeom>
           <a:solidFill>
-            <a:srgbClr val="1E293B"/>
+            <a:srgbClr val="152238"/>
           </a:solidFill>
           <a:ln w="12700">
             <a:solidFill>
-              <a:srgbClr val="334155"/>
+              <a:srgbClr val="2A3C5A"/>
             </a:solidFill>
           </a:ln>
         </p:spPr>
@@ -3387,6 +3432,7 @@
           <a:lstStyle/>
           <a:p>
             <a:pPr algn="ctr"/>
+            <a:endParaRPr/>
           </a:p>
         </p:txBody>
       </p:sp>
@@ -3398,8 +3444,8 @@
         </p:nvSpPr>
         <p:spPr>
           <a:xfrm>
-            <a:off x="914400" y="384048"/>
-            <a:ext cx="10332720" cy="731520"/>
+            <a:off x="914400" y="490580"/>
+            <a:ext cx="10362895" cy="477054"/>
           </a:xfrm>
           <a:prstGeom prst="rect">
             <a:avLst/>
@@ -3412,29 +3458,31 @@
           </a:bodyPr>
           <a:lstStyle/>
           <a:p>
-            <a:pPr>
-              <a:defRPr sz="1000" b="1">
-                <a:solidFill>
-                  <a:srgbClr val="00F2FE"/>
+            <a:pPr algn="ctr">
+              <a:defRPr sz="2000" b="1">
+                <a:solidFill>
+                  <a:srgbClr val="FFFFFF"/>
                 </a:solidFill>
                 <a:latin typeface="Arial"/>
               </a:defRPr>
             </a:pPr>
             <a:r>
-              <a:t>U21CS504 - WEB TECHNOLOGIES LABORATORY</a:t>
-            </a:r>
-          </a:p>
-          <a:p>
-            <a:pPr>
-              <a:defRPr sz="2000" b="1">
-                <a:solidFill>
-                  <a:srgbClr val="FFFFFF"/>
+              <a:rPr dirty="0"/>
+              <a:t>Database Schema, Conclusion &amp; Future Roadmap</a:t>
+            </a:r>
+          </a:p>
+          <a:p>
+            <a:pPr algn="ctr">
+              <a:defRPr sz="1100" b="1">
+                <a:solidFill>
+                  <a:srgbClr val="F59E0B"/>
                 </a:solidFill>
                 <a:latin typeface="Arial"/>
               </a:defRPr>
             </a:pPr>
             <a:r>
-              <a:t>9. Spare Parts Inventory &amp; Movement History</a:t>
+              <a:rPr dirty="0"/>
+              <a:t>Normalized Relational Architecture and Long-Term Industrial Evolution</a:t>
             </a:r>
           </a:p>
         </p:txBody>
@@ -3448,17 +3496,17 @@
         <p:spPr>
           <a:xfrm>
             <a:off x="731520" y="1325880"/>
-            <a:ext cx="4114800" cy="5120640"/>
+            <a:ext cx="3383280" cy="5029200"/>
           </a:xfrm>
           <a:prstGeom prst="rect">
             <a:avLst/>
           </a:prstGeom>
           <a:solidFill>
-            <a:srgbClr val="1E293B"/>
+            <a:srgbClr val="152238"/>
           </a:solidFill>
           <a:ln w="12700">
             <a:solidFill>
-              <a:srgbClr val="334155"/>
+              <a:srgbClr val="2A3C5A"/>
             </a:solidFill>
           </a:ln>
         </p:spPr>
@@ -3481,6 +3529,7 @@
           <a:lstStyle/>
           <a:p>
             <a:pPr algn="ctr"/>
+            <a:endParaRPr/>
           </a:p>
         </p:txBody>
       </p:sp>
@@ -3492,8 +3541,8 @@
         </p:nvSpPr>
         <p:spPr>
           <a:xfrm>
-            <a:off x="914400" y="1508760"/>
-            <a:ext cx="3749040" cy="4754880"/>
+            <a:off x="914400" y="1490472"/>
+            <a:ext cx="3017520" cy="4688463"/>
           </a:xfrm>
           <a:prstGeom prst="rect">
             <a:avLst/>
@@ -3501,85 +3550,270 @@
           <a:noFill/>
         </p:spPr>
         <p:txBody>
-          <a:bodyPr wrap="square">
+          <a:bodyPr wrap="square" tIns="0" bIns="0">
             <a:spAutoFit/>
           </a:bodyPr>
           <a:lstStyle/>
           <a:p>
-            <a:pPr>
-              <a:defRPr sz="1600" b="1">
-                <a:solidFill>
-                  <a:srgbClr val="00F2FE"/>
+            <a:pPr algn="just">
+              <a:defRPr sz="1500" b="1">
+                <a:solidFill>
+                  <a:srgbClr val="38BDF8"/>
                 </a:solidFill>
                 <a:latin typeface="Arial"/>
               </a:defRPr>
             </a:pPr>
             <a:r>
-              <a:t>Key Capabilities &amp; Details</a:t>
-            </a:r>
-          </a:p>
-          <a:p>
-            <a:pPr>
-              <a:spcBef>
-                <a:spcPts val="800"/>
-              </a:spcBef>
-              <a:defRPr sz="1300">
-                <a:solidFill>
-                  <a:srgbClr val="CBD5E1"/>
-                </a:solidFill>
-                <a:latin typeface="Arial"/>
-              </a:defRPr>
-            </a:pPr>
-            <a:r>
-              <a:t>• Spare parts catalog tracking stock levels, minimum safety thresholds, and unit costs.</a:t>
-            </a:r>
-          </a:p>
-          <a:p>
-            <a:pPr>
-              <a:spcBef>
-                <a:spcPts val="800"/>
-              </a:spcBef>
-              <a:defRPr sz="1300">
-                <a:solidFill>
-                  <a:srgbClr val="CBD5E1"/>
-                </a:solidFill>
-                <a:latin typeface="Arial"/>
-              </a:defRPr>
-            </a:pPr>
-            <a:r>
-              <a:t>• Automated stock status indicators: NORMAL, LOW STOCK, and OUT OF STOCK.</a:t>
-            </a:r>
-          </a:p>
-          <a:p>
-            <a:pPr>
-              <a:spcBef>
-                <a:spcPts val="800"/>
-              </a:spcBef>
-              <a:defRPr sz="1300">
-                <a:solidFill>
-                  <a:srgbClr val="CBD5E1"/>
-                </a:solidFill>
-                <a:latin typeface="Arial"/>
-              </a:defRPr>
-            </a:pPr>
-            <a:r>
-              <a:t>• Quick +20 Restock trigger and stock movement log tracking IN/OUT transactions.</a:t>
-            </a:r>
-          </a:p>
-          <a:p>
-            <a:pPr>
-              <a:spcBef>
-                <a:spcPts val="800"/>
-              </a:spcBef>
-              <a:defRPr sz="1300">
-                <a:solidFill>
-                  <a:srgbClr val="CBD5E1"/>
-                </a:solidFill>
-                <a:latin typeface="Arial"/>
-              </a:defRPr>
-            </a:pPr>
-            <a:r>
-              <a:t>• Triggers automated low-stock telemetry alerts in alert center.</a:t>
+              <a:rPr sz="1500" dirty="0">
+                <a:latin typeface="Arial" panose="020B0604020202020204" pitchFamily="34" charset="0"/>
+                <a:cs typeface="Arial" panose="020B0604020202020204" pitchFamily="34" charset="0"/>
+              </a:rPr>
+              <a:t>MySQL Relational Schema</a:t>
+            </a:r>
+          </a:p>
+          <a:p>
+            <a:pPr algn="just">
+              <a:spcBef>
+                <a:spcPts val="800"/>
+              </a:spcBef>
+            </a:pPr>
+            <a:r>
+              <a:rPr sz="1400" b="1" dirty="0">
+                <a:solidFill>
+                  <a:srgbClr val="F59E0B"/>
+                </a:solidFill>
+                <a:latin typeface="Times New Roman" panose="02020603050405020304" pitchFamily="18" charset="0"/>
+                <a:cs typeface="Times New Roman" panose="02020603050405020304" pitchFamily="18" charset="0"/>
+              </a:rPr>
+              <a:t>• users Table: </a:t>
+            </a:r>
+            <a:endParaRPr lang="en-US" sz="1400" b="1" dirty="0">
+              <a:solidFill>
+                <a:srgbClr val="F59E0B"/>
+              </a:solidFill>
+              <a:latin typeface="Times New Roman" panose="02020603050405020304" pitchFamily="18" charset="0"/>
+              <a:cs typeface="Times New Roman" panose="02020603050405020304" pitchFamily="18" charset="0"/>
+            </a:endParaRPr>
+          </a:p>
+          <a:p>
+            <a:pPr algn="just">
+              <a:spcBef>
+                <a:spcPts val="800"/>
+              </a:spcBef>
+            </a:pPr>
+            <a:r>
+              <a:rPr sz="1400" dirty="0">
+                <a:solidFill>
+                  <a:srgbClr val="E2E8F0"/>
+                </a:solidFill>
+                <a:latin typeface="Times New Roman" panose="02020603050405020304" pitchFamily="18" charset="0"/>
+                <a:cs typeface="Times New Roman" panose="02020603050405020304" pitchFamily="18" charset="0"/>
+              </a:rPr>
+              <a:t>Stores user credentials, hashed passwords, and RBAC role assignments.</a:t>
+            </a:r>
+          </a:p>
+          <a:p>
+            <a:pPr algn="just">
+              <a:spcBef>
+                <a:spcPts val="800"/>
+              </a:spcBef>
+            </a:pPr>
+            <a:r>
+              <a:rPr sz="1400" b="1" dirty="0">
+                <a:solidFill>
+                  <a:srgbClr val="F59E0B"/>
+                </a:solidFill>
+                <a:latin typeface="Times New Roman" panose="02020603050405020304" pitchFamily="18" charset="0"/>
+                <a:cs typeface="Times New Roman" panose="02020603050405020304" pitchFamily="18" charset="0"/>
+              </a:rPr>
+              <a:t>• assets Table: </a:t>
+            </a:r>
+            <a:endParaRPr lang="en-US" sz="1400" b="1" dirty="0">
+              <a:solidFill>
+                <a:srgbClr val="F59E0B"/>
+              </a:solidFill>
+              <a:latin typeface="Times New Roman" panose="02020603050405020304" pitchFamily="18" charset="0"/>
+              <a:cs typeface="Times New Roman" panose="02020603050405020304" pitchFamily="18" charset="0"/>
+            </a:endParaRPr>
+          </a:p>
+          <a:p>
+            <a:pPr algn="just">
+              <a:spcBef>
+                <a:spcPts val="800"/>
+              </a:spcBef>
+            </a:pPr>
+            <a:r>
+              <a:rPr sz="1400" dirty="0">
+                <a:solidFill>
+                  <a:srgbClr val="E2E8F0"/>
+                </a:solidFill>
+                <a:latin typeface="Times New Roman" panose="02020603050405020304" pitchFamily="18" charset="0"/>
+                <a:cs typeface="Times New Roman" panose="02020603050405020304" pitchFamily="18" charset="0"/>
+              </a:rPr>
+              <a:t>Holds machine specifications, health scores, and department locations.</a:t>
+            </a:r>
+          </a:p>
+          <a:p>
+            <a:pPr algn="just">
+              <a:spcBef>
+                <a:spcPts val="800"/>
+              </a:spcBef>
+            </a:pPr>
+            <a:r>
+              <a:rPr sz="1400" b="1" dirty="0">
+                <a:solidFill>
+                  <a:srgbClr val="F59E0B"/>
+                </a:solidFill>
+                <a:latin typeface="Times New Roman" panose="02020603050405020304" pitchFamily="18" charset="0"/>
+                <a:cs typeface="Times New Roman" panose="02020603050405020304" pitchFamily="18" charset="0"/>
+              </a:rPr>
+              <a:t>• </a:t>
+            </a:r>
+            <a:r>
+              <a:rPr sz="1400" b="1" dirty="0" err="1">
+                <a:solidFill>
+                  <a:srgbClr val="F59E0B"/>
+                </a:solidFill>
+                <a:latin typeface="Times New Roman" panose="02020603050405020304" pitchFamily="18" charset="0"/>
+                <a:cs typeface="Times New Roman" panose="02020603050405020304" pitchFamily="18" charset="0"/>
+              </a:rPr>
+              <a:t>work_orders</a:t>
+            </a:r>
+            <a:r>
+              <a:rPr sz="1400" b="1" dirty="0">
+                <a:solidFill>
+                  <a:srgbClr val="F59E0B"/>
+                </a:solidFill>
+                <a:latin typeface="Times New Roman" panose="02020603050405020304" pitchFamily="18" charset="0"/>
+                <a:cs typeface="Times New Roman" panose="02020603050405020304" pitchFamily="18" charset="0"/>
+              </a:rPr>
+              <a:t> Table: </a:t>
+            </a:r>
+            <a:endParaRPr lang="en-US" sz="1400" b="1" dirty="0">
+              <a:solidFill>
+                <a:srgbClr val="F59E0B"/>
+              </a:solidFill>
+              <a:latin typeface="Times New Roman" panose="02020603050405020304" pitchFamily="18" charset="0"/>
+              <a:cs typeface="Times New Roman" panose="02020603050405020304" pitchFamily="18" charset="0"/>
+            </a:endParaRPr>
+          </a:p>
+          <a:p>
+            <a:pPr algn="just">
+              <a:spcBef>
+                <a:spcPts val="800"/>
+              </a:spcBef>
+            </a:pPr>
+            <a:r>
+              <a:rPr sz="1400" dirty="0">
+                <a:solidFill>
+                  <a:srgbClr val="E2E8F0"/>
+                </a:solidFill>
+                <a:latin typeface="Times New Roman" panose="02020603050405020304" pitchFamily="18" charset="0"/>
+                <a:cs typeface="Times New Roman" panose="02020603050405020304" pitchFamily="18" charset="0"/>
+              </a:rPr>
+              <a:t>Tracks task statuses, assigned technicians, priorities, and timelines.</a:t>
+            </a:r>
+          </a:p>
+          <a:p>
+            <a:pPr algn="just">
+              <a:spcBef>
+                <a:spcPts val="800"/>
+              </a:spcBef>
+            </a:pPr>
+            <a:r>
+              <a:rPr sz="1400" b="1" dirty="0">
+                <a:solidFill>
+                  <a:srgbClr val="F59E0B"/>
+                </a:solidFill>
+                <a:latin typeface="Times New Roman" panose="02020603050405020304" pitchFamily="18" charset="0"/>
+                <a:cs typeface="Times New Roman" panose="02020603050405020304" pitchFamily="18" charset="0"/>
+              </a:rPr>
+              <a:t>• </a:t>
+            </a:r>
+            <a:r>
+              <a:rPr sz="1400" b="1" dirty="0" err="1">
+                <a:solidFill>
+                  <a:srgbClr val="F59E0B"/>
+                </a:solidFill>
+                <a:latin typeface="Times New Roman" panose="02020603050405020304" pitchFamily="18" charset="0"/>
+                <a:cs typeface="Times New Roman" panose="02020603050405020304" pitchFamily="18" charset="0"/>
+              </a:rPr>
+              <a:t>spare_parts</a:t>
+            </a:r>
+            <a:r>
+              <a:rPr sz="1400" b="1" dirty="0">
+                <a:solidFill>
+                  <a:srgbClr val="F59E0B"/>
+                </a:solidFill>
+                <a:latin typeface="Times New Roman" panose="02020603050405020304" pitchFamily="18" charset="0"/>
+                <a:cs typeface="Times New Roman" panose="02020603050405020304" pitchFamily="18" charset="0"/>
+              </a:rPr>
+              <a:t> Table: </a:t>
+            </a:r>
+            <a:endParaRPr lang="en-US" sz="1400" b="1" dirty="0">
+              <a:solidFill>
+                <a:srgbClr val="F59E0B"/>
+              </a:solidFill>
+              <a:latin typeface="Times New Roman" panose="02020603050405020304" pitchFamily="18" charset="0"/>
+              <a:cs typeface="Times New Roman" panose="02020603050405020304" pitchFamily="18" charset="0"/>
+            </a:endParaRPr>
+          </a:p>
+          <a:p>
+            <a:pPr algn="just">
+              <a:spcBef>
+                <a:spcPts val="800"/>
+              </a:spcBef>
+            </a:pPr>
+            <a:r>
+              <a:rPr sz="1400" dirty="0">
+                <a:solidFill>
+                  <a:srgbClr val="E2E8F0"/>
+                </a:solidFill>
+                <a:latin typeface="Times New Roman" panose="02020603050405020304" pitchFamily="18" charset="0"/>
+                <a:cs typeface="Times New Roman" panose="02020603050405020304" pitchFamily="18" charset="0"/>
+              </a:rPr>
+              <a:t>Manages inventory counts, reorder levels, and unit costs.</a:t>
+            </a:r>
+          </a:p>
+          <a:p>
+            <a:pPr algn="just">
+              <a:spcBef>
+                <a:spcPts val="800"/>
+              </a:spcBef>
+            </a:pPr>
+            <a:r>
+              <a:rPr sz="1400" b="1" dirty="0">
+                <a:solidFill>
+                  <a:srgbClr val="F59E0B"/>
+                </a:solidFill>
+                <a:latin typeface="Times New Roman" panose="02020603050405020304" pitchFamily="18" charset="0"/>
+                <a:cs typeface="Times New Roman" panose="02020603050405020304" pitchFamily="18" charset="0"/>
+              </a:rPr>
+              <a:t>• alerts Table: </a:t>
+            </a:r>
+            <a:endParaRPr lang="en-US" sz="1400" b="1" dirty="0">
+              <a:solidFill>
+                <a:srgbClr val="F59E0B"/>
+              </a:solidFill>
+              <a:latin typeface="Times New Roman" panose="02020603050405020304" pitchFamily="18" charset="0"/>
+              <a:cs typeface="Times New Roman" panose="02020603050405020304" pitchFamily="18" charset="0"/>
+            </a:endParaRPr>
+          </a:p>
+          <a:p>
+            <a:pPr algn="just">
+              <a:spcBef>
+                <a:spcPts val="800"/>
+              </a:spcBef>
+            </a:pPr>
+            <a:r>
+              <a:rPr sz="1400" dirty="0">
+                <a:solidFill>
+                  <a:srgbClr val="E2E8F0"/>
+                </a:solidFill>
+                <a:latin typeface="Times New Roman" panose="02020603050405020304" pitchFamily="18" charset="0"/>
+                <a:cs typeface="Times New Roman" panose="02020603050405020304" pitchFamily="18" charset="0"/>
+              </a:rPr>
+              <a:t>Logs system warnings, telemetry breaches, and resolution states.</a:t>
             </a:r>
           </a:p>
         </p:txBody>
@@ -3592,18 +3826,18 @@
         </p:nvSpPr>
         <p:spPr>
           <a:xfrm>
-            <a:off x="5029200" y="1325880"/>
-            <a:ext cx="6430975" cy="5120640"/>
+            <a:off x="4389120" y="1325880"/>
+            <a:ext cx="3383280" cy="5029200"/>
           </a:xfrm>
           <a:prstGeom prst="rect">
             <a:avLst/>
           </a:prstGeom>
           <a:solidFill>
-            <a:srgbClr val="1E293B"/>
+            <a:srgbClr val="152238"/>
           </a:solidFill>
           <a:ln w="12700">
             <a:solidFill>
-              <a:srgbClr val="00F2FE"/>
+              <a:srgbClr val="2A3C5A"/>
             </a:solidFill>
           </a:ln>
         </p:spPr>
@@ -3626,12 +3860,1998 @@
           <a:lstStyle/>
           <a:p>
             <a:pPr algn="ctr"/>
+            <a:endParaRPr/>
+          </a:p>
+        </p:txBody>
+      </p:sp>
+      <p:sp>
+        <p:nvSpPr>
+          <p:cNvPr id="7" name="TextBox 6"/>
+          <p:cNvSpPr txBox="1"/>
+          <p:nvPr/>
+        </p:nvSpPr>
+        <p:spPr>
+          <a:xfrm>
+            <a:off x="4572000" y="1490472"/>
+            <a:ext cx="3017520" cy="4267835"/>
+          </a:xfrm>
+          <a:prstGeom prst="rect">
+            <a:avLst/>
+          </a:prstGeom>
+          <a:noFill/>
+        </p:spPr>
+        <p:txBody>
+          <a:bodyPr wrap="square" tIns="0" bIns="0">
+            <a:spAutoFit/>
+          </a:bodyPr>
+          <a:lstStyle/>
+          <a:p>
+            <a:pPr algn="just">
+              <a:defRPr sz="1500" b="1">
+                <a:solidFill>
+                  <a:srgbClr val="38BDF8"/>
+                </a:solidFill>
+                <a:latin typeface="Arial"/>
+              </a:defRPr>
+            </a:pPr>
+            <a:r>
+              <a:rPr sz="1500" dirty="0">
+                <a:latin typeface="Arial" panose="020B0604020202020204" pitchFamily="34" charset="0"/>
+                <a:cs typeface="Arial" panose="020B0604020202020204" pitchFamily="34" charset="0"/>
+              </a:rPr>
+              <a:t>Core Project Achievements</a:t>
+            </a:r>
+          </a:p>
+          <a:p>
+            <a:pPr algn="just">
+              <a:spcBef>
+                <a:spcPts val="800"/>
+              </a:spcBef>
+            </a:pPr>
+            <a:r>
+              <a:rPr sz="1400" b="1" dirty="0">
+                <a:solidFill>
+                  <a:srgbClr val="F59E0B"/>
+                </a:solidFill>
+                <a:latin typeface="Times New Roman" panose="02020603050405020304" pitchFamily="18" charset="0"/>
+                <a:cs typeface="Times New Roman" panose="02020603050405020304" pitchFamily="18" charset="0"/>
+              </a:rPr>
+              <a:t>• Production Web Platform: </a:t>
+            </a:r>
+            <a:endParaRPr lang="en-US" sz="1400" b="1" dirty="0">
+              <a:solidFill>
+                <a:srgbClr val="F59E0B"/>
+              </a:solidFill>
+              <a:latin typeface="Times New Roman" panose="02020603050405020304" pitchFamily="18" charset="0"/>
+              <a:cs typeface="Times New Roman" panose="02020603050405020304" pitchFamily="18" charset="0"/>
+            </a:endParaRPr>
+          </a:p>
+          <a:p>
+            <a:pPr algn="just">
+              <a:spcBef>
+                <a:spcPts val="800"/>
+              </a:spcBef>
+            </a:pPr>
+            <a:r>
+              <a:rPr sz="1400" dirty="0">
+                <a:solidFill>
+                  <a:srgbClr val="E2E8F0"/>
+                </a:solidFill>
+                <a:latin typeface="Times New Roman" panose="02020603050405020304" pitchFamily="18" charset="0"/>
+                <a:cs typeface="Times New Roman" panose="02020603050405020304" pitchFamily="18" charset="0"/>
+              </a:rPr>
+              <a:t>Delivered a fully responsive, dual-theme industrial web application.</a:t>
+            </a:r>
+          </a:p>
+          <a:p>
+            <a:pPr algn="just">
+              <a:spcBef>
+                <a:spcPts val="800"/>
+              </a:spcBef>
+            </a:pPr>
+            <a:r>
+              <a:rPr sz="1400" b="1" dirty="0">
+                <a:solidFill>
+                  <a:srgbClr val="F59E0B"/>
+                </a:solidFill>
+                <a:latin typeface="Times New Roman" panose="02020603050405020304" pitchFamily="18" charset="0"/>
+                <a:cs typeface="Times New Roman" panose="02020603050405020304" pitchFamily="18" charset="0"/>
+              </a:rPr>
+              <a:t>• Decoupled REST API: </a:t>
+            </a:r>
+            <a:endParaRPr lang="en-US" sz="1400" b="1" dirty="0">
+              <a:solidFill>
+                <a:srgbClr val="F59E0B"/>
+              </a:solidFill>
+              <a:latin typeface="Times New Roman" panose="02020603050405020304" pitchFamily="18" charset="0"/>
+              <a:cs typeface="Times New Roman" panose="02020603050405020304" pitchFamily="18" charset="0"/>
+            </a:endParaRPr>
+          </a:p>
+          <a:p>
+            <a:pPr algn="just">
+              <a:spcBef>
+                <a:spcPts val="800"/>
+              </a:spcBef>
+            </a:pPr>
+            <a:r>
+              <a:rPr sz="1400" dirty="0">
+                <a:solidFill>
+                  <a:srgbClr val="E2E8F0"/>
+                </a:solidFill>
+                <a:latin typeface="Times New Roman" panose="02020603050405020304" pitchFamily="18" charset="0"/>
+                <a:cs typeface="Times New Roman" panose="02020603050405020304" pitchFamily="18" charset="0"/>
+              </a:rPr>
+              <a:t>Implemented clean PHP PDO backend services with zero framework dependencies.</a:t>
+            </a:r>
+          </a:p>
+          <a:p>
+            <a:pPr algn="just">
+              <a:spcBef>
+                <a:spcPts val="800"/>
+              </a:spcBef>
+            </a:pPr>
+            <a:r>
+              <a:rPr sz="1400" b="1" dirty="0">
+                <a:solidFill>
+                  <a:srgbClr val="F59E0B"/>
+                </a:solidFill>
+                <a:latin typeface="Times New Roman" panose="02020603050405020304" pitchFamily="18" charset="0"/>
+                <a:cs typeface="Times New Roman" panose="02020603050405020304" pitchFamily="18" charset="0"/>
+              </a:rPr>
+              <a:t>• Interactive Workflows: </a:t>
+            </a:r>
+            <a:endParaRPr lang="en-US" sz="1400" b="1" dirty="0">
+              <a:solidFill>
+                <a:srgbClr val="F59E0B"/>
+              </a:solidFill>
+              <a:latin typeface="Times New Roman" panose="02020603050405020304" pitchFamily="18" charset="0"/>
+              <a:cs typeface="Times New Roman" panose="02020603050405020304" pitchFamily="18" charset="0"/>
+            </a:endParaRPr>
+          </a:p>
+          <a:p>
+            <a:pPr algn="just">
+              <a:spcBef>
+                <a:spcPts val="800"/>
+              </a:spcBef>
+            </a:pPr>
+            <a:r>
+              <a:rPr sz="1400" dirty="0">
+                <a:solidFill>
+                  <a:srgbClr val="E2E8F0"/>
+                </a:solidFill>
+                <a:latin typeface="Times New Roman" panose="02020603050405020304" pitchFamily="18" charset="0"/>
+                <a:cs typeface="Times New Roman" panose="02020603050405020304" pitchFamily="18" charset="0"/>
+              </a:rPr>
+              <a:t>Successfully deployed dynamic Kanban and health index calculation modules.</a:t>
+            </a:r>
+          </a:p>
+          <a:p>
+            <a:pPr algn="just">
+              <a:spcBef>
+                <a:spcPts val="800"/>
+              </a:spcBef>
+            </a:pPr>
+            <a:r>
+              <a:rPr sz="1400" b="1" dirty="0">
+                <a:solidFill>
+                  <a:srgbClr val="F59E0B"/>
+                </a:solidFill>
+                <a:latin typeface="Times New Roman" panose="02020603050405020304" pitchFamily="18" charset="0"/>
+                <a:cs typeface="Times New Roman" panose="02020603050405020304" pitchFamily="18" charset="0"/>
+              </a:rPr>
+              <a:t>• High Performance: </a:t>
+            </a:r>
+            <a:endParaRPr lang="en-US" sz="1400" b="1" dirty="0">
+              <a:solidFill>
+                <a:srgbClr val="F59E0B"/>
+              </a:solidFill>
+              <a:latin typeface="Times New Roman" panose="02020603050405020304" pitchFamily="18" charset="0"/>
+              <a:cs typeface="Times New Roman" panose="02020603050405020304" pitchFamily="18" charset="0"/>
+            </a:endParaRPr>
+          </a:p>
+          <a:p>
+            <a:pPr algn="just">
+              <a:spcBef>
+                <a:spcPts val="800"/>
+              </a:spcBef>
+            </a:pPr>
+            <a:r>
+              <a:rPr sz="1400" dirty="0">
+                <a:solidFill>
+                  <a:srgbClr val="E2E8F0"/>
+                </a:solidFill>
+                <a:latin typeface="Times New Roman" panose="02020603050405020304" pitchFamily="18" charset="0"/>
+                <a:cs typeface="Times New Roman" panose="02020603050405020304" pitchFamily="18" charset="0"/>
+              </a:rPr>
+              <a:t>Achieved sub-50ms execution times and 100% test pass rate across API endpoints.</a:t>
+            </a:r>
+          </a:p>
+        </p:txBody>
+      </p:sp>
+      <p:sp>
+        <p:nvSpPr>
+          <p:cNvPr id="8" name="Rectangle 7"/>
+          <p:cNvSpPr/>
+          <p:nvPr/>
+        </p:nvSpPr>
+        <p:spPr>
+          <a:xfrm>
+            <a:off x="8046720" y="1325880"/>
+            <a:ext cx="3413455" cy="5029200"/>
+          </a:xfrm>
+          <a:prstGeom prst="rect">
+            <a:avLst/>
+          </a:prstGeom>
+          <a:solidFill>
+            <a:srgbClr val="152238"/>
+          </a:solidFill>
+          <a:ln w="12700">
+            <a:solidFill>
+              <a:srgbClr val="2A3C5A"/>
+            </a:solidFill>
+          </a:ln>
+        </p:spPr>
+        <p:style>
+          <a:lnRef idx="1">
+            <a:schemeClr val="accent1"/>
+          </a:lnRef>
+          <a:fillRef idx="3">
+            <a:schemeClr val="accent1"/>
+          </a:fillRef>
+          <a:effectRef idx="2">
+            <a:schemeClr val="accent1"/>
+          </a:effectRef>
+          <a:fontRef idx="minor">
+            <a:schemeClr val="lt1"/>
+          </a:fontRef>
+        </p:style>
+        <p:txBody>
+          <a:bodyPr rtlCol="0" anchor="ctr"/>
+          <a:lstStyle/>
+          <a:p>
+            <a:pPr algn="ctr"/>
+            <a:endParaRPr/>
+          </a:p>
+        </p:txBody>
+      </p:sp>
+      <p:sp>
+        <p:nvSpPr>
+          <p:cNvPr id="9" name="TextBox 8"/>
+          <p:cNvSpPr txBox="1"/>
+          <p:nvPr/>
+        </p:nvSpPr>
+        <p:spPr>
+          <a:xfrm>
+            <a:off x="8229600" y="1490472"/>
+            <a:ext cx="3047695" cy="4483279"/>
+          </a:xfrm>
+          <a:prstGeom prst="rect">
+            <a:avLst/>
+          </a:prstGeom>
+          <a:noFill/>
+        </p:spPr>
+        <p:txBody>
+          <a:bodyPr wrap="square" tIns="0" bIns="0">
+            <a:spAutoFit/>
+          </a:bodyPr>
+          <a:lstStyle/>
+          <a:p>
+            <a:pPr algn="just">
+              <a:defRPr sz="1500" b="1">
+                <a:solidFill>
+                  <a:srgbClr val="38BDF8"/>
+                </a:solidFill>
+                <a:latin typeface="Arial"/>
+              </a:defRPr>
+            </a:pPr>
+            <a:r>
+              <a:rPr sz="1500" dirty="0">
+                <a:latin typeface="Arial" panose="020B0604020202020204" pitchFamily="34" charset="0"/>
+                <a:cs typeface="Arial" panose="020B0604020202020204" pitchFamily="34" charset="0"/>
+              </a:rPr>
+              <a:t>Future Industrial Roadmap</a:t>
+            </a:r>
+          </a:p>
+          <a:p>
+            <a:pPr algn="just">
+              <a:spcBef>
+                <a:spcPts val="800"/>
+              </a:spcBef>
+            </a:pPr>
+            <a:r>
+              <a:rPr sz="1400" b="1" dirty="0">
+                <a:solidFill>
+                  <a:srgbClr val="F59E0B"/>
+                </a:solidFill>
+                <a:latin typeface="Times New Roman" panose="02020603050405020304" pitchFamily="18" charset="0"/>
+                <a:cs typeface="Times New Roman" panose="02020603050405020304" pitchFamily="18" charset="0"/>
+              </a:rPr>
+              <a:t>• IoT Telemetry Integration: </a:t>
+            </a:r>
+            <a:endParaRPr lang="en-US" sz="1400" b="1" dirty="0">
+              <a:solidFill>
+                <a:srgbClr val="F59E0B"/>
+              </a:solidFill>
+              <a:latin typeface="Times New Roman" panose="02020603050405020304" pitchFamily="18" charset="0"/>
+              <a:cs typeface="Times New Roman" panose="02020603050405020304" pitchFamily="18" charset="0"/>
+            </a:endParaRPr>
+          </a:p>
+          <a:p>
+            <a:pPr algn="just">
+              <a:spcBef>
+                <a:spcPts val="800"/>
+              </a:spcBef>
+            </a:pPr>
+            <a:r>
+              <a:rPr sz="1400" dirty="0">
+                <a:solidFill>
+                  <a:srgbClr val="E2E8F0"/>
+                </a:solidFill>
+                <a:latin typeface="Times New Roman" panose="02020603050405020304" pitchFamily="18" charset="0"/>
+                <a:cs typeface="Times New Roman" panose="02020603050405020304" pitchFamily="18" charset="0"/>
+              </a:rPr>
+              <a:t>Direct MQTT broker connectivity for live industrial sensor telemetry ingestion.</a:t>
+            </a:r>
+          </a:p>
+          <a:p>
+            <a:pPr algn="just">
+              <a:spcBef>
+                <a:spcPts val="800"/>
+              </a:spcBef>
+            </a:pPr>
+            <a:r>
+              <a:rPr sz="1400" b="1" dirty="0">
+                <a:solidFill>
+                  <a:srgbClr val="F59E0B"/>
+                </a:solidFill>
+                <a:latin typeface="Times New Roman" panose="02020603050405020304" pitchFamily="18" charset="0"/>
+                <a:cs typeface="Times New Roman" panose="02020603050405020304" pitchFamily="18" charset="0"/>
+              </a:rPr>
+              <a:t>• Predictive ML Models: </a:t>
+            </a:r>
+            <a:endParaRPr lang="en-US" sz="1400" b="1" dirty="0">
+              <a:solidFill>
+                <a:srgbClr val="F59E0B"/>
+              </a:solidFill>
+              <a:latin typeface="Times New Roman" panose="02020603050405020304" pitchFamily="18" charset="0"/>
+              <a:cs typeface="Times New Roman" panose="02020603050405020304" pitchFamily="18" charset="0"/>
+            </a:endParaRPr>
+          </a:p>
+          <a:p>
+            <a:pPr algn="just">
+              <a:spcBef>
+                <a:spcPts val="800"/>
+              </a:spcBef>
+            </a:pPr>
+            <a:r>
+              <a:rPr sz="1400" dirty="0">
+                <a:solidFill>
+                  <a:srgbClr val="E2E8F0"/>
+                </a:solidFill>
+                <a:latin typeface="Times New Roman" panose="02020603050405020304" pitchFamily="18" charset="0"/>
+                <a:cs typeface="Times New Roman" panose="02020603050405020304" pitchFamily="18" charset="0"/>
+              </a:rPr>
+              <a:t>Machine learning algorithms for Remaining Useful Life (RUL) estimation.</a:t>
+            </a:r>
+          </a:p>
+          <a:p>
+            <a:pPr algn="just">
+              <a:spcBef>
+                <a:spcPts val="800"/>
+              </a:spcBef>
+            </a:pPr>
+            <a:r>
+              <a:rPr sz="1400" b="1" dirty="0">
+                <a:solidFill>
+                  <a:srgbClr val="F59E0B"/>
+                </a:solidFill>
+                <a:latin typeface="Times New Roman" panose="02020603050405020304" pitchFamily="18" charset="0"/>
+                <a:cs typeface="Times New Roman" panose="02020603050405020304" pitchFamily="18" charset="0"/>
+              </a:rPr>
+              <a:t>• Mobile PWA Support: </a:t>
+            </a:r>
+            <a:endParaRPr lang="en-US" sz="1400" b="1" dirty="0">
+              <a:solidFill>
+                <a:srgbClr val="F59E0B"/>
+              </a:solidFill>
+              <a:latin typeface="Times New Roman" panose="02020603050405020304" pitchFamily="18" charset="0"/>
+              <a:cs typeface="Times New Roman" panose="02020603050405020304" pitchFamily="18" charset="0"/>
+            </a:endParaRPr>
+          </a:p>
+          <a:p>
+            <a:pPr algn="just">
+              <a:spcBef>
+                <a:spcPts val="800"/>
+              </a:spcBef>
+            </a:pPr>
+            <a:r>
+              <a:rPr sz="1400" dirty="0">
+                <a:solidFill>
+                  <a:srgbClr val="E2E8F0"/>
+                </a:solidFill>
+                <a:latin typeface="Times New Roman" panose="02020603050405020304" pitchFamily="18" charset="0"/>
+                <a:cs typeface="Times New Roman" panose="02020603050405020304" pitchFamily="18" charset="0"/>
+              </a:rPr>
+              <a:t>Offline-first Progressive Web App capabilities for field maintenance technicians.</a:t>
+            </a:r>
+          </a:p>
+          <a:p>
+            <a:pPr algn="just">
+              <a:spcBef>
+                <a:spcPts val="800"/>
+              </a:spcBef>
+            </a:pPr>
+            <a:r>
+              <a:rPr sz="1400" b="1" dirty="0">
+                <a:solidFill>
+                  <a:srgbClr val="F59E0B"/>
+                </a:solidFill>
+                <a:latin typeface="Times New Roman" panose="02020603050405020304" pitchFamily="18" charset="0"/>
+                <a:cs typeface="Times New Roman" panose="02020603050405020304" pitchFamily="18" charset="0"/>
+              </a:rPr>
+              <a:t>• SCADA Interoperability: </a:t>
+            </a:r>
+            <a:endParaRPr lang="en-US" sz="1400" b="1" dirty="0">
+              <a:solidFill>
+                <a:srgbClr val="F59E0B"/>
+              </a:solidFill>
+              <a:latin typeface="Times New Roman" panose="02020603050405020304" pitchFamily="18" charset="0"/>
+              <a:cs typeface="Times New Roman" panose="02020603050405020304" pitchFamily="18" charset="0"/>
+            </a:endParaRPr>
+          </a:p>
+          <a:p>
+            <a:pPr algn="just">
+              <a:spcBef>
+                <a:spcPts val="800"/>
+              </a:spcBef>
+            </a:pPr>
+            <a:r>
+              <a:rPr sz="1400" dirty="0">
+                <a:solidFill>
+                  <a:srgbClr val="E2E8F0"/>
+                </a:solidFill>
+                <a:latin typeface="Times New Roman" panose="02020603050405020304" pitchFamily="18" charset="0"/>
+                <a:cs typeface="Times New Roman" panose="02020603050405020304" pitchFamily="18" charset="0"/>
+              </a:rPr>
+              <a:t>Industrial protocol connectors (Modbus/OPC UA) for plant-wide SCADA integration.</a:t>
+            </a:r>
+          </a:p>
+        </p:txBody>
+      </p:sp>
+    </p:spTree>
+  </p:cSld>
+  <p:clrMapOvr>
+    <a:masterClrMapping/>
+  </p:clrMapOvr>
+</p:sld>
+</file>
+
+<file path=ppt/slides/slide2.xml><?xml version="1.0" encoding="utf-8"?>
+<p:sld xmlns:a="http://schemas.openxmlformats.org/drawingml/2006/main" xmlns:r="http://schemas.openxmlformats.org/officeDocument/2006/relationships" xmlns:p="http://schemas.openxmlformats.org/presentationml/2006/main">
+  <p:cSld>
+    <p:bg>
+      <p:bgPr>
+        <a:solidFill>
+          <a:srgbClr val="0B132B"/>
+        </a:solidFill>
+        <a:effectLst/>
+      </p:bgPr>
+    </p:bg>
+    <p:spTree>
+      <p:nvGrpSpPr>
+        <p:cNvPr id="1" name=""/>
+        <p:cNvGrpSpPr/>
+        <p:nvPr/>
+      </p:nvGrpSpPr>
+      <p:grpSpPr>
+        <a:xfrm>
+          <a:off x="0" y="0"/>
+          <a:ext cx="0" cy="0"/>
+          <a:chOff x="0" y="0"/>
+          <a:chExt cx="0" cy="0"/>
+        </a:xfrm>
+      </p:grpSpPr>
+      <p:sp>
+        <p:nvSpPr>
+          <p:cNvPr id="2" name="Rectangle 1"/>
+          <p:cNvSpPr/>
+          <p:nvPr/>
+        </p:nvSpPr>
+        <p:spPr>
+          <a:xfrm>
+            <a:off x="731520" y="320040"/>
+            <a:ext cx="10728655" cy="822960"/>
+          </a:xfrm>
+          <a:prstGeom prst="rect">
+            <a:avLst/>
+          </a:prstGeom>
+          <a:solidFill>
+            <a:srgbClr val="152238"/>
+          </a:solidFill>
+          <a:ln w="12700">
+            <a:solidFill>
+              <a:srgbClr val="2A3C5A"/>
+            </a:solidFill>
+          </a:ln>
+        </p:spPr>
+        <p:style>
+          <a:lnRef idx="1">
+            <a:schemeClr val="accent1"/>
+          </a:lnRef>
+          <a:fillRef idx="3">
+            <a:schemeClr val="accent1"/>
+          </a:fillRef>
+          <a:effectRef idx="2">
+            <a:schemeClr val="accent1"/>
+          </a:effectRef>
+          <a:fontRef idx="minor">
+            <a:schemeClr val="lt1"/>
+          </a:fontRef>
+        </p:style>
+        <p:txBody>
+          <a:bodyPr rtlCol="0" anchor="ctr"/>
+          <a:lstStyle/>
+          <a:p>
+            <a:pPr algn="ctr"/>
+            <a:endParaRPr/>
+          </a:p>
+        </p:txBody>
+      </p:sp>
+      <p:sp>
+        <p:nvSpPr>
+          <p:cNvPr id="3" name="TextBox 2"/>
+          <p:cNvSpPr txBox="1"/>
+          <p:nvPr/>
+        </p:nvSpPr>
+        <p:spPr>
+          <a:xfrm>
+            <a:off x="914400" y="492993"/>
+            <a:ext cx="10362895" cy="477054"/>
+          </a:xfrm>
+          <a:prstGeom prst="rect">
+            <a:avLst/>
+          </a:prstGeom>
+          <a:noFill/>
+        </p:spPr>
+        <p:txBody>
+          <a:bodyPr wrap="square" tIns="0" bIns="0">
+            <a:spAutoFit/>
+          </a:bodyPr>
+          <a:lstStyle/>
+          <a:p>
+            <a:pPr algn="ctr">
+              <a:defRPr sz="2000" b="1">
+                <a:solidFill>
+                  <a:srgbClr val="FFFFFF"/>
+                </a:solidFill>
+                <a:latin typeface="Arial"/>
+              </a:defRPr>
+            </a:pPr>
+            <a:r>
+              <a:rPr dirty="0"/>
+              <a:t>Executive Summary &amp; Industrial Background</a:t>
+            </a:r>
+          </a:p>
+          <a:p>
+            <a:pPr algn="ctr">
+              <a:defRPr sz="1100" b="1">
+                <a:solidFill>
+                  <a:srgbClr val="F59E0B"/>
+                </a:solidFill>
+                <a:latin typeface="Arial"/>
+              </a:defRPr>
+            </a:pPr>
+            <a:r>
+              <a:rPr dirty="0"/>
+              <a:t>Addressing Unplanned Downtime Through Predictive Maintenance &amp; Digital Twin Monitoring</a:t>
+            </a:r>
+          </a:p>
+        </p:txBody>
+      </p:sp>
+      <p:sp>
+        <p:nvSpPr>
+          <p:cNvPr id="4" name="Rectangle 3"/>
+          <p:cNvSpPr/>
+          <p:nvPr/>
+        </p:nvSpPr>
+        <p:spPr>
+          <a:xfrm>
+            <a:off x="731520" y="1325880"/>
+            <a:ext cx="5212080" cy="5029200"/>
+          </a:xfrm>
+          <a:prstGeom prst="rect">
+            <a:avLst/>
+          </a:prstGeom>
+          <a:solidFill>
+            <a:srgbClr val="152238"/>
+          </a:solidFill>
+          <a:ln w="12700">
+            <a:solidFill>
+              <a:srgbClr val="2A3C5A"/>
+            </a:solidFill>
+          </a:ln>
+        </p:spPr>
+        <p:style>
+          <a:lnRef idx="1">
+            <a:schemeClr val="accent1"/>
+          </a:lnRef>
+          <a:fillRef idx="3">
+            <a:schemeClr val="accent1"/>
+          </a:fillRef>
+          <a:effectRef idx="2">
+            <a:schemeClr val="accent1"/>
+          </a:effectRef>
+          <a:fontRef idx="minor">
+            <a:schemeClr val="lt1"/>
+          </a:fontRef>
+        </p:style>
+        <p:txBody>
+          <a:bodyPr rtlCol="0" anchor="ctr"/>
+          <a:lstStyle/>
+          <a:p>
+            <a:pPr algn="ctr"/>
+            <a:endParaRPr/>
+          </a:p>
+        </p:txBody>
+      </p:sp>
+      <p:sp>
+        <p:nvSpPr>
+          <p:cNvPr id="5" name="TextBox 4"/>
+          <p:cNvSpPr txBox="1"/>
+          <p:nvPr/>
+        </p:nvSpPr>
+        <p:spPr>
+          <a:xfrm>
+            <a:off x="914400" y="1490472"/>
+            <a:ext cx="4846320" cy="4067780"/>
+          </a:xfrm>
+          <a:prstGeom prst="rect">
+            <a:avLst/>
+          </a:prstGeom>
+          <a:noFill/>
+        </p:spPr>
+        <p:txBody>
+          <a:bodyPr wrap="square" tIns="0" bIns="0">
+            <a:spAutoFit/>
+          </a:bodyPr>
+          <a:lstStyle/>
+          <a:p>
+            <a:pPr>
+              <a:defRPr sz="1500" b="1">
+                <a:solidFill>
+                  <a:srgbClr val="38BDF8"/>
+                </a:solidFill>
+                <a:latin typeface="Arial"/>
+              </a:defRPr>
+            </a:pPr>
+            <a:r>
+              <a:rPr dirty="0">
+                <a:latin typeface="Arial" panose="020B0604020202020204" pitchFamily="34" charset="0"/>
+                <a:cs typeface="Arial" panose="020B0604020202020204" pitchFamily="34" charset="0"/>
+              </a:rPr>
+              <a:t>Industrial Downtime Crisis</a:t>
+            </a:r>
+          </a:p>
+          <a:p>
+            <a:pPr algn="just">
+              <a:spcBef>
+                <a:spcPts val="800"/>
+              </a:spcBef>
+            </a:pPr>
+            <a:r>
+              <a:rPr sz="1400" b="1" dirty="0">
+                <a:solidFill>
+                  <a:srgbClr val="F59E0B"/>
+                </a:solidFill>
+                <a:latin typeface="Times New Roman" panose="02020603050405020304" pitchFamily="18" charset="0"/>
+                <a:cs typeface="Times New Roman" panose="02020603050405020304" pitchFamily="18" charset="0"/>
+              </a:rPr>
+              <a:t>• Global Cost Impact: </a:t>
+            </a:r>
+            <a:endParaRPr lang="en-US" sz="1400" b="1" dirty="0">
+              <a:solidFill>
+                <a:srgbClr val="F59E0B"/>
+              </a:solidFill>
+              <a:latin typeface="Times New Roman" panose="02020603050405020304" pitchFamily="18" charset="0"/>
+              <a:cs typeface="Times New Roman" panose="02020603050405020304" pitchFamily="18" charset="0"/>
+            </a:endParaRPr>
+          </a:p>
+          <a:p>
+            <a:pPr algn="just">
+              <a:spcBef>
+                <a:spcPts val="800"/>
+              </a:spcBef>
+            </a:pPr>
+            <a:r>
+              <a:rPr sz="1400" dirty="0">
+                <a:solidFill>
+                  <a:srgbClr val="E2E8F0"/>
+                </a:solidFill>
+                <a:latin typeface="Times New Roman" panose="02020603050405020304" pitchFamily="18" charset="0"/>
+                <a:cs typeface="Times New Roman" panose="02020603050405020304" pitchFamily="18" charset="0"/>
+              </a:rPr>
+              <a:t>Unplanned industrial outages cause over $50B annually in manufacturing losses; 82% of facilities face unexpected equipment failures.</a:t>
+            </a:r>
+          </a:p>
+          <a:p>
+            <a:pPr algn="just">
+              <a:spcBef>
+                <a:spcPts val="800"/>
+              </a:spcBef>
+            </a:pPr>
+            <a:r>
+              <a:rPr sz="1400" b="1" dirty="0">
+                <a:solidFill>
+                  <a:srgbClr val="F59E0B"/>
+                </a:solidFill>
+                <a:latin typeface="Times New Roman" panose="02020603050405020304" pitchFamily="18" charset="0"/>
+                <a:cs typeface="Times New Roman" panose="02020603050405020304" pitchFamily="18" charset="0"/>
+              </a:rPr>
+              <a:t>• Legacy Maintenance Failure: </a:t>
+            </a:r>
+            <a:endParaRPr lang="en-US" sz="1400" b="1" dirty="0">
+              <a:solidFill>
+                <a:srgbClr val="F59E0B"/>
+              </a:solidFill>
+              <a:latin typeface="Times New Roman" panose="02020603050405020304" pitchFamily="18" charset="0"/>
+              <a:cs typeface="Times New Roman" panose="02020603050405020304" pitchFamily="18" charset="0"/>
+            </a:endParaRPr>
+          </a:p>
+          <a:p>
+            <a:pPr algn="just">
+              <a:spcBef>
+                <a:spcPts val="800"/>
+              </a:spcBef>
+            </a:pPr>
+            <a:r>
+              <a:rPr sz="1400" dirty="0">
+                <a:solidFill>
+                  <a:srgbClr val="E2E8F0"/>
+                </a:solidFill>
+                <a:latin typeface="Times New Roman" panose="02020603050405020304" pitchFamily="18" charset="0"/>
+                <a:cs typeface="Times New Roman" panose="02020603050405020304" pitchFamily="18" charset="0"/>
+              </a:rPr>
+              <a:t>Traditional paper-based maintenance and reactive breakdown responses lead to critical component destruction and safety hazards.</a:t>
+            </a:r>
+          </a:p>
+          <a:p>
+            <a:pPr algn="just">
+              <a:spcBef>
+                <a:spcPts val="800"/>
+              </a:spcBef>
+            </a:pPr>
+            <a:r>
+              <a:rPr sz="1400" b="1" dirty="0">
+                <a:solidFill>
+                  <a:srgbClr val="F59E0B"/>
+                </a:solidFill>
+                <a:latin typeface="Times New Roman" panose="02020603050405020304" pitchFamily="18" charset="0"/>
+                <a:cs typeface="Times New Roman" panose="02020603050405020304" pitchFamily="18" charset="0"/>
+              </a:rPr>
+              <a:t>• Inventory Bottlenecks: </a:t>
+            </a:r>
+            <a:endParaRPr lang="en-US" sz="1400" b="1" dirty="0">
+              <a:solidFill>
+                <a:srgbClr val="F59E0B"/>
+              </a:solidFill>
+              <a:latin typeface="Times New Roman" panose="02020603050405020304" pitchFamily="18" charset="0"/>
+              <a:cs typeface="Times New Roman" panose="02020603050405020304" pitchFamily="18" charset="0"/>
+            </a:endParaRPr>
+          </a:p>
+          <a:p>
+            <a:pPr algn="just">
+              <a:spcBef>
+                <a:spcPts val="800"/>
+              </a:spcBef>
+            </a:pPr>
+            <a:r>
+              <a:rPr sz="1400" dirty="0">
+                <a:solidFill>
+                  <a:srgbClr val="E2E8F0"/>
+                </a:solidFill>
+                <a:latin typeface="Times New Roman" panose="02020603050405020304" pitchFamily="18" charset="0"/>
+                <a:cs typeface="Times New Roman" panose="02020603050405020304" pitchFamily="18" charset="0"/>
+              </a:rPr>
+              <a:t>Lack of real-time spare parts visibility delays repair turnarounds, inflating Mean Time to Repair (MTTR) beyond 48 hours.</a:t>
+            </a:r>
+          </a:p>
+          <a:p>
+            <a:pPr algn="just">
+              <a:spcBef>
+                <a:spcPts val="800"/>
+              </a:spcBef>
+            </a:pPr>
+            <a:r>
+              <a:rPr sz="1400" b="1" dirty="0">
+                <a:solidFill>
+                  <a:srgbClr val="F59E0B"/>
+                </a:solidFill>
+                <a:latin typeface="Times New Roman" panose="02020603050405020304" pitchFamily="18" charset="0"/>
+                <a:cs typeface="Times New Roman" panose="02020603050405020304" pitchFamily="18" charset="0"/>
+              </a:rPr>
+              <a:t>• Information Silos: </a:t>
+            </a:r>
+            <a:endParaRPr lang="en-US" sz="1400" b="1" dirty="0">
+              <a:solidFill>
+                <a:srgbClr val="F59E0B"/>
+              </a:solidFill>
+              <a:latin typeface="Times New Roman" panose="02020603050405020304" pitchFamily="18" charset="0"/>
+              <a:cs typeface="Times New Roman" panose="02020603050405020304" pitchFamily="18" charset="0"/>
+            </a:endParaRPr>
+          </a:p>
+          <a:p>
+            <a:pPr algn="just">
+              <a:spcBef>
+                <a:spcPts val="800"/>
+              </a:spcBef>
+            </a:pPr>
+            <a:r>
+              <a:rPr sz="1400" dirty="0">
+                <a:solidFill>
+                  <a:srgbClr val="E2E8F0"/>
+                </a:solidFill>
+                <a:latin typeface="Times New Roman" panose="02020603050405020304" pitchFamily="18" charset="0"/>
+                <a:cs typeface="Times New Roman" panose="02020603050405020304" pitchFamily="18" charset="0"/>
+              </a:rPr>
+              <a:t>Technicians and plant executives lack unified real-time dashboards to track machine health index and operational status.</a:t>
+            </a:r>
+          </a:p>
+        </p:txBody>
+      </p:sp>
+      <p:sp>
+        <p:nvSpPr>
+          <p:cNvPr id="6" name="Rectangle 5"/>
+          <p:cNvSpPr/>
+          <p:nvPr/>
+        </p:nvSpPr>
+        <p:spPr>
+          <a:xfrm>
+            <a:off x="6217920" y="1325880"/>
+            <a:ext cx="5242255" cy="5029200"/>
+          </a:xfrm>
+          <a:prstGeom prst="rect">
+            <a:avLst/>
+          </a:prstGeom>
+          <a:solidFill>
+            <a:srgbClr val="152238"/>
+          </a:solidFill>
+          <a:ln w="12700">
+            <a:solidFill>
+              <a:srgbClr val="2A3C5A"/>
+            </a:solidFill>
+          </a:ln>
+        </p:spPr>
+        <p:style>
+          <a:lnRef idx="1">
+            <a:schemeClr val="accent1"/>
+          </a:lnRef>
+          <a:fillRef idx="3">
+            <a:schemeClr val="accent1"/>
+          </a:fillRef>
+          <a:effectRef idx="2">
+            <a:schemeClr val="accent1"/>
+          </a:effectRef>
+          <a:fontRef idx="minor">
+            <a:schemeClr val="lt1"/>
+          </a:fontRef>
+        </p:style>
+        <p:txBody>
+          <a:bodyPr rtlCol="0" anchor="ctr"/>
+          <a:lstStyle/>
+          <a:p>
+            <a:pPr algn="ctr"/>
+            <a:endParaRPr/>
+          </a:p>
+        </p:txBody>
+      </p:sp>
+      <p:sp>
+        <p:nvSpPr>
+          <p:cNvPr id="7" name="TextBox 6"/>
+          <p:cNvSpPr txBox="1"/>
+          <p:nvPr/>
+        </p:nvSpPr>
+        <p:spPr>
+          <a:xfrm>
+            <a:off x="6400800" y="1490472"/>
+            <a:ext cx="4876495" cy="3636893"/>
+          </a:xfrm>
+          <a:prstGeom prst="rect">
+            <a:avLst/>
+          </a:prstGeom>
+          <a:noFill/>
+        </p:spPr>
+        <p:txBody>
+          <a:bodyPr wrap="square" tIns="0" bIns="0">
+            <a:spAutoFit/>
+          </a:bodyPr>
+          <a:lstStyle/>
+          <a:p>
+            <a:pPr>
+              <a:defRPr sz="1500" b="1">
+                <a:solidFill>
+                  <a:srgbClr val="38BDF8"/>
+                </a:solidFill>
+                <a:latin typeface="Arial"/>
+              </a:defRPr>
+            </a:pPr>
+            <a:r>
+              <a:rPr dirty="0" err="1">
+                <a:latin typeface="Arial" panose="020B0604020202020204" pitchFamily="34" charset="0"/>
+                <a:cs typeface="Arial" panose="020B0604020202020204" pitchFamily="34" charset="0"/>
+              </a:rPr>
+              <a:t>PlantPulse</a:t>
+            </a:r>
+            <a:r>
+              <a:rPr dirty="0">
+                <a:latin typeface="Arial" panose="020B0604020202020204" pitchFamily="34" charset="0"/>
+                <a:cs typeface="Arial" panose="020B0604020202020204" pitchFamily="34" charset="0"/>
+              </a:rPr>
+              <a:t> Solution &amp; Strategic Impact</a:t>
+            </a:r>
+          </a:p>
+          <a:p>
+            <a:pPr algn="just">
+              <a:spcBef>
+                <a:spcPts val="800"/>
+              </a:spcBef>
+            </a:pPr>
+            <a:r>
+              <a:rPr sz="1400" b="1" dirty="0">
+                <a:solidFill>
+                  <a:srgbClr val="F59E0B"/>
+                </a:solidFill>
+                <a:latin typeface="Times New Roman" panose="02020603050405020304" pitchFamily="18" charset="0"/>
+                <a:cs typeface="Times New Roman" panose="02020603050405020304" pitchFamily="18" charset="0"/>
+              </a:rPr>
+              <a:t>• Real-Time Telemetry: </a:t>
+            </a:r>
+            <a:endParaRPr lang="en-US" sz="1400" b="1" dirty="0">
+              <a:solidFill>
+                <a:srgbClr val="F59E0B"/>
+              </a:solidFill>
+              <a:latin typeface="Times New Roman" panose="02020603050405020304" pitchFamily="18" charset="0"/>
+              <a:cs typeface="Times New Roman" panose="02020603050405020304" pitchFamily="18" charset="0"/>
+            </a:endParaRPr>
+          </a:p>
+          <a:p>
+            <a:pPr algn="just">
+              <a:spcBef>
+                <a:spcPts val="800"/>
+              </a:spcBef>
+            </a:pPr>
+            <a:r>
+              <a:rPr sz="1400" dirty="0">
+                <a:solidFill>
+                  <a:srgbClr val="E2E8F0"/>
+                </a:solidFill>
+                <a:latin typeface="Times New Roman" panose="02020603050405020304" pitchFamily="18" charset="0"/>
+                <a:cs typeface="Times New Roman" panose="02020603050405020304" pitchFamily="18" charset="0"/>
+              </a:rPr>
+              <a:t>Deploys a digital asset management platform tracking operational health index (0-100%) and machine telemetry in real time.</a:t>
+            </a:r>
+          </a:p>
+          <a:p>
+            <a:pPr algn="just">
+              <a:spcBef>
+                <a:spcPts val="800"/>
+              </a:spcBef>
+            </a:pPr>
+            <a:r>
+              <a:rPr sz="1400" b="1" dirty="0">
+                <a:solidFill>
+                  <a:srgbClr val="F59E0B"/>
+                </a:solidFill>
+                <a:latin typeface="Times New Roman" panose="02020603050405020304" pitchFamily="18" charset="0"/>
+                <a:cs typeface="Times New Roman" panose="02020603050405020304" pitchFamily="18" charset="0"/>
+              </a:rPr>
+              <a:t>• Digital Kanban Workflows: </a:t>
+            </a:r>
+            <a:endParaRPr lang="en-US" sz="1400" b="1" dirty="0">
+              <a:solidFill>
+                <a:srgbClr val="F59E0B"/>
+              </a:solidFill>
+              <a:latin typeface="Times New Roman" panose="02020603050405020304" pitchFamily="18" charset="0"/>
+              <a:cs typeface="Times New Roman" panose="02020603050405020304" pitchFamily="18" charset="0"/>
+            </a:endParaRPr>
+          </a:p>
+          <a:p>
+            <a:pPr algn="just">
+              <a:spcBef>
+                <a:spcPts val="800"/>
+              </a:spcBef>
+            </a:pPr>
+            <a:r>
+              <a:rPr sz="1400" dirty="0">
+                <a:solidFill>
+                  <a:srgbClr val="E2E8F0"/>
+                </a:solidFill>
+                <a:latin typeface="Times New Roman" panose="02020603050405020304" pitchFamily="18" charset="0"/>
+                <a:cs typeface="Times New Roman" panose="02020603050405020304" pitchFamily="18" charset="0"/>
+              </a:rPr>
+              <a:t>Automates work order dispatching from pending triage to technician execution with drag-and-drop Kanban tracking.</a:t>
+            </a:r>
+          </a:p>
+          <a:p>
+            <a:pPr algn="just">
+              <a:spcBef>
+                <a:spcPts val="800"/>
+              </a:spcBef>
+            </a:pPr>
+            <a:r>
+              <a:rPr sz="1400" b="1" dirty="0">
+                <a:solidFill>
+                  <a:srgbClr val="F59E0B"/>
+                </a:solidFill>
+                <a:latin typeface="Times New Roman" panose="02020603050405020304" pitchFamily="18" charset="0"/>
+                <a:cs typeface="Times New Roman" panose="02020603050405020304" pitchFamily="18" charset="0"/>
+              </a:rPr>
+              <a:t>• Predictive Inventory Reordering: </a:t>
+            </a:r>
+            <a:endParaRPr lang="en-US" sz="1400" b="1" dirty="0">
+              <a:solidFill>
+                <a:srgbClr val="F59E0B"/>
+              </a:solidFill>
+              <a:latin typeface="Times New Roman" panose="02020603050405020304" pitchFamily="18" charset="0"/>
+              <a:cs typeface="Times New Roman" panose="02020603050405020304" pitchFamily="18" charset="0"/>
+            </a:endParaRPr>
+          </a:p>
+          <a:p>
+            <a:pPr algn="just">
+              <a:spcBef>
+                <a:spcPts val="800"/>
+              </a:spcBef>
+            </a:pPr>
+            <a:r>
+              <a:rPr sz="1400" dirty="0">
+                <a:solidFill>
+                  <a:srgbClr val="E2E8F0"/>
+                </a:solidFill>
+                <a:latin typeface="Times New Roman" panose="02020603050405020304" pitchFamily="18" charset="0"/>
+                <a:cs typeface="Times New Roman" panose="02020603050405020304" pitchFamily="18" charset="0"/>
+              </a:rPr>
+              <a:t>Intelligent threshold monitoring automatically flags low stock spares to prevent maintenance holds.</a:t>
+            </a:r>
+          </a:p>
+          <a:p>
+            <a:pPr algn="just">
+              <a:spcBef>
+                <a:spcPts val="800"/>
+              </a:spcBef>
+            </a:pPr>
+            <a:r>
+              <a:rPr sz="1400" b="1" dirty="0">
+                <a:solidFill>
+                  <a:srgbClr val="F59E0B"/>
+                </a:solidFill>
+                <a:latin typeface="Times New Roman" panose="02020603050405020304" pitchFamily="18" charset="0"/>
+                <a:cs typeface="Times New Roman" panose="02020603050405020304" pitchFamily="18" charset="0"/>
+              </a:rPr>
+              <a:t>• UNSDG 9 &amp; 12 Alignment: </a:t>
+            </a:r>
+            <a:endParaRPr lang="en-US" sz="1400" b="1" dirty="0">
+              <a:solidFill>
+                <a:srgbClr val="F59E0B"/>
+              </a:solidFill>
+              <a:latin typeface="Times New Roman" panose="02020603050405020304" pitchFamily="18" charset="0"/>
+              <a:cs typeface="Times New Roman" panose="02020603050405020304" pitchFamily="18" charset="0"/>
+            </a:endParaRPr>
+          </a:p>
+          <a:p>
+            <a:pPr algn="just">
+              <a:spcBef>
+                <a:spcPts val="800"/>
+              </a:spcBef>
+            </a:pPr>
+            <a:r>
+              <a:rPr sz="1400" dirty="0">
+                <a:solidFill>
+                  <a:srgbClr val="E2E8F0"/>
+                </a:solidFill>
+                <a:latin typeface="Times New Roman" panose="02020603050405020304" pitchFamily="18" charset="0"/>
+                <a:cs typeface="Times New Roman" panose="02020603050405020304" pitchFamily="18" charset="0"/>
+              </a:rPr>
+              <a:t>Fosters resilient industrial infrastructure, sustainable operational efficiency, and responsible resource consumption.</a:t>
+            </a:r>
+          </a:p>
+        </p:txBody>
+      </p:sp>
+    </p:spTree>
+  </p:cSld>
+  <p:clrMapOvr>
+    <a:masterClrMapping/>
+  </p:clrMapOvr>
+</p:sld>
+</file>
+
+<file path=ppt/slides/slide3.xml><?xml version="1.0" encoding="utf-8"?>
+<p:sld xmlns:a="http://schemas.openxmlformats.org/drawingml/2006/main" xmlns:r="http://schemas.openxmlformats.org/officeDocument/2006/relationships" xmlns:p="http://schemas.openxmlformats.org/presentationml/2006/main">
+  <p:cSld>
+    <p:bg>
+      <p:bgPr>
+        <a:solidFill>
+          <a:srgbClr val="0B132B"/>
+        </a:solidFill>
+        <a:effectLst/>
+      </p:bgPr>
+    </p:bg>
+    <p:spTree>
+      <p:nvGrpSpPr>
+        <p:cNvPr id="1" name=""/>
+        <p:cNvGrpSpPr/>
+        <p:nvPr/>
+      </p:nvGrpSpPr>
+      <p:grpSpPr>
+        <a:xfrm>
+          <a:off x="0" y="0"/>
+          <a:ext cx="0" cy="0"/>
+          <a:chOff x="0" y="0"/>
+          <a:chExt cx="0" cy="0"/>
+        </a:xfrm>
+      </p:grpSpPr>
+      <p:sp>
+        <p:nvSpPr>
+          <p:cNvPr id="2" name="Rectangle 1"/>
+          <p:cNvSpPr/>
+          <p:nvPr/>
+        </p:nvSpPr>
+        <p:spPr>
+          <a:xfrm>
+            <a:off x="731520" y="320040"/>
+            <a:ext cx="10728655" cy="822960"/>
+          </a:xfrm>
+          <a:prstGeom prst="rect">
+            <a:avLst/>
+          </a:prstGeom>
+          <a:solidFill>
+            <a:srgbClr val="152238"/>
+          </a:solidFill>
+          <a:ln w="12700">
+            <a:solidFill>
+              <a:srgbClr val="2A3C5A"/>
+            </a:solidFill>
+          </a:ln>
+        </p:spPr>
+        <p:style>
+          <a:lnRef idx="1">
+            <a:schemeClr val="accent1"/>
+          </a:lnRef>
+          <a:fillRef idx="3">
+            <a:schemeClr val="accent1"/>
+          </a:fillRef>
+          <a:effectRef idx="2">
+            <a:schemeClr val="accent1"/>
+          </a:effectRef>
+          <a:fontRef idx="minor">
+            <a:schemeClr val="lt1"/>
+          </a:fontRef>
+        </p:style>
+        <p:txBody>
+          <a:bodyPr rtlCol="0" anchor="ctr"/>
+          <a:lstStyle/>
+          <a:p>
+            <a:pPr algn="ctr"/>
+            <a:endParaRPr/>
+          </a:p>
+        </p:txBody>
+      </p:sp>
+      <p:sp>
+        <p:nvSpPr>
+          <p:cNvPr id="3" name="TextBox 2"/>
+          <p:cNvSpPr txBox="1"/>
+          <p:nvPr/>
+        </p:nvSpPr>
+        <p:spPr>
+          <a:xfrm>
+            <a:off x="914400" y="492993"/>
+            <a:ext cx="10362895" cy="477054"/>
+          </a:xfrm>
+          <a:prstGeom prst="rect">
+            <a:avLst/>
+          </a:prstGeom>
+          <a:noFill/>
+        </p:spPr>
+        <p:txBody>
+          <a:bodyPr wrap="square" tIns="0" bIns="0">
+            <a:spAutoFit/>
+          </a:bodyPr>
+          <a:lstStyle/>
+          <a:p>
+            <a:pPr algn="ctr">
+              <a:defRPr sz="2000" b="1">
+                <a:solidFill>
+                  <a:srgbClr val="FFFFFF"/>
+                </a:solidFill>
+                <a:latin typeface="Arial"/>
+              </a:defRPr>
+            </a:pPr>
+            <a:r>
+              <a:rPr dirty="0"/>
+              <a:t>System Architecture &amp; Technical Specifications</a:t>
+            </a:r>
+          </a:p>
+          <a:p>
+            <a:pPr algn="ctr">
+              <a:defRPr sz="1100" b="1">
+                <a:solidFill>
+                  <a:srgbClr val="F59E0B"/>
+                </a:solidFill>
+                <a:latin typeface="Arial"/>
+              </a:defRPr>
+            </a:pPr>
+            <a:r>
+              <a:rPr dirty="0"/>
+              <a:t>Decoupled 3-Tier Web Architecture Built for High Performance &amp; Zero-Dependency Execution</a:t>
+            </a:r>
+          </a:p>
+        </p:txBody>
+      </p:sp>
+      <p:sp>
+        <p:nvSpPr>
+          <p:cNvPr id="4" name="Rectangle 3"/>
+          <p:cNvSpPr/>
+          <p:nvPr/>
+        </p:nvSpPr>
+        <p:spPr>
+          <a:xfrm>
+            <a:off x="731520" y="1325880"/>
+            <a:ext cx="10728655" cy="2011680"/>
+          </a:xfrm>
+          <a:prstGeom prst="rect">
+            <a:avLst/>
+          </a:prstGeom>
+          <a:solidFill>
+            <a:srgbClr val="152238"/>
+          </a:solidFill>
+          <a:ln w="12700">
+            <a:solidFill>
+              <a:srgbClr val="2A3C5A"/>
+            </a:solidFill>
+          </a:ln>
+        </p:spPr>
+        <p:style>
+          <a:lnRef idx="1">
+            <a:schemeClr val="accent1"/>
+          </a:lnRef>
+          <a:fillRef idx="3">
+            <a:schemeClr val="accent1"/>
+          </a:fillRef>
+          <a:effectRef idx="2">
+            <a:schemeClr val="accent1"/>
+          </a:effectRef>
+          <a:fontRef idx="minor">
+            <a:schemeClr val="lt1"/>
+          </a:fontRef>
+        </p:style>
+        <p:txBody>
+          <a:bodyPr rtlCol="0" anchor="ctr"/>
+          <a:lstStyle/>
+          <a:p>
+            <a:pPr algn="ctr"/>
+            <a:endParaRPr/>
+          </a:p>
+        </p:txBody>
+      </p:sp>
+      <p:sp>
+        <p:nvSpPr>
+          <p:cNvPr id="5" name="TextBox 4"/>
+          <p:cNvSpPr txBox="1"/>
+          <p:nvPr/>
+        </p:nvSpPr>
+        <p:spPr>
+          <a:xfrm>
+            <a:off x="914400" y="1423779"/>
+            <a:ext cx="10362895" cy="1815882"/>
+          </a:xfrm>
+          <a:prstGeom prst="rect">
+            <a:avLst/>
+          </a:prstGeom>
+          <a:noFill/>
+        </p:spPr>
+        <p:txBody>
+          <a:bodyPr wrap="square" tIns="0" bIns="0">
+            <a:spAutoFit/>
+          </a:bodyPr>
+          <a:lstStyle/>
+          <a:p>
+            <a:pPr algn="just">
+              <a:defRPr sz="1500" b="1">
+                <a:solidFill>
+                  <a:srgbClr val="38BDF8"/>
+                </a:solidFill>
+                <a:latin typeface="Arial"/>
+              </a:defRPr>
+            </a:pPr>
+            <a:r>
+              <a:rPr sz="1500" dirty="0">
+                <a:latin typeface="Arial" panose="020B0604020202020204" pitchFamily="34" charset="0"/>
+                <a:cs typeface="Arial" panose="020B0604020202020204" pitchFamily="34" charset="0"/>
+              </a:rPr>
+              <a:t>Decoupled 3-Tier Production Architecture</a:t>
+            </a:r>
+          </a:p>
+          <a:p>
+            <a:pPr algn="just">
+              <a:spcBef>
+                <a:spcPts val="800"/>
+              </a:spcBef>
+            </a:pPr>
+            <a:r>
+              <a:rPr sz="1400" b="1" dirty="0">
+                <a:solidFill>
+                  <a:srgbClr val="F59E0B"/>
+                </a:solidFill>
+                <a:latin typeface="Times New Roman" panose="02020603050405020304" pitchFamily="18" charset="0"/>
+                <a:cs typeface="Times New Roman" panose="02020603050405020304" pitchFamily="18" charset="0"/>
+              </a:rPr>
+              <a:t>• Presentation Layer (Client): </a:t>
+            </a:r>
+            <a:r>
+              <a:rPr sz="1400" dirty="0">
+                <a:solidFill>
+                  <a:srgbClr val="E2E8F0"/>
+                </a:solidFill>
+                <a:latin typeface="Times New Roman" panose="02020603050405020304" pitchFamily="18" charset="0"/>
+                <a:cs typeface="Times New Roman" panose="02020603050405020304" pitchFamily="18" charset="0"/>
+              </a:rPr>
+              <a:t>Modern HTML5 dynamic UI built with CSS custom properties (Variables), responsive layout grids, and asynchronous ES6 Vanilla JS.</a:t>
+            </a:r>
+          </a:p>
+          <a:p>
+            <a:pPr algn="just">
+              <a:spcBef>
+                <a:spcPts val="800"/>
+              </a:spcBef>
+            </a:pPr>
+            <a:r>
+              <a:rPr sz="1400" b="1" dirty="0">
+                <a:solidFill>
+                  <a:srgbClr val="F59E0B"/>
+                </a:solidFill>
+                <a:latin typeface="Times New Roman" panose="02020603050405020304" pitchFamily="18" charset="0"/>
+                <a:cs typeface="Times New Roman" panose="02020603050405020304" pitchFamily="18" charset="0"/>
+              </a:rPr>
+              <a:t>• Application Tier (REST API): </a:t>
+            </a:r>
+            <a:r>
+              <a:rPr sz="1400" dirty="0">
+                <a:solidFill>
+                  <a:srgbClr val="E2E8F0"/>
+                </a:solidFill>
+                <a:latin typeface="Times New Roman" panose="02020603050405020304" pitchFamily="18" charset="0"/>
+                <a:cs typeface="Times New Roman" panose="02020603050405020304" pitchFamily="18" charset="0"/>
+              </a:rPr>
+              <a:t>Robust PHP 8.x PDO API layer delivering stateless JSON endpoints, session management, and RBAC authentication.</a:t>
+            </a:r>
+          </a:p>
+          <a:p>
+            <a:pPr algn="just">
+              <a:spcBef>
+                <a:spcPts val="800"/>
+              </a:spcBef>
+            </a:pPr>
+            <a:r>
+              <a:rPr sz="1400" b="1" dirty="0">
+                <a:solidFill>
+                  <a:srgbClr val="F59E0B"/>
+                </a:solidFill>
+                <a:latin typeface="Times New Roman" panose="02020603050405020304" pitchFamily="18" charset="0"/>
+                <a:cs typeface="Times New Roman" panose="02020603050405020304" pitchFamily="18" charset="0"/>
+              </a:rPr>
+              <a:t>• Data Persistence Tier (DBMS): </a:t>
+            </a:r>
+            <a:r>
+              <a:rPr sz="1400" dirty="0">
+                <a:solidFill>
+                  <a:srgbClr val="E2E8F0"/>
+                </a:solidFill>
+                <a:latin typeface="Times New Roman" panose="02020603050405020304" pitchFamily="18" charset="0"/>
+                <a:cs typeface="Times New Roman" panose="02020603050405020304" pitchFamily="18" charset="0"/>
+              </a:rPr>
+              <a:t>MySQL 8.0 relational database engine with normalized schema, foreign key integrity, and indexed querying.</a:t>
+            </a:r>
+          </a:p>
+        </p:txBody>
+      </p:sp>
+      <p:sp>
+        <p:nvSpPr>
+          <p:cNvPr id="6" name="Rectangle 5"/>
+          <p:cNvSpPr/>
+          <p:nvPr/>
+        </p:nvSpPr>
+        <p:spPr>
+          <a:xfrm>
+            <a:off x="731520" y="3474720"/>
+            <a:ext cx="5212080" cy="2880360"/>
+          </a:xfrm>
+          <a:prstGeom prst="rect">
+            <a:avLst/>
+          </a:prstGeom>
+          <a:solidFill>
+            <a:srgbClr val="152238"/>
+          </a:solidFill>
+          <a:ln w="12700">
+            <a:solidFill>
+              <a:srgbClr val="2A3C5A"/>
+            </a:solidFill>
+          </a:ln>
+        </p:spPr>
+        <p:style>
+          <a:lnRef idx="1">
+            <a:schemeClr val="accent1"/>
+          </a:lnRef>
+          <a:fillRef idx="3">
+            <a:schemeClr val="accent1"/>
+          </a:fillRef>
+          <a:effectRef idx="2">
+            <a:schemeClr val="accent1"/>
+          </a:effectRef>
+          <a:fontRef idx="minor">
+            <a:schemeClr val="lt1"/>
+          </a:fontRef>
+        </p:style>
+        <p:txBody>
+          <a:bodyPr rtlCol="0" anchor="ctr"/>
+          <a:lstStyle/>
+          <a:p>
+            <a:pPr algn="ctr"/>
+            <a:endParaRPr/>
+          </a:p>
+        </p:txBody>
+      </p:sp>
+      <p:sp>
+        <p:nvSpPr>
+          <p:cNvPr id="7" name="TextBox 6"/>
+          <p:cNvSpPr txBox="1"/>
+          <p:nvPr/>
+        </p:nvSpPr>
+        <p:spPr>
+          <a:xfrm>
+            <a:off x="914400" y="3530374"/>
+            <a:ext cx="4846320" cy="2785378"/>
+          </a:xfrm>
+          <a:prstGeom prst="rect">
+            <a:avLst/>
+          </a:prstGeom>
+          <a:noFill/>
+        </p:spPr>
+        <p:txBody>
+          <a:bodyPr wrap="square" tIns="0" bIns="0">
+            <a:spAutoFit/>
+          </a:bodyPr>
+          <a:lstStyle/>
+          <a:p>
+            <a:pPr algn="just">
+              <a:defRPr sz="1500" b="1">
+                <a:solidFill>
+                  <a:srgbClr val="38BDF8"/>
+                </a:solidFill>
+                <a:latin typeface="Arial"/>
+              </a:defRPr>
+            </a:pPr>
+            <a:r>
+              <a:rPr dirty="0"/>
+              <a:t>Frontend &amp; UI/UX Stack</a:t>
+            </a:r>
+          </a:p>
+          <a:p>
+            <a:pPr algn="just">
+              <a:spcBef>
+                <a:spcPts val="800"/>
+              </a:spcBef>
+            </a:pPr>
+            <a:r>
+              <a:rPr sz="1200" b="1" dirty="0">
+                <a:solidFill>
+                  <a:srgbClr val="F59E0B"/>
+                </a:solidFill>
+                <a:latin typeface="Arial"/>
+              </a:rPr>
+              <a:t>• </a:t>
+            </a:r>
+            <a:r>
+              <a:rPr sz="1400" b="1" dirty="0">
+                <a:solidFill>
+                  <a:srgbClr val="F59E0B"/>
+                </a:solidFill>
+                <a:latin typeface="Times New Roman" panose="02020603050405020304" pitchFamily="18" charset="0"/>
+                <a:cs typeface="Times New Roman" panose="02020603050405020304" pitchFamily="18" charset="0"/>
+              </a:rPr>
+              <a:t>Design System: </a:t>
+            </a:r>
+            <a:endParaRPr lang="en-US" sz="1400" b="1" dirty="0">
+              <a:solidFill>
+                <a:srgbClr val="F59E0B"/>
+              </a:solidFill>
+              <a:latin typeface="Times New Roman" panose="02020603050405020304" pitchFamily="18" charset="0"/>
+              <a:cs typeface="Times New Roman" panose="02020603050405020304" pitchFamily="18" charset="0"/>
+            </a:endParaRPr>
+          </a:p>
+          <a:p>
+            <a:pPr algn="just">
+              <a:spcBef>
+                <a:spcPts val="800"/>
+              </a:spcBef>
+            </a:pPr>
+            <a:r>
+              <a:rPr sz="1400" dirty="0">
+                <a:solidFill>
+                  <a:srgbClr val="E2E8F0"/>
+                </a:solidFill>
+                <a:latin typeface="Times New Roman" panose="02020603050405020304" pitchFamily="18" charset="0"/>
+                <a:cs typeface="Times New Roman" panose="02020603050405020304" pitchFamily="18" charset="0"/>
+              </a:rPr>
+              <a:t>Custom slate theme with CSS root tokens for instant dark/light switching.</a:t>
+            </a:r>
+          </a:p>
+          <a:p>
+            <a:pPr algn="just">
+              <a:spcBef>
+                <a:spcPts val="800"/>
+              </a:spcBef>
+            </a:pPr>
+            <a:r>
+              <a:rPr sz="1400" b="1" dirty="0">
+                <a:solidFill>
+                  <a:srgbClr val="F59E0B"/>
+                </a:solidFill>
+                <a:latin typeface="Times New Roman" panose="02020603050405020304" pitchFamily="18" charset="0"/>
+                <a:cs typeface="Times New Roman" panose="02020603050405020304" pitchFamily="18" charset="0"/>
+              </a:rPr>
+              <a:t>• Dynamic Interactivity: </a:t>
+            </a:r>
+            <a:endParaRPr lang="en-US" sz="1400" b="1" dirty="0">
+              <a:solidFill>
+                <a:srgbClr val="F59E0B"/>
+              </a:solidFill>
+              <a:latin typeface="Times New Roman" panose="02020603050405020304" pitchFamily="18" charset="0"/>
+              <a:cs typeface="Times New Roman" panose="02020603050405020304" pitchFamily="18" charset="0"/>
+            </a:endParaRPr>
+          </a:p>
+          <a:p>
+            <a:pPr algn="just">
+              <a:spcBef>
+                <a:spcPts val="800"/>
+              </a:spcBef>
+            </a:pPr>
+            <a:r>
+              <a:rPr sz="1400" dirty="0">
+                <a:solidFill>
+                  <a:srgbClr val="E2E8F0"/>
+                </a:solidFill>
+                <a:latin typeface="Times New Roman" panose="02020603050405020304" pitchFamily="18" charset="0"/>
+                <a:cs typeface="Times New Roman" panose="02020603050405020304" pitchFamily="18" charset="0"/>
+              </a:rPr>
+              <a:t>Async Fetch API integration rendering real-time metrics without page reloads.</a:t>
+            </a:r>
+          </a:p>
+          <a:p>
+            <a:pPr algn="just">
+              <a:spcBef>
+                <a:spcPts val="800"/>
+              </a:spcBef>
+            </a:pPr>
+            <a:r>
+              <a:rPr sz="1400" b="1" dirty="0">
+                <a:solidFill>
+                  <a:srgbClr val="F59E0B"/>
+                </a:solidFill>
+                <a:latin typeface="Times New Roman" panose="02020603050405020304" pitchFamily="18" charset="0"/>
+                <a:cs typeface="Times New Roman" panose="02020603050405020304" pitchFamily="18" charset="0"/>
+              </a:rPr>
+              <a:t>• Zero Framework Overhead: </a:t>
+            </a:r>
+            <a:endParaRPr lang="en-US" sz="1400" b="1" dirty="0">
+              <a:solidFill>
+                <a:srgbClr val="F59E0B"/>
+              </a:solidFill>
+              <a:latin typeface="Times New Roman" panose="02020603050405020304" pitchFamily="18" charset="0"/>
+              <a:cs typeface="Times New Roman" panose="02020603050405020304" pitchFamily="18" charset="0"/>
+            </a:endParaRPr>
+          </a:p>
+          <a:p>
+            <a:pPr algn="just">
+              <a:spcBef>
+                <a:spcPts val="800"/>
+              </a:spcBef>
+            </a:pPr>
+            <a:r>
+              <a:rPr sz="1400" dirty="0">
+                <a:solidFill>
+                  <a:srgbClr val="E2E8F0"/>
+                </a:solidFill>
+                <a:latin typeface="Times New Roman" panose="02020603050405020304" pitchFamily="18" charset="0"/>
+                <a:cs typeface="Times New Roman" panose="02020603050405020304" pitchFamily="18" charset="0"/>
+              </a:rPr>
+              <a:t>Pure vanilla web stack ensuring sub-50ms render times and lightweight footprint.</a:t>
+            </a:r>
+          </a:p>
+        </p:txBody>
+      </p:sp>
+      <p:sp>
+        <p:nvSpPr>
+          <p:cNvPr id="8" name="Rectangle 7"/>
+          <p:cNvSpPr/>
+          <p:nvPr/>
+        </p:nvSpPr>
+        <p:spPr>
+          <a:xfrm>
+            <a:off x="6217920" y="3474720"/>
+            <a:ext cx="5242255" cy="2880360"/>
+          </a:xfrm>
+          <a:prstGeom prst="rect">
+            <a:avLst/>
+          </a:prstGeom>
+          <a:solidFill>
+            <a:srgbClr val="152238"/>
+          </a:solidFill>
+          <a:ln w="12700">
+            <a:solidFill>
+              <a:srgbClr val="2A3C5A"/>
+            </a:solidFill>
+          </a:ln>
+        </p:spPr>
+        <p:style>
+          <a:lnRef idx="1">
+            <a:schemeClr val="accent1"/>
+          </a:lnRef>
+          <a:fillRef idx="3">
+            <a:schemeClr val="accent1"/>
+          </a:fillRef>
+          <a:effectRef idx="2">
+            <a:schemeClr val="accent1"/>
+          </a:effectRef>
+          <a:fontRef idx="minor">
+            <a:schemeClr val="lt1"/>
+          </a:fontRef>
+        </p:style>
+        <p:txBody>
+          <a:bodyPr rtlCol="0" anchor="ctr"/>
+          <a:lstStyle/>
+          <a:p>
+            <a:pPr algn="ctr"/>
+            <a:endParaRPr/>
+          </a:p>
+        </p:txBody>
+      </p:sp>
+      <p:sp>
+        <p:nvSpPr>
+          <p:cNvPr id="9" name="TextBox 8"/>
+          <p:cNvSpPr txBox="1"/>
+          <p:nvPr/>
+        </p:nvSpPr>
+        <p:spPr>
+          <a:xfrm>
+            <a:off x="6400800" y="3531157"/>
+            <a:ext cx="4876495" cy="2785378"/>
+          </a:xfrm>
+          <a:prstGeom prst="rect">
+            <a:avLst/>
+          </a:prstGeom>
+          <a:noFill/>
+        </p:spPr>
+        <p:txBody>
+          <a:bodyPr wrap="square" tIns="0" bIns="0">
+            <a:spAutoFit/>
+          </a:bodyPr>
+          <a:lstStyle/>
+          <a:p>
+            <a:pPr>
+              <a:defRPr sz="1500" b="1">
+                <a:solidFill>
+                  <a:srgbClr val="38BDF8"/>
+                </a:solidFill>
+                <a:latin typeface="Arial"/>
+              </a:defRPr>
+            </a:pPr>
+            <a:r>
+              <a:rPr dirty="0"/>
+              <a:t>Backend &amp; Security Layer</a:t>
+            </a:r>
+          </a:p>
+          <a:p>
+            <a:pPr algn="just">
+              <a:spcBef>
+                <a:spcPts val="800"/>
+              </a:spcBef>
+            </a:pPr>
+            <a:r>
+              <a:rPr sz="1400" b="1" dirty="0">
+                <a:solidFill>
+                  <a:srgbClr val="F59E0B"/>
+                </a:solidFill>
+                <a:latin typeface="Times New Roman" panose="02020603050405020304" pitchFamily="18" charset="0"/>
+                <a:cs typeface="Times New Roman" panose="02020603050405020304" pitchFamily="18" charset="0"/>
+              </a:rPr>
+              <a:t>• Security Controls: </a:t>
+            </a:r>
+            <a:endParaRPr lang="en-US" sz="1400" b="1" dirty="0">
+              <a:solidFill>
+                <a:srgbClr val="F59E0B"/>
+              </a:solidFill>
+              <a:latin typeface="Times New Roman" panose="02020603050405020304" pitchFamily="18" charset="0"/>
+              <a:cs typeface="Times New Roman" panose="02020603050405020304" pitchFamily="18" charset="0"/>
+            </a:endParaRPr>
+          </a:p>
+          <a:p>
+            <a:pPr algn="just">
+              <a:spcBef>
+                <a:spcPts val="800"/>
+              </a:spcBef>
+            </a:pPr>
+            <a:r>
+              <a:rPr sz="1400" dirty="0">
+                <a:solidFill>
+                  <a:srgbClr val="E2E8F0"/>
+                </a:solidFill>
+                <a:latin typeface="Times New Roman" panose="02020603050405020304" pitchFamily="18" charset="0"/>
+                <a:cs typeface="Times New Roman" panose="02020603050405020304" pitchFamily="18" charset="0"/>
+              </a:rPr>
+              <a:t>PDO Prepared Statements preventing SQL injection vulnerabilities.</a:t>
+            </a:r>
+          </a:p>
+          <a:p>
+            <a:pPr algn="just">
+              <a:spcBef>
+                <a:spcPts val="800"/>
+              </a:spcBef>
+            </a:pPr>
+            <a:r>
+              <a:rPr sz="1400" b="1" dirty="0">
+                <a:solidFill>
+                  <a:srgbClr val="F59E0B"/>
+                </a:solidFill>
+                <a:latin typeface="Times New Roman" panose="02020603050405020304" pitchFamily="18" charset="0"/>
+                <a:cs typeface="Times New Roman" panose="02020603050405020304" pitchFamily="18" charset="0"/>
+              </a:rPr>
+              <a:t>• RBAC Architecture: </a:t>
+            </a:r>
+            <a:endParaRPr lang="en-US" sz="1400" b="1" dirty="0">
+              <a:solidFill>
+                <a:srgbClr val="F59E0B"/>
+              </a:solidFill>
+              <a:latin typeface="Times New Roman" panose="02020603050405020304" pitchFamily="18" charset="0"/>
+              <a:cs typeface="Times New Roman" panose="02020603050405020304" pitchFamily="18" charset="0"/>
+            </a:endParaRPr>
+          </a:p>
+          <a:p>
+            <a:pPr algn="just">
+              <a:spcBef>
+                <a:spcPts val="800"/>
+              </a:spcBef>
+            </a:pPr>
+            <a:r>
+              <a:rPr sz="1400" dirty="0">
+                <a:solidFill>
+                  <a:srgbClr val="E2E8F0"/>
+                </a:solidFill>
+                <a:latin typeface="Times New Roman" panose="02020603050405020304" pitchFamily="18" charset="0"/>
+                <a:cs typeface="Times New Roman" panose="02020603050405020304" pitchFamily="18" charset="0"/>
+              </a:rPr>
+              <a:t>Strict session-guarded access separating Administrator and Technician portals.</a:t>
+            </a:r>
+          </a:p>
+          <a:p>
+            <a:pPr algn="just">
+              <a:spcBef>
+                <a:spcPts val="800"/>
+              </a:spcBef>
+            </a:pPr>
+            <a:r>
+              <a:rPr sz="1400" b="1" dirty="0">
+                <a:solidFill>
+                  <a:srgbClr val="F59E0B"/>
+                </a:solidFill>
+                <a:latin typeface="Times New Roman" panose="02020603050405020304" pitchFamily="18" charset="0"/>
+                <a:cs typeface="Times New Roman" panose="02020603050405020304" pitchFamily="18" charset="0"/>
+              </a:rPr>
+              <a:t>• REST Data Serialization: </a:t>
+            </a:r>
+            <a:endParaRPr lang="en-US" sz="1400" b="1" dirty="0">
+              <a:solidFill>
+                <a:srgbClr val="F59E0B"/>
+              </a:solidFill>
+              <a:latin typeface="Times New Roman" panose="02020603050405020304" pitchFamily="18" charset="0"/>
+              <a:cs typeface="Times New Roman" panose="02020603050405020304" pitchFamily="18" charset="0"/>
+            </a:endParaRPr>
+          </a:p>
+          <a:p>
+            <a:pPr algn="just">
+              <a:spcBef>
+                <a:spcPts val="800"/>
+              </a:spcBef>
+            </a:pPr>
+            <a:r>
+              <a:rPr sz="1400" dirty="0">
+                <a:solidFill>
+                  <a:srgbClr val="E2E8F0"/>
+                </a:solidFill>
+                <a:latin typeface="Times New Roman" panose="02020603050405020304" pitchFamily="18" charset="0"/>
+                <a:cs typeface="Times New Roman" panose="02020603050405020304" pitchFamily="18" charset="0"/>
+              </a:rPr>
+              <a:t>Clean JSON output formatting across all API endpoints (assets, workorders, inventory).</a:t>
+            </a:r>
+          </a:p>
+        </p:txBody>
+      </p:sp>
+    </p:spTree>
+  </p:cSld>
+  <p:clrMapOvr>
+    <a:masterClrMapping/>
+  </p:clrMapOvr>
+</p:sld>
+</file>
+
+<file path=ppt/slides/slide4.xml><?xml version="1.0" encoding="utf-8"?>
+<p:sld xmlns:a="http://schemas.openxmlformats.org/drawingml/2006/main" xmlns:r="http://schemas.openxmlformats.org/officeDocument/2006/relationships" xmlns:p="http://schemas.openxmlformats.org/presentationml/2006/main">
+  <p:cSld>
+    <p:bg>
+      <p:bgPr>
+        <a:solidFill>
+          <a:srgbClr val="0B132B"/>
+        </a:solidFill>
+        <a:effectLst/>
+      </p:bgPr>
+    </p:bg>
+    <p:spTree>
+      <p:nvGrpSpPr>
+        <p:cNvPr id="1" name=""/>
+        <p:cNvGrpSpPr/>
+        <p:nvPr/>
+      </p:nvGrpSpPr>
+      <p:grpSpPr>
+        <a:xfrm>
+          <a:off x="0" y="0"/>
+          <a:ext cx="0" cy="0"/>
+          <a:chOff x="0" y="0"/>
+          <a:chExt cx="0" cy="0"/>
+        </a:xfrm>
+      </p:grpSpPr>
+      <p:sp>
+        <p:nvSpPr>
+          <p:cNvPr id="2" name="Rectangle 1"/>
+          <p:cNvSpPr/>
+          <p:nvPr/>
+        </p:nvSpPr>
+        <p:spPr>
+          <a:xfrm>
+            <a:off x="731520" y="320040"/>
+            <a:ext cx="10728655" cy="822960"/>
+          </a:xfrm>
+          <a:prstGeom prst="rect">
+            <a:avLst/>
+          </a:prstGeom>
+          <a:solidFill>
+            <a:srgbClr val="152238"/>
+          </a:solidFill>
+          <a:ln w="12700">
+            <a:solidFill>
+              <a:srgbClr val="2A3C5A"/>
+            </a:solidFill>
+          </a:ln>
+        </p:spPr>
+        <p:style>
+          <a:lnRef idx="1">
+            <a:schemeClr val="accent1"/>
+          </a:lnRef>
+          <a:fillRef idx="3">
+            <a:schemeClr val="accent1"/>
+          </a:fillRef>
+          <a:effectRef idx="2">
+            <a:schemeClr val="accent1"/>
+          </a:effectRef>
+          <a:fontRef idx="minor">
+            <a:schemeClr val="lt1"/>
+          </a:fontRef>
+        </p:style>
+        <p:txBody>
+          <a:bodyPr rtlCol="0" anchor="ctr"/>
+          <a:lstStyle/>
+          <a:p>
+            <a:pPr algn="ctr"/>
+            <a:endParaRPr/>
+          </a:p>
+        </p:txBody>
+      </p:sp>
+      <p:sp>
+        <p:nvSpPr>
+          <p:cNvPr id="3" name="TextBox 2"/>
+          <p:cNvSpPr txBox="1"/>
+          <p:nvPr/>
+        </p:nvSpPr>
+        <p:spPr>
+          <a:xfrm>
+            <a:off x="914400" y="504448"/>
+            <a:ext cx="10362895" cy="477054"/>
+          </a:xfrm>
+          <a:prstGeom prst="rect">
+            <a:avLst/>
+          </a:prstGeom>
+          <a:noFill/>
+        </p:spPr>
+        <p:txBody>
+          <a:bodyPr wrap="square" tIns="0" bIns="0">
+            <a:spAutoFit/>
+          </a:bodyPr>
+          <a:lstStyle/>
+          <a:p>
+            <a:pPr algn="ctr">
+              <a:defRPr sz="2000" b="1">
+                <a:solidFill>
+                  <a:srgbClr val="FFFFFF"/>
+                </a:solidFill>
+                <a:latin typeface="Arial"/>
+              </a:defRPr>
+            </a:pPr>
+            <a:r>
+              <a:rPr dirty="0"/>
+              <a:t>User Authentication &amp; Role-Based Access Control</a:t>
+            </a:r>
+          </a:p>
+          <a:p>
+            <a:pPr algn="ctr">
+              <a:defRPr sz="1100" b="1">
+                <a:solidFill>
+                  <a:srgbClr val="F59E0B"/>
+                </a:solidFill>
+                <a:latin typeface="Arial"/>
+              </a:defRPr>
+            </a:pPr>
+            <a:r>
+              <a:rPr dirty="0"/>
+              <a:t>Multi-Role Entry Portal with Instant Dual Theme (Dark / Light Mode) Customization</a:t>
+            </a:r>
+          </a:p>
+        </p:txBody>
+      </p:sp>
+      <p:sp>
+        <p:nvSpPr>
+          <p:cNvPr id="4" name="Rectangle 3"/>
+          <p:cNvSpPr/>
+          <p:nvPr/>
+        </p:nvSpPr>
+        <p:spPr>
+          <a:xfrm>
+            <a:off x="731520" y="1325880"/>
+            <a:ext cx="5212080" cy="2834640"/>
+          </a:xfrm>
+          <a:prstGeom prst="rect">
+            <a:avLst/>
+          </a:prstGeom>
+          <a:solidFill>
+            <a:srgbClr val="152238"/>
+          </a:solidFill>
+          <a:ln w="12700">
+            <a:solidFill>
+              <a:srgbClr val="38BDF8"/>
+            </a:solidFill>
+          </a:ln>
+        </p:spPr>
+        <p:style>
+          <a:lnRef idx="1">
+            <a:schemeClr val="accent1"/>
+          </a:lnRef>
+          <a:fillRef idx="3">
+            <a:schemeClr val="accent1"/>
+          </a:fillRef>
+          <a:effectRef idx="2">
+            <a:schemeClr val="accent1"/>
+          </a:effectRef>
+          <a:fontRef idx="minor">
+            <a:schemeClr val="lt1"/>
+          </a:fontRef>
+        </p:style>
+        <p:txBody>
+          <a:bodyPr rtlCol="0" anchor="ctr"/>
+          <a:lstStyle/>
+          <a:p>
+            <a:pPr algn="ctr"/>
+            <a:endParaRPr/>
           </a:p>
         </p:txBody>
       </p:sp>
       <p:pic>
         <p:nvPicPr>
-          <p:cNvPr id="7" name="Picture 6" descr="05_spareparts_inventory.png"/>
+          <p:cNvPr id="5" name="Picture 4" descr="01_login_portal.png"/>
           <p:cNvPicPr>
             <a:picLocks noChangeAspect="1"/>
           </p:cNvPicPr>
@@ -3645,14 +5865,322 @@
         </p:blipFill>
         <p:spPr>
           <a:xfrm>
-            <a:off x="5120640" y="1417320"/>
-            <a:ext cx="6248095" cy="4937760"/>
+            <a:off x="804672" y="1379368"/>
+            <a:ext cx="5065776" cy="2576544"/>
           </a:xfrm>
           <a:prstGeom prst="rect">
             <a:avLst/>
           </a:prstGeom>
         </p:spPr>
       </p:pic>
+      <p:sp>
+        <p:nvSpPr>
+          <p:cNvPr id="6" name="TextBox 5"/>
+          <p:cNvSpPr txBox="1"/>
+          <p:nvPr/>
+        </p:nvSpPr>
+        <p:spPr>
+          <a:xfrm>
+            <a:off x="771833" y="3974788"/>
+            <a:ext cx="5212080" cy="256032"/>
+          </a:xfrm>
+          <a:prstGeom prst="rect">
+            <a:avLst/>
+          </a:prstGeom>
+          <a:noFill/>
+        </p:spPr>
+        <p:txBody>
+          <a:bodyPr wrap="square" tIns="0">
+            <a:spAutoFit/>
+          </a:bodyPr>
+          <a:lstStyle/>
+          <a:p>
+            <a:pPr algn="ctr">
+              <a:defRPr sz="1000" b="1">
+                <a:solidFill>
+                  <a:srgbClr val="94A3B8"/>
+                </a:solidFill>
+                <a:latin typeface="Arial"/>
+              </a:defRPr>
+            </a:pPr>
+            <a:r>
+              <a:rPr dirty="0"/>
+              <a:t>Dark Mode Secure Authentication Portal</a:t>
+            </a:r>
+          </a:p>
+        </p:txBody>
+      </p:sp>
+      <p:sp>
+        <p:nvSpPr>
+          <p:cNvPr id="7" name="Rectangle 6"/>
+          <p:cNvSpPr/>
+          <p:nvPr/>
+        </p:nvSpPr>
+        <p:spPr>
+          <a:xfrm>
+            <a:off x="6217920" y="1325880"/>
+            <a:ext cx="5242255" cy="2834640"/>
+          </a:xfrm>
+          <a:prstGeom prst="rect">
+            <a:avLst/>
+          </a:prstGeom>
+          <a:solidFill>
+            <a:srgbClr val="152238"/>
+          </a:solidFill>
+          <a:ln w="12700">
+            <a:solidFill>
+              <a:srgbClr val="38BDF8"/>
+            </a:solidFill>
+          </a:ln>
+        </p:spPr>
+        <p:style>
+          <a:lnRef idx="1">
+            <a:schemeClr val="accent1"/>
+          </a:lnRef>
+          <a:fillRef idx="3">
+            <a:schemeClr val="accent1"/>
+          </a:fillRef>
+          <a:effectRef idx="2">
+            <a:schemeClr val="accent1"/>
+          </a:effectRef>
+          <a:fontRef idx="minor">
+            <a:schemeClr val="lt1"/>
+          </a:fontRef>
+        </p:style>
+        <p:txBody>
+          <a:bodyPr rtlCol="0" anchor="ctr"/>
+          <a:lstStyle/>
+          <a:p>
+            <a:pPr algn="ctr"/>
+            <a:endParaRPr/>
+          </a:p>
+        </p:txBody>
+      </p:sp>
+      <p:pic>
+        <p:nvPicPr>
+          <p:cNvPr id="8" name="Picture 7" descr="08_light_mode_dashboard.png"/>
+          <p:cNvPicPr>
+            <a:picLocks noChangeAspect="1"/>
+          </p:cNvPicPr>
+          <p:nvPr/>
+        </p:nvPicPr>
+        <p:blipFill>
+          <a:blip r:embed="rId3"/>
+          <a:stretch>
+            <a:fillRect/>
+          </a:stretch>
+        </p:blipFill>
+        <p:spPr>
+          <a:xfrm>
+            <a:off x="6291072" y="1379368"/>
+            <a:ext cx="5095951" cy="2556880"/>
+          </a:xfrm>
+          <a:prstGeom prst="rect">
+            <a:avLst/>
+          </a:prstGeom>
+        </p:spPr>
+      </p:pic>
+      <p:sp>
+        <p:nvSpPr>
+          <p:cNvPr id="9" name="TextBox 8"/>
+          <p:cNvSpPr txBox="1"/>
+          <p:nvPr/>
+        </p:nvSpPr>
+        <p:spPr>
+          <a:xfrm>
+            <a:off x="6281240" y="3975576"/>
+            <a:ext cx="5242255" cy="256032"/>
+          </a:xfrm>
+          <a:prstGeom prst="rect">
+            <a:avLst/>
+          </a:prstGeom>
+          <a:noFill/>
+        </p:spPr>
+        <p:txBody>
+          <a:bodyPr wrap="square" tIns="0">
+            <a:spAutoFit/>
+          </a:bodyPr>
+          <a:lstStyle/>
+          <a:p>
+            <a:pPr algn="ctr">
+              <a:defRPr sz="1000" b="1">
+                <a:solidFill>
+                  <a:srgbClr val="94A3B8"/>
+                </a:solidFill>
+                <a:latin typeface="Arial"/>
+              </a:defRPr>
+            </a:pPr>
+            <a:r>
+              <a:rPr dirty="0"/>
+              <a:t>Light Mode Executive Interface Switch</a:t>
+            </a:r>
+          </a:p>
+        </p:txBody>
+      </p:sp>
+      <p:sp>
+        <p:nvSpPr>
+          <p:cNvPr id="10" name="Rectangle 9"/>
+          <p:cNvSpPr/>
+          <p:nvPr/>
+        </p:nvSpPr>
+        <p:spPr>
+          <a:xfrm>
+            <a:off x="731520" y="4297680"/>
+            <a:ext cx="10728655" cy="2103120"/>
+          </a:xfrm>
+          <a:prstGeom prst="rect">
+            <a:avLst/>
+          </a:prstGeom>
+          <a:solidFill>
+            <a:srgbClr val="152238"/>
+          </a:solidFill>
+          <a:ln w="12700">
+            <a:solidFill>
+              <a:srgbClr val="2A3C5A"/>
+            </a:solidFill>
+          </a:ln>
+        </p:spPr>
+        <p:style>
+          <a:lnRef idx="1">
+            <a:schemeClr val="accent1"/>
+          </a:lnRef>
+          <a:fillRef idx="3">
+            <a:schemeClr val="accent1"/>
+          </a:fillRef>
+          <a:effectRef idx="2">
+            <a:schemeClr val="accent1"/>
+          </a:effectRef>
+          <a:fontRef idx="minor">
+            <a:schemeClr val="lt1"/>
+          </a:fontRef>
+        </p:style>
+        <p:txBody>
+          <a:bodyPr rtlCol="0" anchor="ctr"/>
+          <a:lstStyle/>
+          <a:p>
+            <a:pPr algn="ctr"/>
+            <a:endParaRPr/>
+          </a:p>
+        </p:txBody>
+      </p:sp>
+      <p:sp>
+        <p:nvSpPr>
+          <p:cNvPr id="11" name="TextBox 10"/>
+          <p:cNvSpPr txBox="1"/>
+          <p:nvPr/>
+        </p:nvSpPr>
+        <p:spPr>
+          <a:xfrm>
+            <a:off x="914400" y="4462272"/>
+            <a:ext cx="10362895" cy="1615827"/>
+          </a:xfrm>
+          <a:prstGeom prst="rect">
+            <a:avLst/>
+          </a:prstGeom>
+          <a:noFill/>
+        </p:spPr>
+        <p:txBody>
+          <a:bodyPr wrap="square" tIns="0" bIns="0">
+            <a:spAutoFit/>
+          </a:bodyPr>
+          <a:lstStyle/>
+          <a:p>
+            <a:pPr>
+              <a:defRPr sz="1500" b="1">
+                <a:solidFill>
+                  <a:srgbClr val="38BDF8"/>
+                </a:solidFill>
+                <a:latin typeface="Arial"/>
+              </a:defRPr>
+            </a:pPr>
+            <a:r>
+              <a:rPr dirty="0"/>
+              <a:t>Key Authentication &amp; Accessibility Features</a:t>
+            </a:r>
+          </a:p>
+          <a:p>
+            <a:pPr algn="just">
+              <a:spcBef>
+                <a:spcPts val="800"/>
+              </a:spcBef>
+            </a:pPr>
+            <a:r>
+              <a:rPr sz="1400" b="1" dirty="0">
+                <a:solidFill>
+                  <a:srgbClr val="F59E0B"/>
+                </a:solidFill>
+                <a:latin typeface="Times New Roman" panose="02020603050405020304" pitchFamily="18" charset="0"/>
+                <a:cs typeface="Times New Roman" panose="02020603050405020304" pitchFamily="18" charset="0"/>
+              </a:rPr>
+              <a:t>• Role-Based Security (RBAC): </a:t>
+            </a:r>
+            <a:r>
+              <a:rPr sz="1400" dirty="0">
+                <a:solidFill>
+                  <a:srgbClr val="E2E8F0"/>
+                </a:solidFill>
+                <a:latin typeface="Times New Roman" panose="02020603050405020304" pitchFamily="18" charset="0"/>
+                <a:cs typeface="Times New Roman" panose="02020603050405020304" pitchFamily="18" charset="0"/>
+              </a:rPr>
+              <a:t>Differentiates System Administrators (full platform access) from Maintenance Engineers (work order execution only).</a:t>
+            </a:r>
+          </a:p>
+          <a:p>
+            <a:pPr algn="just">
+              <a:spcBef>
+                <a:spcPts val="800"/>
+              </a:spcBef>
+            </a:pPr>
+            <a:r>
+              <a:rPr sz="1400" b="1" dirty="0">
+                <a:solidFill>
+                  <a:srgbClr val="F59E0B"/>
+                </a:solidFill>
+                <a:latin typeface="Times New Roman" panose="02020603050405020304" pitchFamily="18" charset="0"/>
+                <a:cs typeface="Times New Roman" panose="02020603050405020304" pitchFamily="18" charset="0"/>
+              </a:rPr>
+              <a:t>• Session &amp; Credential Protection: </a:t>
+            </a:r>
+            <a:r>
+              <a:rPr sz="1400" dirty="0">
+                <a:solidFill>
+                  <a:srgbClr val="E2E8F0"/>
+                </a:solidFill>
+                <a:latin typeface="Times New Roman" panose="02020603050405020304" pitchFamily="18" charset="0"/>
+                <a:cs typeface="Times New Roman" panose="02020603050405020304" pitchFamily="18" charset="0"/>
+              </a:rPr>
+              <a:t>Session-based state persistence with server-side validation and password security.</a:t>
+            </a:r>
+          </a:p>
+          <a:p>
+            <a:pPr algn="just">
+              <a:spcBef>
+                <a:spcPts val="800"/>
+              </a:spcBef>
+            </a:pPr>
+            <a:r>
+              <a:rPr sz="1400" b="1" dirty="0">
+                <a:solidFill>
+                  <a:srgbClr val="F59E0B"/>
+                </a:solidFill>
+                <a:latin typeface="Times New Roman" panose="02020603050405020304" pitchFamily="18" charset="0"/>
+                <a:cs typeface="Times New Roman" panose="02020603050405020304" pitchFamily="18" charset="0"/>
+              </a:rPr>
+              <a:t>• Dual Theme Accessibility Engine: </a:t>
+            </a:r>
+            <a:r>
+              <a:rPr sz="1400" dirty="0">
+                <a:solidFill>
+                  <a:srgbClr val="E2E8F0"/>
+                </a:solidFill>
+                <a:latin typeface="Times New Roman" panose="02020603050405020304" pitchFamily="18" charset="0"/>
+                <a:cs typeface="Times New Roman" panose="02020603050405020304" pitchFamily="18" charset="0"/>
+              </a:rPr>
+              <a:t>One-tap dark/light mode toggle utilizing CSS custom variables to accommodate diverse industrial lighting environments.</a:t>
+            </a:r>
+          </a:p>
+        </p:txBody>
+      </p:sp>
     </p:spTree>
   </p:cSld>
   <p:clrMapOvr>
@@ -3661,13 +6189,13 @@
 </p:sld>
 </file>
 
-<file path=ppt/slides/slide11.xml><?xml version="1.0" encoding="utf-8"?>
-<p:sld xmlns:a="http://schemas.openxmlformats.org/drawingml/2006/main" xmlns:p="http://schemas.openxmlformats.org/presentationml/2006/main" xmlns:r="http://schemas.openxmlformats.org/officeDocument/2006/relationships">
+<file path=ppt/slides/slide5.xml><?xml version="1.0" encoding="utf-8"?>
+<p:sld xmlns:a="http://schemas.openxmlformats.org/drawingml/2006/main" xmlns:r="http://schemas.openxmlformats.org/officeDocument/2006/relationships" xmlns:p="http://schemas.openxmlformats.org/presentationml/2006/main">
   <p:cSld>
     <p:bg>
       <p:bgPr>
         <a:solidFill>
-          <a:srgbClr val="0F172A"/>
+          <a:srgbClr val="0B132B"/>
         </a:solidFill>
         <a:effectLst/>
       </p:bgPr>
@@ -3678,27 +6206,40 @@
         <p:cNvGrpSpPr/>
         <p:nvPr/>
       </p:nvGrpSpPr>
-      <p:grpSpPr/>
-      <p:sp>
-        <p:nvSpPr>
-          <p:cNvPr id="2" name="Rectangle 1"/>
+      <p:grpSpPr>
+        <a:xfrm>
+          <a:off x="0" y="0"/>
+          <a:ext cx="0" cy="0"/>
+          <a:chOff x="0" y="0"/>
+          <a:chExt cx="0" cy="0"/>
+        </a:xfrm>
+      </p:grpSpPr>
+      <p:sp>
+        <p:nvSpPr>
+          <p:cNvPr id="9" name="Rectangle 8">
+            <a:extLst>
+              <a:ext uri="{FF2B5EF4-FFF2-40B4-BE49-F238E27FC236}">
+                <a16:creationId xmlns:a16="http://schemas.microsoft.com/office/drawing/2014/main" id="{E029F04E-F5B0-59E7-AE72-40F43B32E2FA}"/>
+              </a:ext>
+            </a:extLst>
+          </p:cNvPr>
           <p:cNvSpPr/>
           <p:nvPr/>
         </p:nvSpPr>
         <p:spPr>
           <a:xfrm>
-            <a:off x="731520" y="365760"/>
-            <a:ext cx="10728655" cy="777240"/>
+            <a:off x="334298" y="320040"/>
+            <a:ext cx="11543070" cy="822960"/>
           </a:xfrm>
           <a:prstGeom prst="rect">
             <a:avLst/>
           </a:prstGeom>
           <a:solidFill>
-            <a:srgbClr val="1E293B"/>
+            <a:srgbClr val="152238"/>
           </a:solidFill>
           <a:ln w="12700">
             <a:solidFill>
-              <a:srgbClr val="334155"/>
+              <a:srgbClr val="2A3C5A"/>
             </a:solidFill>
           </a:ln>
         </p:spPr>
@@ -3721,6 +6262,7 @@
           <a:lstStyle/>
           <a:p>
             <a:pPr algn="ctr"/>
+            <a:endParaRPr/>
           </a:p>
         </p:txBody>
       </p:sp>
@@ -3732,8 +6274,8 @@
         </p:nvSpPr>
         <p:spPr>
           <a:xfrm>
-            <a:off x="914400" y="384048"/>
-            <a:ext cx="10332720" cy="731520"/>
+            <a:off x="914400" y="492993"/>
+            <a:ext cx="10362895" cy="477054"/>
           </a:xfrm>
           <a:prstGeom prst="rect">
             <a:avLst/>
@@ -3746,29 +6288,31 @@
           </a:bodyPr>
           <a:lstStyle/>
           <a:p>
-            <a:pPr>
-              <a:defRPr sz="1000" b="1">
-                <a:solidFill>
-                  <a:srgbClr val="00F2FE"/>
+            <a:pPr algn="ctr">
+              <a:defRPr sz="2000" b="1">
+                <a:solidFill>
+                  <a:srgbClr val="FFFFFF"/>
                 </a:solidFill>
                 <a:latin typeface="Arial"/>
               </a:defRPr>
             </a:pPr>
             <a:r>
-              <a:t>U21CS504 - WEB TECHNOLOGIES LABORATORY</a:t>
-            </a:r>
-          </a:p>
-          <a:p>
-            <a:pPr>
-              <a:defRPr sz="2000" b="1">
-                <a:solidFill>
-                  <a:srgbClr val="FFFFFF"/>
+              <a:rPr dirty="0"/>
+              <a:t>Executive Fleet Dashboard &amp; Real-Time Telemetry</a:t>
+            </a:r>
+          </a:p>
+          <a:p>
+            <a:pPr algn="ctr">
+              <a:defRPr sz="1100" b="1">
+                <a:solidFill>
+                  <a:srgbClr val="F59E0B"/>
                 </a:solidFill>
                 <a:latin typeface="Arial"/>
               </a:defRPr>
             </a:pPr>
             <a:r>
-              <a:t>10. Real-Time Analytics &amp; Chart Visualizations</a:t>
+              <a:rPr dirty="0"/>
+              <a:t>Centralized Command Center Monitoring Equipment Health, Active Orders, and MTTR</a:t>
             </a:r>
           </a:p>
         </p:txBody>
@@ -3781,18 +6325,18 @@
         </p:nvSpPr>
         <p:spPr>
           <a:xfrm>
-            <a:off x="731520" y="1325880"/>
-            <a:ext cx="4114800" cy="5120640"/>
+            <a:off x="334298" y="1325880"/>
+            <a:ext cx="7220994" cy="5029200"/>
           </a:xfrm>
           <a:prstGeom prst="rect">
             <a:avLst/>
           </a:prstGeom>
           <a:solidFill>
-            <a:srgbClr val="1E293B"/>
+            <a:srgbClr val="152238"/>
           </a:solidFill>
           <a:ln w="12700">
             <a:solidFill>
-              <a:srgbClr val="334155"/>
+              <a:srgbClr val="38BDF8"/>
             </a:solidFill>
           </a:ln>
         </p:spPr>
@@ -3815,141 +6359,13 @@
           <a:lstStyle/>
           <a:p>
             <a:pPr algn="ctr"/>
-          </a:p>
-        </p:txBody>
-      </p:sp>
-      <p:sp>
-        <p:nvSpPr>
-          <p:cNvPr id="5" name="TextBox 4"/>
-          <p:cNvSpPr txBox="1"/>
-          <p:nvPr/>
-        </p:nvSpPr>
-        <p:spPr>
-          <a:xfrm>
-            <a:off x="914400" y="1508760"/>
-            <a:ext cx="3749040" cy="4754880"/>
-          </a:xfrm>
-          <a:prstGeom prst="rect">
-            <a:avLst/>
-          </a:prstGeom>
-          <a:noFill/>
-        </p:spPr>
-        <p:txBody>
-          <a:bodyPr wrap="square">
-            <a:spAutoFit/>
-          </a:bodyPr>
-          <a:lstStyle/>
-          <a:p>
-            <a:pPr>
-              <a:defRPr sz="1600" b="1">
-                <a:solidFill>
-                  <a:srgbClr val="00F2FE"/>
-                </a:solidFill>
-                <a:latin typeface="Arial"/>
-              </a:defRPr>
-            </a:pPr>
-            <a:r>
-              <a:t>Key Capabilities &amp; Details</a:t>
-            </a:r>
-          </a:p>
-          <a:p>
-            <a:pPr>
-              <a:spcBef>
-                <a:spcPts val="800"/>
-              </a:spcBef>
-              <a:defRPr sz="1300">
-                <a:solidFill>
-                  <a:srgbClr val="CBD5E1"/>
-                </a:solidFill>
-                <a:latin typeface="Arial"/>
-              </a:defRPr>
-            </a:pPr>
-            <a:r>
-              <a:t>• Interactive Chart.js visual charts: Unplanned Downtime Bar Chart, Cost Distribution Doughnut Chart, and Machine Distribution Polar Area Chart.</a:t>
-            </a:r>
-          </a:p>
-          <a:p>
-            <a:pPr>
-              <a:spcBef>
-                <a:spcPts val="800"/>
-              </a:spcBef>
-              <a:defRPr sz="1300">
-                <a:solidFill>
-                  <a:srgbClr val="CBD5E1"/>
-                </a:solidFill>
-                <a:latin typeface="Arial"/>
-              </a:defRPr>
-            </a:pPr>
-            <a:r>
-              <a:t>• Live period, unit, and machine type filter controls.</a:t>
-            </a:r>
-          </a:p>
-          <a:p>
-            <a:pPr>
-              <a:spcBef>
-                <a:spcPts val="800"/>
-              </a:spcBef>
-              <a:defRPr sz="1300">
-                <a:solidFill>
-                  <a:srgbClr val="CBD5E1"/>
-                </a:solidFill>
-                <a:latin typeface="Arial"/>
-              </a:defRPr>
-            </a:pPr>
-            <a:r>
-              <a:t>• 100% Theme-Adaptive: Grid lines, ticks, tooltips, and legends update dynamically on theme toggle.</a:t>
-            </a:r>
-          </a:p>
-        </p:txBody>
-      </p:sp>
-      <p:sp>
-        <p:nvSpPr>
-          <p:cNvPr id="6" name="Rectangle 5"/>
-          <p:cNvSpPr/>
-          <p:nvPr/>
-        </p:nvSpPr>
-        <p:spPr>
-          <a:xfrm>
-            <a:off x="5029200" y="1325880"/>
-            <a:ext cx="6430975" cy="5120640"/>
-          </a:xfrm>
-          <a:prstGeom prst="rect">
-            <a:avLst/>
-          </a:prstGeom>
-          <a:solidFill>
-            <a:srgbClr val="1E293B"/>
-          </a:solidFill>
-          <a:ln w="12700">
-            <a:solidFill>
-              <a:srgbClr val="00F2FE"/>
-            </a:solidFill>
-          </a:ln>
-        </p:spPr>
-        <p:style>
-          <a:lnRef idx="1">
-            <a:schemeClr val="accent1"/>
-          </a:lnRef>
-          <a:fillRef idx="3">
-            <a:schemeClr val="accent1"/>
-          </a:fillRef>
-          <a:effectRef idx="2">
-            <a:schemeClr val="accent1"/>
-          </a:effectRef>
-          <a:fontRef idx="minor">
-            <a:schemeClr val="lt1"/>
-          </a:fontRef>
-        </p:style>
-        <p:txBody>
-          <a:bodyPr rtlCol="0" anchor="ctr"/>
-          <a:lstStyle/>
-          <a:p>
-            <a:pPr algn="ctr"/>
+            <a:endParaRPr/>
           </a:p>
         </p:txBody>
       </p:sp>
       <p:pic>
         <p:nvPicPr>
-          <p:cNvPr id="7" name="Picture 6" descr="06_analytics_dashboard.png"/>
+          <p:cNvPr id="5" name="Picture 4" descr="02_admin_dashboard.png"/>
           <p:cNvPicPr>
             <a:picLocks noChangeAspect="1"/>
           </p:cNvPicPr>
@@ -3963,14 +6379,320 @@
         </p:blipFill>
         <p:spPr>
           <a:xfrm>
-            <a:off x="5120640" y="1417320"/>
-            <a:ext cx="6248095" cy="4937760"/>
+            <a:off x="403923" y="1399032"/>
+            <a:ext cx="7072713" cy="4663440"/>
           </a:xfrm>
           <a:prstGeom prst="rect">
             <a:avLst/>
           </a:prstGeom>
         </p:spPr>
       </p:pic>
+      <p:sp>
+        <p:nvSpPr>
+          <p:cNvPr id="6" name="TextBox 5"/>
+          <p:cNvSpPr txBox="1"/>
+          <p:nvPr/>
+        </p:nvSpPr>
+        <p:spPr>
+          <a:xfrm>
+            <a:off x="1018715" y="6130610"/>
+            <a:ext cx="5852160" cy="256032"/>
+          </a:xfrm>
+          <a:prstGeom prst="rect">
+            <a:avLst/>
+          </a:prstGeom>
+          <a:noFill/>
+        </p:spPr>
+        <p:txBody>
+          <a:bodyPr wrap="square" tIns="0">
+            <a:spAutoFit/>
+          </a:bodyPr>
+          <a:lstStyle/>
+          <a:p>
+            <a:pPr algn="ctr">
+              <a:defRPr sz="1000" b="1">
+                <a:solidFill>
+                  <a:srgbClr val="94A3B8"/>
+                </a:solidFill>
+                <a:latin typeface="Arial"/>
+              </a:defRPr>
+            </a:pPr>
+            <a:r>
+              <a:t>PlantPulse Central Executive Dashboard Interface</a:t>
+            </a:r>
+          </a:p>
+        </p:txBody>
+      </p:sp>
+      <p:sp>
+        <p:nvSpPr>
+          <p:cNvPr id="7" name="Rectangle 6"/>
+          <p:cNvSpPr/>
+          <p:nvPr/>
+        </p:nvSpPr>
+        <p:spPr>
+          <a:xfrm>
+            <a:off x="7699335" y="1325880"/>
+            <a:ext cx="4154129" cy="5029200"/>
+          </a:xfrm>
+          <a:prstGeom prst="rect">
+            <a:avLst/>
+          </a:prstGeom>
+          <a:solidFill>
+            <a:srgbClr val="152238"/>
+          </a:solidFill>
+          <a:ln w="12700">
+            <a:solidFill>
+              <a:srgbClr val="2A3C5A"/>
+            </a:solidFill>
+          </a:ln>
+        </p:spPr>
+        <p:style>
+          <a:lnRef idx="1">
+            <a:schemeClr val="accent1"/>
+          </a:lnRef>
+          <a:fillRef idx="3">
+            <a:schemeClr val="accent1"/>
+          </a:fillRef>
+          <a:effectRef idx="2">
+            <a:schemeClr val="accent1"/>
+          </a:effectRef>
+          <a:fontRef idx="minor">
+            <a:schemeClr val="lt1"/>
+          </a:fontRef>
+        </p:style>
+        <p:txBody>
+          <a:bodyPr rtlCol="0" anchor="ctr"/>
+          <a:lstStyle/>
+          <a:p>
+            <a:pPr algn="ctr"/>
+            <a:endParaRPr/>
+          </a:p>
+        </p:txBody>
+      </p:sp>
+      <p:sp>
+        <p:nvSpPr>
+          <p:cNvPr id="8" name="TextBox 7"/>
+          <p:cNvSpPr txBox="1"/>
+          <p:nvPr/>
+        </p:nvSpPr>
+        <p:spPr>
+          <a:xfrm>
+            <a:off x="7843377" y="1474700"/>
+            <a:ext cx="3866044" cy="3852337"/>
+          </a:xfrm>
+          <a:prstGeom prst="rect">
+            <a:avLst/>
+          </a:prstGeom>
+          <a:noFill/>
+        </p:spPr>
+        <p:txBody>
+          <a:bodyPr wrap="square" tIns="0" bIns="0">
+            <a:spAutoFit/>
+          </a:bodyPr>
+          <a:lstStyle/>
+          <a:p>
+            <a:pPr algn="just">
+              <a:defRPr sz="1500" b="1">
+                <a:solidFill>
+                  <a:srgbClr val="38BDF8"/>
+                </a:solidFill>
+                <a:latin typeface="Arial"/>
+              </a:defRPr>
+            </a:pPr>
+            <a:r>
+              <a:rPr sz="1500" dirty="0">
+                <a:latin typeface="Arial" panose="020B0604020202020204" pitchFamily="34" charset="0"/>
+                <a:cs typeface="Arial" panose="020B0604020202020204" pitchFamily="34" charset="0"/>
+              </a:rPr>
+              <a:t>Dashboard Capabilities</a:t>
+            </a:r>
+          </a:p>
+          <a:p>
+            <a:pPr algn="just">
+              <a:spcBef>
+                <a:spcPts val="800"/>
+              </a:spcBef>
+            </a:pPr>
+            <a:r>
+              <a:rPr sz="1400" b="1" dirty="0">
+                <a:solidFill>
+                  <a:srgbClr val="F59E0B"/>
+                </a:solidFill>
+                <a:latin typeface="Times New Roman" panose="02020603050405020304" pitchFamily="18" charset="0"/>
+                <a:cs typeface="Times New Roman" panose="02020603050405020304" pitchFamily="18" charset="0"/>
+              </a:rPr>
+              <a:t>• Overall Fleet Health Index: </a:t>
+            </a:r>
+            <a:endParaRPr lang="en-US" sz="1400" b="1" dirty="0">
+              <a:solidFill>
+                <a:srgbClr val="F59E0B"/>
+              </a:solidFill>
+              <a:latin typeface="Times New Roman" panose="02020603050405020304" pitchFamily="18" charset="0"/>
+              <a:cs typeface="Times New Roman" panose="02020603050405020304" pitchFamily="18" charset="0"/>
+            </a:endParaRPr>
+          </a:p>
+          <a:p>
+            <a:pPr algn="just">
+              <a:spcBef>
+                <a:spcPts val="800"/>
+              </a:spcBef>
+            </a:pPr>
+            <a:r>
+              <a:rPr sz="1400" dirty="0">
+                <a:solidFill>
+                  <a:srgbClr val="E2E8F0"/>
+                </a:solidFill>
+                <a:latin typeface="Times New Roman" panose="02020603050405020304" pitchFamily="18" charset="0"/>
+                <a:cs typeface="Times New Roman" panose="02020603050405020304" pitchFamily="18" charset="0"/>
+              </a:rPr>
+              <a:t>Displays an aggregated health percentage gauge (92%) calculating live plant operational readiness.</a:t>
+            </a:r>
+          </a:p>
+          <a:p>
+            <a:pPr algn="just">
+              <a:spcBef>
+                <a:spcPts val="800"/>
+              </a:spcBef>
+            </a:pPr>
+            <a:r>
+              <a:rPr sz="1400" b="1" dirty="0">
+                <a:solidFill>
+                  <a:srgbClr val="F59E0B"/>
+                </a:solidFill>
+                <a:latin typeface="Times New Roman" panose="02020603050405020304" pitchFamily="18" charset="0"/>
+                <a:cs typeface="Times New Roman" panose="02020603050405020304" pitchFamily="18" charset="0"/>
+              </a:rPr>
+              <a:t>• Key Metric Tiles: </a:t>
+            </a:r>
+            <a:endParaRPr lang="en-US" sz="1400" b="1" dirty="0">
+              <a:solidFill>
+                <a:srgbClr val="F59E0B"/>
+              </a:solidFill>
+              <a:latin typeface="Times New Roman" panose="02020603050405020304" pitchFamily="18" charset="0"/>
+              <a:cs typeface="Times New Roman" panose="02020603050405020304" pitchFamily="18" charset="0"/>
+            </a:endParaRPr>
+          </a:p>
+          <a:p>
+            <a:pPr algn="just">
+              <a:spcBef>
+                <a:spcPts val="800"/>
+              </a:spcBef>
+            </a:pPr>
+            <a:r>
+              <a:rPr sz="1400" dirty="0">
+                <a:solidFill>
+                  <a:srgbClr val="E2E8F0"/>
+                </a:solidFill>
+                <a:latin typeface="Times New Roman" panose="02020603050405020304" pitchFamily="18" charset="0"/>
+                <a:cs typeface="Times New Roman" panose="02020603050405020304" pitchFamily="18" charset="0"/>
+              </a:rPr>
+              <a:t>Real-time indicators for Total Active Assets (48), Critical Alerts (3), and Pending Work Orders (12).</a:t>
+            </a:r>
+          </a:p>
+          <a:p>
+            <a:pPr algn="just">
+              <a:spcBef>
+                <a:spcPts val="800"/>
+              </a:spcBef>
+            </a:pPr>
+            <a:r>
+              <a:rPr sz="1400" b="1" dirty="0">
+                <a:solidFill>
+                  <a:srgbClr val="F59E0B"/>
+                </a:solidFill>
+                <a:latin typeface="Times New Roman" panose="02020603050405020304" pitchFamily="18" charset="0"/>
+                <a:cs typeface="Times New Roman" panose="02020603050405020304" pitchFamily="18" charset="0"/>
+              </a:rPr>
+              <a:t>• MTTR Analytics: </a:t>
+            </a:r>
+            <a:endParaRPr lang="en-US" sz="1400" b="1" dirty="0">
+              <a:solidFill>
+                <a:srgbClr val="F59E0B"/>
+              </a:solidFill>
+              <a:latin typeface="Times New Roman" panose="02020603050405020304" pitchFamily="18" charset="0"/>
+              <a:cs typeface="Times New Roman" panose="02020603050405020304" pitchFamily="18" charset="0"/>
+            </a:endParaRPr>
+          </a:p>
+          <a:p>
+            <a:pPr algn="just">
+              <a:spcBef>
+                <a:spcPts val="800"/>
+              </a:spcBef>
+            </a:pPr>
+            <a:r>
+              <a:rPr sz="1400" dirty="0">
+                <a:solidFill>
+                  <a:srgbClr val="E2E8F0"/>
+                </a:solidFill>
+                <a:latin typeface="Times New Roman" panose="02020603050405020304" pitchFamily="18" charset="0"/>
+                <a:cs typeface="Times New Roman" panose="02020603050405020304" pitchFamily="18" charset="0"/>
+              </a:rPr>
+              <a:t>Tracks Mean Time to Repair (averaging 2.4 </a:t>
+            </a:r>
+            <a:r>
+              <a:rPr sz="1400" dirty="0" err="1">
+                <a:solidFill>
+                  <a:srgbClr val="E2E8F0"/>
+                </a:solidFill>
+                <a:latin typeface="Times New Roman" panose="02020603050405020304" pitchFamily="18" charset="0"/>
+                <a:cs typeface="Times New Roman" panose="02020603050405020304" pitchFamily="18" charset="0"/>
+              </a:rPr>
+              <a:t>hrs</a:t>
+            </a:r>
+            <a:r>
+              <a:rPr sz="1400" dirty="0">
+                <a:solidFill>
+                  <a:srgbClr val="E2E8F0"/>
+                </a:solidFill>
+                <a:latin typeface="Times New Roman" panose="02020603050405020304" pitchFamily="18" charset="0"/>
+                <a:cs typeface="Times New Roman" panose="02020603050405020304" pitchFamily="18" charset="0"/>
+              </a:rPr>
+              <a:t>) to quantify maintenance technician efficiency.</a:t>
+            </a:r>
+          </a:p>
+          <a:p>
+            <a:pPr algn="just">
+              <a:spcBef>
+                <a:spcPts val="800"/>
+              </a:spcBef>
+            </a:pPr>
+            <a:r>
+              <a:rPr sz="1400" b="1" dirty="0">
+                <a:solidFill>
+                  <a:srgbClr val="F59E0B"/>
+                </a:solidFill>
+                <a:latin typeface="Times New Roman" panose="02020603050405020304" pitchFamily="18" charset="0"/>
+                <a:cs typeface="Times New Roman" panose="02020603050405020304" pitchFamily="18" charset="0"/>
+              </a:rPr>
+              <a:t>• Instant Action Bar: </a:t>
+            </a:r>
+            <a:endParaRPr lang="en-US" sz="1400" b="1" dirty="0">
+              <a:solidFill>
+                <a:srgbClr val="F59E0B"/>
+              </a:solidFill>
+              <a:latin typeface="Times New Roman" panose="02020603050405020304" pitchFamily="18" charset="0"/>
+              <a:cs typeface="Times New Roman" panose="02020603050405020304" pitchFamily="18" charset="0"/>
+            </a:endParaRPr>
+          </a:p>
+          <a:p>
+            <a:pPr algn="just">
+              <a:spcBef>
+                <a:spcPts val="800"/>
+              </a:spcBef>
+            </a:pPr>
+            <a:r>
+              <a:rPr sz="1400" dirty="0">
+                <a:solidFill>
+                  <a:srgbClr val="E2E8F0"/>
+                </a:solidFill>
+                <a:latin typeface="Times New Roman" panose="02020603050405020304" pitchFamily="18" charset="0"/>
+                <a:cs typeface="Times New Roman" panose="02020603050405020304" pitchFamily="18" charset="0"/>
+              </a:rPr>
+              <a:t>Direct shortcuts for logging emergency work orders and commissioning new industrial equipment.</a:t>
+            </a:r>
+          </a:p>
+        </p:txBody>
+      </p:sp>
     </p:spTree>
   </p:cSld>
   <p:clrMapOvr>
@@ -3979,13 +6701,13 @@
 </p:sld>
 </file>
 
-<file path=ppt/slides/slide12.xml><?xml version="1.0" encoding="utf-8"?>
-<p:sld xmlns:a="http://schemas.openxmlformats.org/drawingml/2006/main" xmlns:p="http://schemas.openxmlformats.org/presentationml/2006/main" xmlns:r="http://schemas.openxmlformats.org/officeDocument/2006/relationships">
+<file path=ppt/slides/slide6.xml><?xml version="1.0" encoding="utf-8"?>
+<p:sld xmlns:a="http://schemas.openxmlformats.org/drawingml/2006/main" xmlns:r="http://schemas.openxmlformats.org/officeDocument/2006/relationships" xmlns:p="http://schemas.openxmlformats.org/presentationml/2006/main">
   <p:cSld>
     <p:bg>
       <p:bgPr>
         <a:solidFill>
-          <a:srgbClr val="0F172A"/>
+          <a:srgbClr val="0B132B"/>
         </a:solidFill>
         <a:effectLst/>
       </p:bgPr>
@@ -3996,7 +6718,14 @@
         <p:cNvGrpSpPr/>
         <p:nvPr/>
       </p:nvGrpSpPr>
-      <p:grpSpPr/>
+      <p:grpSpPr>
+        <a:xfrm>
+          <a:off x="0" y="0"/>
+          <a:ext cx="0" cy="0"/>
+          <a:chOff x="0" y="0"/>
+          <a:chExt cx="0" cy="0"/>
+        </a:xfrm>
+      </p:grpSpPr>
       <p:sp>
         <p:nvSpPr>
           <p:cNvPr id="2" name="Rectangle 1"/>
@@ -4005,18 +6734,18 @@
         </p:nvSpPr>
         <p:spPr>
           <a:xfrm>
-            <a:off x="731520" y="365760"/>
-            <a:ext cx="10728655" cy="777240"/>
+            <a:off x="330366" y="320040"/>
+            <a:ext cx="11548968" cy="822960"/>
           </a:xfrm>
           <a:prstGeom prst="rect">
             <a:avLst/>
           </a:prstGeom>
           <a:solidFill>
-            <a:srgbClr val="1E293B"/>
+            <a:srgbClr val="152238"/>
           </a:solidFill>
           <a:ln w="12700">
             <a:solidFill>
-              <a:srgbClr val="334155"/>
+              <a:srgbClr val="2A3C5A"/>
             </a:solidFill>
           </a:ln>
         </p:spPr>
@@ -4039,6 +6768,7 @@
           <a:lstStyle/>
           <a:p>
             <a:pPr algn="ctr"/>
+            <a:endParaRPr/>
           </a:p>
         </p:txBody>
       </p:sp>
@@ -4050,8 +6780,8 @@
         </p:nvSpPr>
         <p:spPr>
           <a:xfrm>
-            <a:off x="914400" y="384048"/>
-            <a:ext cx="10332720" cy="731520"/>
+            <a:off x="914400" y="493927"/>
+            <a:ext cx="10362895" cy="477054"/>
           </a:xfrm>
           <a:prstGeom prst="rect">
             <a:avLst/>
@@ -4064,29 +6794,31 @@
           </a:bodyPr>
           <a:lstStyle/>
           <a:p>
-            <a:pPr>
-              <a:defRPr sz="1000" b="1">
-                <a:solidFill>
-                  <a:srgbClr val="00F2FE"/>
+            <a:pPr algn="ctr">
+              <a:defRPr sz="2000" b="1">
+                <a:solidFill>
+                  <a:srgbClr val="FFFFFF"/>
                 </a:solidFill>
                 <a:latin typeface="Arial"/>
               </a:defRPr>
             </a:pPr>
             <a:r>
-              <a:t>U21CS504 - WEB TECHNOLOGIES LABORATORY</a:t>
-            </a:r>
-          </a:p>
-          <a:p>
-            <a:pPr>
-              <a:defRPr sz="2000" b="1">
-                <a:solidFill>
-                  <a:srgbClr val="FFFFFF"/>
+              <a:rPr dirty="0"/>
+              <a:t>Industrial Asset Management &amp; Predictive Health</a:t>
+            </a:r>
+          </a:p>
+          <a:p>
+            <a:pPr algn="ctr">
+              <a:defRPr sz="1100" b="1">
+                <a:solidFill>
+                  <a:srgbClr val="F59E0B"/>
                 </a:solidFill>
                 <a:latin typeface="Arial"/>
               </a:defRPr>
             </a:pPr>
             <a:r>
-              <a:t>11. Predictive Health Scoring &amp; Telemetry Alarms</a:t>
+              <a:rPr dirty="0"/>
+              <a:t>Comprehensive Equipment Tracking with Automated Health Scoring &amp; Maintenance Logs</a:t>
             </a:r>
           </a:p>
         </p:txBody>
@@ -4099,18 +6831,18 @@
         </p:nvSpPr>
         <p:spPr>
           <a:xfrm>
-            <a:off x="731520" y="1325880"/>
-            <a:ext cx="4114800" cy="5120640"/>
+            <a:off x="330366" y="1325880"/>
+            <a:ext cx="7623930" cy="5029200"/>
           </a:xfrm>
           <a:prstGeom prst="rect">
             <a:avLst/>
           </a:prstGeom>
           <a:solidFill>
-            <a:srgbClr val="1E293B"/>
+            <a:srgbClr val="152238"/>
           </a:solidFill>
           <a:ln w="12700">
             <a:solidFill>
-              <a:srgbClr val="334155"/>
+              <a:srgbClr val="38BDF8"/>
             </a:solidFill>
           </a:ln>
         </p:spPr>
@@ -4133,157 +6865,13 @@
           <a:lstStyle/>
           <a:p>
             <a:pPr algn="ctr"/>
-          </a:p>
-        </p:txBody>
-      </p:sp>
-      <p:sp>
-        <p:nvSpPr>
-          <p:cNvPr id="5" name="TextBox 4"/>
-          <p:cNvSpPr txBox="1"/>
-          <p:nvPr/>
-        </p:nvSpPr>
-        <p:spPr>
-          <a:xfrm>
-            <a:off x="914400" y="1508760"/>
-            <a:ext cx="3749040" cy="4754880"/>
-          </a:xfrm>
-          <a:prstGeom prst="rect">
-            <a:avLst/>
-          </a:prstGeom>
-          <a:noFill/>
-        </p:spPr>
-        <p:txBody>
-          <a:bodyPr wrap="square">
-            <a:spAutoFit/>
-          </a:bodyPr>
-          <a:lstStyle/>
-          <a:p>
-            <a:pPr>
-              <a:defRPr sz="1600" b="1">
-                <a:solidFill>
-                  <a:srgbClr val="00F2FE"/>
-                </a:solidFill>
-                <a:latin typeface="Arial"/>
-              </a:defRPr>
-            </a:pPr>
-            <a:r>
-              <a:t>Key Capabilities &amp; Details</a:t>
-            </a:r>
-          </a:p>
-          <a:p>
-            <a:pPr>
-              <a:spcBef>
-                <a:spcPts val="800"/>
-              </a:spcBef>
-              <a:defRPr sz="1300">
-                <a:solidFill>
-                  <a:srgbClr val="CBD5E1"/>
-                </a:solidFill>
-                <a:latin typeface="Arial"/>
-              </a:defRPr>
-            </a:pPr>
-            <a:r>
-              <a:t>• Central Alert Center highlighting CRITICAL, WARNING, and INFO telemetry alarms.</a:t>
-            </a:r>
-          </a:p>
-          <a:p>
-            <a:pPr>
-              <a:spcBef>
-                <a:spcPts val="800"/>
-              </a:spcBef>
-              <a:defRPr sz="1300">
-                <a:solidFill>
-                  <a:srgbClr val="CBD5E1"/>
-                </a:solidFill>
-                <a:latin typeface="Arial"/>
-              </a:defRPr>
-            </a:pPr>
-            <a:r>
-              <a:t>• Mathematical health score degradation scoring analyzing vibration, temperature, and operating hours.</a:t>
-            </a:r>
-          </a:p>
-          <a:p>
-            <a:pPr>
-              <a:spcBef>
-                <a:spcPts val="800"/>
-              </a:spcBef>
-              <a:defRPr sz="1300">
-                <a:solidFill>
-                  <a:srgbClr val="CBD5E1"/>
-                </a:solidFill>
-                <a:latin typeface="Arial"/>
-              </a:defRPr>
-            </a:pPr>
-            <a:r>
-              <a:t>• Interactive formula modal detailing machine degradation factors.</a:t>
-            </a:r>
-          </a:p>
-          <a:p>
-            <a:pPr>
-              <a:spcBef>
-                <a:spcPts val="800"/>
-              </a:spcBef>
-              <a:defRPr sz="1300">
-                <a:solidFill>
-                  <a:srgbClr val="CBD5E1"/>
-                </a:solidFill>
-                <a:latin typeface="Arial"/>
-              </a:defRPr>
-            </a:pPr>
-            <a:r>
-              <a:t>• Mark-as-read status toggle synced with MySQL database.</a:t>
-            </a:r>
-          </a:p>
-        </p:txBody>
-      </p:sp>
-      <p:sp>
-        <p:nvSpPr>
-          <p:cNvPr id="6" name="Rectangle 5"/>
-          <p:cNvSpPr/>
-          <p:nvPr/>
-        </p:nvSpPr>
-        <p:spPr>
-          <a:xfrm>
-            <a:off x="5029200" y="1325880"/>
-            <a:ext cx="6430975" cy="5120640"/>
-          </a:xfrm>
-          <a:prstGeom prst="rect">
-            <a:avLst/>
-          </a:prstGeom>
-          <a:solidFill>
-            <a:srgbClr val="1E293B"/>
-          </a:solidFill>
-          <a:ln w="12700">
-            <a:solidFill>
-              <a:srgbClr val="00F2FE"/>
-            </a:solidFill>
-          </a:ln>
-        </p:spPr>
-        <p:style>
-          <a:lnRef idx="1">
-            <a:schemeClr val="accent1"/>
-          </a:lnRef>
-          <a:fillRef idx="3">
-            <a:schemeClr val="accent1"/>
-          </a:fillRef>
-          <a:effectRef idx="2">
-            <a:schemeClr val="accent1"/>
-          </a:effectRef>
-          <a:fontRef idx="minor">
-            <a:schemeClr val="lt1"/>
-          </a:fontRef>
-        </p:style>
-        <p:txBody>
-          <a:bodyPr rtlCol="0" anchor="ctr"/>
-          <a:lstStyle/>
-          <a:p>
-            <a:pPr algn="ctr"/>
+            <a:endParaRPr/>
           </a:p>
         </p:txBody>
       </p:sp>
       <p:pic>
         <p:nvPicPr>
-          <p:cNvPr id="7" name="Picture 6" descr="07_alert_center.png"/>
+          <p:cNvPr id="5" name="Picture 4" descr="03_assets_management.png"/>
           <p:cNvPicPr>
             <a:picLocks noChangeAspect="1"/>
           </p:cNvPicPr>
@@ -4297,14 +6885,307 @@
         </p:blipFill>
         <p:spPr>
           <a:xfrm>
-            <a:off x="5120640" y="1417320"/>
-            <a:ext cx="6248095" cy="4937760"/>
+            <a:off x="396240" y="1389200"/>
+            <a:ext cx="7499063" cy="4663440"/>
           </a:xfrm>
           <a:prstGeom prst="rect">
             <a:avLst/>
           </a:prstGeom>
         </p:spPr>
       </p:pic>
+      <p:sp>
+        <p:nvSpPr>
+          <p:cNvPr id="6" name="TextBox 5"/>
+          <p:cNvSpPr txBox="1"/>
+          <p:nvPr/>
+        </p:nvSpPr>
+        <p:spPr>
+          <a:xfrm>
+            <a:off x="1239355" y="6130058"/>
+            <a:ext cx="5852160" cy="256032"/>
+          </a:xfrm>
+          <a:prstGeom prst="rect">
+            <a:avLst/>
+          </a:prstGeom>
+          <a:noFill/>
+        </p:spPr>
+        <p:txBody>
+          <a:bodyPr wrap="square" tIns="0">
+            <a:spAutoFit/>
+          </a:bodyPr>
+          <a:lstStyle/>
+          <a:p>
+            <a:pPr algn="ctr">
+              <a:defRPr sz="1000" b="1">
+                <a:solidFill>
+                  <a:srgbClr val="94A3B8"/>
+                </a:solidFill>
+                <a:latin typeface="Arial"/>
+              </a:defRPr>
+            </a:pPr>
+            <a:r>
+              <a:rPr dirty="0"/>
+              <a:t>Industrial Asset Inventory &amp; Health Scoring Module</a:t>
+            </a:r>
+          </a:p>
+        </p:txBody>
+      </p:sp>
+      <p:sp>
+        <p:nvSpPr>
+          <p:cNvPr id="9" name="Rectangle 8">
+            <a:extLst>
+              <a:ext uri="{FF2B5EF4-FFF2-40B4-BE49-F238E27FC236}">
+                <a16:creationId xmlns:a16="http://schemas.microsoft.com/office/drawing/2014/main" id="{D43B8726-9F56-B0CD-E52E-68A1D32F1E6B}"/>
+              </a:ext>
+            </a:extLst>
+          </p:cNvPr>
+          <p:cNvSpPr/>
+          <p:nvPr/>
+        </p:nvSpPr>
+        <p:spPr>
+          <a:xfrm>
+            <a:off x="8086049" y="1343571"/>
+            <a:ext cx="3793285" cy="5039917"/>
+          </a:xfrm>
+          <a:prstGeom prst="rect">
+            <a:avLst/>
+          </a:prstGeom>
+          <a:solidFill>
+            <a:srgbClr val="152238"/>
+          </a:solidFill>
+          <a:ln w="12700">
+            <a:solidFill>
+              <a:srgbClr val="2A3C5A"/>
+            </a:solidFill>
+          </a:ln>
+        </p:spPr>
+        <p:style>
+          <a:lnRef idx="1">
+            <a:schemeClr val="accent1"/>
+          </a:lnRef>
+          <a:fillRef idx="3">
+            <a:schemeClr val="accent1"/>
+          </a:fillRef>
+          <a:effectRef idx="2">
+            <a:schemeClr val="accent1"/>
+          </a:effectRef>
+          <a:fontRef idx="minor">
+            <a:schemeClr val="lt1"/>
+          </a:fontRef>
+        </p:style>
+        <p:txBody>
+          <a:bodyPr rtlCol="0" anchor="ctr"/>
+          <a:lstStyle/>
+          <a:p>
+            <a:pPr algn="ctr"/>
+            <a:endParaRPr/>
+          </a:p>
+        </p:txBody>
+      </p:sp>
+      <p:sp>
+        <p:nvSpPr>
+          <p:cNvPr id="8" name="TextBox 7"/>
+          <p:cNvSpPr txBox="1"/>
+          <p:nvPr/>
+        </p:nvSpPr>
+        <p:spPr>
+          <a:xfrm>
+            <a:off x="8189286" y="1480985"/>
+            <a:ext cx="3586809" cy="4283224"/>
+          </a:xfrm>
+          <a:prstGeom prst="rect">
+            <a:avLst/>
+          </a:prstGeom>
+          <a:noFill/>
+        </p:spPr>
+        <p:txBody>
+          <a:bodyPr wrap="square" tIns="0" bIns="0">
+            <a:spAutoFit/>
+          </a:bodyPr>
+          <a:lstStyle/>
+          <a:p>
+            <a:pPr algn="just">
+              <a:defRPr sz="1500" b="1">
+                <a:solidFill>
+                  <a:srgbClr val="38BDF8"/>
+                </a:solidFill>
+                <a:latin typeface="Arial"/>
+              </a:defRPr>
+            </a:pPr>
+            <a:r>
+              <a:rPr sz="1500" dirty="0">
+                <a:latin typeface="Arial" panose="020B0604020202020204" pitchFamily="34" charset="0"/>
+                <a:cs typeface="Arial" panose="020B0604020202020204" pitchFamily="34" charset="0"/>
+              </a:rPr>
+              <a:t>Asset Management Features</a:t>
+            </a:r>
+          </a:p>
+          <a:p>
+            <a:pPr algn="just">
+              <a:spcBef>
+                <a:spcPts val="800"/>
+              </a:spcBef>
+            </a:pPr>
+            <a:r>
+              <a:rPr sz="1400" b="1" dirty="0">
+                <a:solidFill>
+                  <a:srgbClr val="F59E0B"/>
+                </a:solidFill>
+                <a:latin typeface="Times New Roman" panose="02020603050405020304" pitchFamily="18" charset="0"/>
+                <a:cs typeface="Times New Roman" panose="02020603050405020304" pitchFamily="18" charset="0"/>
+              </a:rPr>
+              <a:t>• Granular Asset Profiles: </a:t>
+            </a:r>
+            <a:endParaRPr lang="en-US" sz="1400" b="1" dirty="0">
+              <a:solidFill>
+                <a:srgbClr val="F59E0B"/>
+              </a:solidFill>
+              <a:latin typeface="Times New Roman" panose="02020603050405020304" pitchFamily="18" charset="0"/>
+              <a:cs typeface="Times New Roman" panose="02020603050405020304" pitchFamily="18" charset="0"/>
+            </a:endParaRPr>
+          </a:p>
+          <a:p>
+            <a:pPr algn="just">
+              <a:spcBef>
+                <a:spcPts val="800"/>
+              </a:spcBef>
+            </a:pPr>
+            <a:r>
+              <a:rPr sz="1400" dirty="0">
+                <a:solidFill>
+                  <a:srgbClr val="E2E8F0"/>
+                </a:solidFill>
+                <a:latin typeface="Times New Roman" panose="02020603050405020304" pitchFamily="18" charset="0"/>
+                <a:cs typeface="Times New Roman" panose="02020603050405020304" pitchFamily="18" charset="0"/>
+              </a:rPr>
+              <a:t>Maintains detailed metadata for pumps, turbines, CNC machinery, conveyers, and transformers.</a:t>
+            </a:r>
+          </a:p>
+          <a:p>
+            <a:pPr algn="just">
+              <a:spcBef>
+                <a:spcPts val="800"/>
+              </a:spcBef>
+            </a:pPr>
+            <a:r>
+              <a:rPr sz="1400" b="1" dirty="0">
+                <a:solidFill>
+                  <a:srgbClr val="F59E0B"/>
+                </a:solidFill>
+                <a:latin typeface="Times New Roman" panose="02020603050405020304" pitchFamily="18" charset="0"/>
+                <a:cs typeface="Times New Roman" panose="02020603050405020304" pitchFamily="18" charset="0"/>
+              </a:rPr>
+              <a:t>• Automated Health Scoring: </a:t>
+            </a:r>
+            <a:endParaRPr lang="en-US" sz="1400" b="1" dirty="0">
+              <a:solidFill>
+                <a:srgbClr val="F59E0B"/>
+              </a:solidFill>
+              <a:latin typeface="Times New Roman" panose="02020603050405020304" pitchFamily="18" charset="0"/>
+              <a:cs typeface="Times New Roman" panose="02020603050405020304" pitchFamily="18" charset="0"/>
+            </a:endParaRPr>
+          </a:p>
+          <a:p>
+            <a:pPr algn="just">
+              <a:spcBef>
+                <a:spcPts val="800"/>
+              </a:spcBef>
+            </a:pPr>
+            <a:r>
+              <a:rPr sz="1400" dirty="0">
+                <a:solidFill>
+                  <a:srgbClr val="E2E8F0"/>
+                </a:solidFill>
+                <a:latin typeface="Times New Roman" panose="02020603050405020304" pitchFamily="18" charset="0"/>
+                <a:cs typeface="Times New Roman" panose="02020603050405020304" pitchFamily="18" charset="0"/>
+              </a:rPr>
+              <a:t>Calculates dynamic health scores (0-100%) based on operational hours, age, and maintenance history.</a:t>
+            </a:r>
+          </a:p>
+          <a:p>
+            <a:pPr algn="just">
+              <a:spcBef>
+                <a:spcPts val="800"/>
+              </a:spcBef>
+            </a:pPr>
+            <a:r>
+              <a:rPr sz="1400" b="1" dirty="0">
+                <a:solidFill>
+                  <a:srgbClr val="F59E0B"/>
+                </a:solidFill>
+                <a:latin typeface="Times New Roman" panose="02020603050405020304" pitchFamily="18" charset="0"/>
+                <a:cs typeface="Times New Roman" panose="02020603050405020304" pitchFamily="18" charset="0"/>
+              </a:rPr>
+              <a:t>• Tri-Color Health Status: </a:t>
+            </a:r>
+            <a:endParaRPr lang="en-US" sz="1400" b="1" dirty="0">
+              <a:solidFill>
+                <a:srgbClr val="F59E0B"/>
+              </a:solidFill>
+              <a:latin typeface="Times New Roman" panose="02020603050405020304" pitchFamily="18" charset="0"/>
+              <a:cs typeface="Times New Roman" panose="02020603050405020304" pitchFamily="18" charset="0"/>
+            </a:endParaRPr>
+          </a:p>
+          <a:p>
+            <a:pPr algn="just">
+              <a:spcBef>
+                <a:spcPts val="800"/>
+              </a:spcBef>
+            </a:pPr>
+            <a:r>
+              <a:rPr sz="1400" dirty="0">
+                <a:solidFill>
+                  <a:srgbClr val="E2E8F0"/>
+                </a:solidFill>
+                <a:latin typeface="Times New Roman" panose="02020603050405020304" pitchFamily="18" charset="0"/>
+                <a:cs typeface="Times New Roman" panose="02020603050405020304" pitchFamily="18" charset="0"/>
+              </a:rPr>
+              <a:t>Visual status tags classifying equipment as Operational (Green), Degraded (Yellow), or Failed (Red).</a:t>
+            </a:r>
+          </a:p>
+          <a:p>
+            <a:pPr algn="just">
+              <a:spcBef>
+                <a:spcPts val="800"/>
+              </a:spcBef>
+            </a:pPr>
+            <a:r>
+              <a:rPr sz="1400" b="1" dirty="0">
+                <a:solidFill>
+                  <a:srgbClr val="F59E0B"/>
+                </a:solidFill>
+                <a:latin typeface="Times New Roman" panose="02020603050405020304" pitchFamily="18" charset="0"/>
+                <a:cs typeface="Times New Roman" panose="02020603050405020304" pitchFamily="18" charset="0"/>
+              </a:rPr>
+              <a:t>• Dynamic Search &amp; Filter: </a:t>
+            </a:r>
+            <a:endParaRPr lang="en-US" sz="1400" b="1" dirty="0">
+              <a:solidFill>
+                <a:srgbClr val="F59E0B"/>
+              </a:solidFill>
+              <a:latin typeface="Times New Roman" panose="02020603050405020304" pitchFamily="18" charset="0"/>
+              <a:cs typeface="Times New Roman" panose="02020603050405020304" pitchFamily="18" charset="0"/>
+            </a:endParaRPr>
+          </a:p>
+          <a:p>
+            <a:pPr algn="just">
+              <a:spcBef>
+                <a:spcPts val="800"/>
+              </a:spcBef>
+            </a:pPr>
+            <a:r>
+              <a:rPr sz="1400" dirty="0">
+                <a:solidFill>
+                  <a:srgbClr val="E2E8F0"/>
+                </a:solidFill>
+                <a:latin typeface="Times New Roman" panose="02020603050405020304" pitchFamily="18" charset="0"/>
+                <a:cs typeface="Times New Roman" panose="02020603050405020304" pitchFamily="18" charset="0"/>
+              </a:rPr>
+              <a:t>Instant REST-powered filtering by department location, status category, or serial number.</a:t>
+            </a:r>
+          </a:p>
+        </p:txBody>
+      </p:sp>
     </p:spTree>
   </p:cSld>
   <p:clrMapOvr>
@@ -4313,13 +7194,13 @@
 </p:sld>
 </file>
 
-<file path=ppt/slides/slide13.xml><?xml version="1.0" encoding="utf-8"?>
-<p:sld xmlns:a="http://schemas.openxmlformats.org/drawingml/2006/main" xmlns:p="http://schemas.openxmlformats.org/presentationml/2006/main" xmlns:r="http://schemas.openxmlformats.org/officeDocument/2006/relationships">
+<file path=ppt/slides/slide7.xml><?xml version="1.0" encoding="utf-8"?>
+<p:sld xmlns:a="http://schemas.openxmlformats.org/drawingml/2006/main" xmlns:r="http://schemas.openxmlformats.org/officeDocument/2006/relationships" xmlns:p="http://schemas.openxmlformats.org/presentationml/2006/main">
   <p:cSld>
     <p:bg>
       <p:bgPr>
         <a:solidFill>
-          <a:srgbClr val="0F172A"/>
+          <a:srgbClr val="0B132B"/>
         </a:solidFill>
         <a:effectLst/>
       </p:bgPr>
@@ -4330,27 +7211,40 @@
         <p:cNvGrpSpPr/>
         <p:nvPr/>
       </p:nvGrpSpPr>
-      <p:grpSpPr/>
-      <p:sp>
-        <p:nvSpPr>
-          <p:cNvPr id="2" name="Rectangle 1"/>
+      <p:grpSpPr>
+        <a:xfrm>
+          <a:off x="0" y="0"/>
+          <a:ext cx="0" cy="0"/>
+          <a:chOff x="0" y="0"/>
+          <a:chExt cx="0" cy="0"/>
+        </a:xfrm>
+      </p:grpSpPr>
+      <p:sp>
+        <p:nvSpPr>
+          <p:cNvPr id="10" name="Rectangle 9">
+            <a:extLst>
+              <a:ext uri="{FF2B5EF4-FFF2-40B4-BE49-F238E27FC236}">
+                <a16:creationId xmlns:a16="http://schemas.microsoft.com/office/drawing/2014/main" id="{F18B0F39-8072-6CA0-4418-09D95A6A2819}"/>
+              </a:ext>
+            </a:extLst>
+          </p:cNvPr>
           <p:cNvSpPr/>
           <p:nvPr/>
         </p:nvSpPr>
         <p:spPr>
           <a:xfrm>
-            <a:off x="731520" y="365760"/>
-            <a:ext cx="10728655" cy="777240"/>
+            <a:off x="334298" y="320040"/>
+            <a:ext cx="11543070" cy="822960"/>
           </a:xfrm>
           <a:prstGeom prst="rect">
             <a:avLst/>
           </a:prstGeom>
           <a:solidFill>
-            <a:srgbClr val="1E293B"/>
+            <a:srgbClr val="152238"/>
           </a:solidFill>
           <a:ln w="12700">
             <a:solidFill>
-              <a:srgbClr val="334155"/>
+              <a:srgbClr val="2A3C5A"/>
             </a:solidFill>
           </a:ln>
         </p:spPr>
@@ -4373,6 +7267,7 @@
           <a:lstStyle/>
           <a:p>
             <a:pPr algn="ctr"/>
+            <a:endParaRPr/>
           </a:p>
         </p:txBody>
       </p:sp>
@@ -4384,8 +7279,8 @@
         </p:nvSpPr>
         <p:spPr>
           <a:xfrm>
-            <a:off x="914400" y="384048"/>
-            <a:ext cx="10332720" cy="731520"/>
+            <a:off x="914400" y="505143"/>
+            <a:ext cx="10362895" cy="477054"/>
           </a:xfrm>
           <a:prstGeom prst="rect">
             <a:avLst/>
@@ -4398,29 +7293,31 @@
           </a:bodyPr>
           <a:lstStyle/>
           <a:p>
-            <a:pPr>
-              <a:defRPr sz="1000" b="1">
-                <a:solidFill>
-                  <a:srgbClr val="00F2FE"/>
+            <a:pPr algn="ctr">
+              <a:defRPr sz="2000" b="1">
+                <a:solidFill>
+                  <a:srgbClr val="FFFFFF"/>
                 </a:solidFill>
                 <a:latin typeface="Arial"/>
               </a:defRPr>
             </a:pPr>
             <a:r>
-              <a:t>U21CS504 - WEB TECHNOLOGIES LABORATORY</a:t>
-            </a:r>
-          </a:p>
-          <a:p>
-            <a:pPr>
-              <a:defRPr sz="2000" b="1">
-                <a:solidFill>
-                  <a:srgbClr val="FFFFFF"/>
+              <a:rPr dirty="0"/>
+              <a:t>Maintenance Kanban &amp; Work Order Management</a:t>
+            </a:r>
+          </a:p>
+          <a:p>
+            <a:pPr algn="ctr">
+              <a:defRPr sz="1100" b="1">
+                <a:solidFill>
+                  <a:srgbClr val="F59E0B"/>
                 </a:solidFill>
                 <a:latin typeface="Arial"/>
               </a:defRPr>
             </a:pPr>
             <a:r>
-              <a:t>12. Zero-Flicker Dual-Theme Architecture</a:t>
+              <a:rPr dirty="0"/>
+              <a:t>Streamlined Maintenance Dispatch via Interactive Visual Work Status Boards</a:t>
             </a:r>
           </a:p>
         </p:txBody>
@@ -4433,18 +7330,18 @@
         </p:nvSpPr>
         <p:spPr>
           <a:xfrm>
-            <a:off x="731520" y="1325880"/>
-            <a:ext cx="4114800" cy="5120640"/>
+            <a:off x="334298" y="1325880"/>
+            <a:ext cx="7661294" cy="5029200"/>
           </a:xfrm>
           <a:prstGeom prst="rect">
             <a:avLst/>
           </a:prstGeom>
           <a:solidFill>
-            <a:srgbClr val="1E293B"/>
+            <a:srgbClr val="152238"/>
           </a:solidFill>
           <a:ln w="12700">
             <a:solidFill>
-              <a:srgbClr val="334155"/>
+              <a:srgbClr val="38BDF8"/>
             </a:solidFill>
           </a:ln>
         </p:spPr>
@@ -4467,157 +7364,13 @@
           <a:lstStyle/>
           <a:p>
             <a:pPr algn="ctr"/>
-          </a:p>
-        </p:txBody>
-      </p:sp>
-      <p:sp>
-        <p:nvSpPr>
-          <p:cNvPr id="5" name="TextBox 4"/>
-          <p:cNvSpPr txBox="1"/>
-          <p:nvPr/>
-        </p:nvSpPr>
-        <p:spPr>
-          <a:xfrm>
-            <a:off x="914400" y="1508760"/>
-            <a:ext cx="3749040" cy="4754880"/>
-          </a:xfrm>
-          <a:prstGeom prst="rect">
-            <a:avLst/>
-          </a:prstGeom>
-          <a:noFill/>
-        </p:spPr>
-        <p:txBody>
-          <a:bodyPr wrap="square">
-            <a:spAutoFit/>
-          </a:bodyPr>
-          <a:lstStyle/>
-          <a:p>
-            <a:pPr>
-              <a:defRPr sz="1600" b="1">
-                <a:solidFill>
-                  <a:srgbClr val="00F2FE"/>
-                </a:solidFill>
-                <a:latin typeface="Arial"/>
-              </a:defRPr>
-            </a:pPr>
-            <a:r>
-              <a:t>Key Capabilities &amp; Details</a:t>
-            </a:r>
-          </a:p>
-          <a:p>
-            <a:pPr>
-              <a:spcBef>
-                <a:spcPts val="800"/>
-              </a:spcBef>
-              <a:defRPr sz="1300">
-                <a:solidFill>
-                  <a:srgbClr val="CBD5E1"/>
-                </a:solidFill>
-                <a:latin typeface="Arial"/>
-              </a:defRPr>
-            </a:pPr>
-            <a:r>
-              <a:t>• Centralized theme system (js/theme.js) managing Dark Slate and Clean Light modes.</a:t>
-            </a:r>
-          </a:p>
-          <a:p>
-            <a:pPr>
-              <a:spcBef>
-                <a:spcPts val="800"/>
-              </a:spcBef>
-              <a:defRPr sz="1300">
-                <a:solidFill>
-                  <a:srgbClr val="CBD5E1"/>
-                </a:solidFill>
-                <a:latin typeface="Arial"/>
-              </a:defRPr>
-            </a:pPr>
-            <a:r>
-              <a:t>• Synchronous inline &lt;head&gt; script prevents Dark Mode flash during cross-page navigation or refresh.</a:t>
-            </a:r>
-          </a:p>
-          <a:p>
-            <a:pPr>
-              <a:spcBef>
-                <a:spcPts val="800"/>
-              </a:spcBef>
-              <a:defRPr sz="1300">
-                <a:solidFill>
-                  <a:srgbClr val="CBD5E1"/>
-                </a:solidFill>
-                <a:latin typeface="Arial"/>
-              </a:defRPr>
-            </a:pPr>
-            <a:r>
-              <a:t>• High-contrast slate design tokens (--text-section-heading) meeting WCAG 2.1 AAA contrast rules.</a:t>
-            </a:r>
-          </a:p>
-          <a:p>
-            <a:pPr>
-              <a:spcBef>
-                <a:spcPts val="800"/>
-              </a:spcBef>
-              <a:defRPr sz="1300">
-                <a:solidFill>
-                  <a:srgbClr val="CBD5E1"/>
-                </a:solidFill>
-                <a:latin typeface="Arial"/>
-              </a:defRPr>
-            </a:pPr>
-            <a:r>
-              <a:t>• Flyout tooltips for collapsed sidebar navigation.</a:t>
-            </a:r>
-          </a:p>
-        </p:txBody>
-      </p:sp>
-      <p:sp>
-        <p:nvSpPr>
-          <p:cNvPr id="6" name="Rectangle 5"/>
-          <p:cNvSpPr/>
-          <p:nvPr/>
-        </p:nvSpPr>
-        <p:spPr>
-          <a:xfrm>
-            <a:off x="5029200" y="1325880"/>
-            <a:ext cx="6430975" cy="5120640"/>
-          </a:xfrm>
-          <a:prstGeom prst="rect">
-            <a:avLst/>
-          </a:prstGeom>
-          <a:solidFill>
-            <a:srgbClr val="1E293B"/>
-          </a:solidFill>
-          <a:ln w="12700">
-            <a:solidFill>
-              <a:srgbClr val="00F2FE"/>
-            </a:solidFill>
-          </a:ln>
-        </p:spPr>
-        <p:style>
-          <a:lnRef idx="1">
-            <a:schemeClr val="accent1"/>
-          </a:lnRef>
-          <a:fillRef idx="3">
-            <a:schemeClr val="accent1"/>
-          </a:fillRef>
-          <a:effectRef idx="2">
-            <a:schemeClr val="accent1"/>
-          </a:effectRef>
-          <a:fontRef idx="minor">
-            <a:schemeClr val="lt1"/>
-          </a:fontRef>
-        </p:style>
-        <p:txBody>
-          <a:bodyPr rtlCol="0" anchor="ctr"/>
-          <a:lstStyle/>
-          <a:p>
-            <a:pPr algn="ctr"/>
+            <a:endParaRPr/>
           </a:p>
         </p:txBody>
       </p:sp>
       <p:pic>
         <p:nvPicPr>
-          <p:cNvPr id="7" name="Picture 6" descr="08_light_mode_dashboard.png"/>
+          <p:cNvPr id="5" name="Picture 4" descr="04_workorders_kanban.png"/>
           <p:cNvPicPr>
             <a:picLocks noChangeAspect="1"/>
           </p:cNvPicPr>
@@ -4631,14 +7384,307 @@
         </p:blipFill>
         <p:spPr>
           <a:xfrm>
-            <a:off x="5120640" y="1417320"/>
-            <a:ext cx="6248095" cy="4937760"/>
+            <a:off x="393292" y="1408864"/>
+            <a:ext cx="7533476" cy="4663440"/>
           </a:xfrm>
           <a:prstGeom prst="rect">
             <a:avLst/>
           </a:prstGeom>
         </p:spPr>
       </p:pic>
+      <p:sp>
+        <p:nvSpPr>
+          <p:cNvPr id="6" name="TextBox 5"/>
+          <p:cNvSpPr txBox="1"/>
+          <p:nvPr/>
+        </p:nvSpPr>
+        <p:spPr>
+          <a:xfrm>
+            <a:off x="1238865" y="6146144"/>
+            <a:ext cx="5852160" cy="256032"/>
+          </a:xfrm>
+          <a:prstGeom prst="rect">
+            <a:avLst/>
+          </a:prstGeom>
+          <a:noFill/>
+        </p:spPr>
+        <p:txBody>
+          <a:bodyPr wrap="square" tIns="0">
+            <a:spAutoFit/>
+          </a:bodyPr>
+          <a:lstStyle/>
+          <a:p>
+            <a:pPr algn="ctr">
+              <a:defRPr sz="1000" b="1">
+                <a:solidFill>
+                  <a:srgbClr val="94A3B8"/>
+                </a:solidFill>
+                <a:latin typeface="Arial"/>
+              </a:defRPr>
+            </a:pPr>
+            <a:r>
+              <a:rPr dirty="0"/>
+              <a:t>Interactive 4-Stage Kanban Dispatch Interface</a:t>
+            </a:r>
+          </a:p>
+        </p:txBody>
+      </p:sp>
+      <p:sp>
+        <p:nvSpPr>
+          <p:cNvPr id="9" name="Rectangle 8">
+            <a:extLst>
+              <a:ext uri="{FF2B5EF4-FFF2-40B4-BE49-F238E27FC236}">
+                <a16:creationId xmlns:a16="http://schemas.microsoft.com/office/drawing/2014/main" id="{283EF061-107C-B28E-B16D-10EFADD195A6}"/>
+              </a:ext>
+            </a:extLst>
+          </p:cNvPr>
+          <p:cNvSpPr/>
+          <p:nvPr/>
+        </p:nvSpPr>
+        <p:spPr>
+          <a:xfrm>
+            <a:off x="8086049" y="1315137"/>
+            <a:ext cx="3793285" cy="5039917"/>
+          </a:xfrm>
+          <a:prstGeom prst="rect">
+            <a:avLst/>
+          </a:prstGeom>
+          <a:solidFill>
+            <a:srgbClr val="152238"/>
+          </a:solidFill>
+          <a:ln w="12700">
+            <a:solidFill>
+              <a:srgbClr val="2A3C5A"/>
+            </a:solidFill>
+          </a:ln>
+        </p:spPr>
+        <p:style>
+          <a:lnRef idx="1">
+            <a:schemeClr val="accent1"/>
+          </a:lnRef>
+          <a:fillRef idx="3">
+            <a:schemeClr val="accent1"/>
+          </a:fillRef>
+          <a:effectRef idx="2">
+            <a:schemeClr val="accent1"/>
+          </a:effectRef>
+          <a:fontRef idx="minor">
+            <a:schemeClr val="lt1"/>
+          </a:fontRef>
+        </p:style>
+        <p:txBody>
+          <a:bodyPr rtlCol="0" anchor="ctr"/>
+          <a:lstStyle/>
+          <a:p>
+            <a:pPr algn="ctr"/>
+            <a:endParaRPr/>
+          </a:p>
+        </p:txBody>
+      </p:sp>
+      <p:sp>
+        <p:nvSpPr>
+          <p:cNvPr id="8" name="TextBox 7"/>
+          <p:cNvSpPr txBox="1"/>
+          <p:nvPr/>
+        </p:nvSpPr>
+        <p:spPr>
+          <a:xfrm>
+            <a:off x="8210919" y="1490472"/>
+            <a:ext cx="3453088" cy="4267835"/>
+          </a:xfrm>
+          <a:prstGeom prst="rect">
+            <a:avLst/>
+          </a:prstGeom>
+          <a:noFill/>
+        </p:spPr>
+        <p:txBody>
+          <a:bodyPr wrap="square" tIns="0" bIns="0">
+            <a:spAutoFit/>
+          </a:bodyPr>
+          <a:lstStyle/>
+          <a:p>
+            <a:pPr algn="just">
+              <a:defRPr sz="1500" b="1">
+                <a:solidFill>
+                  <a:srgbClr val="38BDF8"/>
+                </a:solidFill>
+                <a:latin typeface="Arial"/>
+              </a:defRPr>
+            </a:pPr>
+            <a:r>
+              <a:rPr sz="1500" dirty="0">
+                <a:latin typeface="Arial" panose="020B0604020202020204" pitchFamily="34" charset="0"/>
+                <a:cs typeface="Arial" panose="020B0604020202020204" pitchFamily="34" charset="0"/>
+              </a:rPr>
+              <a:t>Kanban Workflow Features</a:t>
+            </a:r>
+          </a:p>
+          <a:p>
+            <a:pPr algn="just">
+              <a:spcBef>
+                <a:spcPts val="800"/>
+              </a:spcBef>
+            </a:pPr>
+            <a:r>
+              <a:rPr sz="1400" b="1" dirty="0">
+                <a:solidFill>
+                  <a:srgbClr val="F59E0B"/>
+                </a:solidFill>
+                <a:latin typeface="Times New Roman" panose="02020603050405020304" pitchFamily="18" charset="0"/>
+                <a:cs typeface="Times New Roman" panose="02020603050405020304" pitchFamily="18" charset="0"/>
+              </a:rPr>
+              <a:t>• 4-Stage Visual Board: </a:t>
+            </a:r>
+            <a:endParaRPr lang="en-US" sz="1400" b="1" dirty="0">
+              <a:solidFill>
+                <a:srgbClr val="F59E0B"/>
+              </a:solidFill>
+              <a:latin typeface="Times New Roman" panose="02020603050405020304" pitchFamily="18" charset="0"/>
+              <a:cs typeface="Times New Roman" panose="02020603050405020304" pitchFamily="18" charset="0"/>
+            </a:endParaRPr>
+          </a:p>
+          <a:p>
+            <a:pPr algn="just">
+              <a:spcBef>
+                <a:spcPts val="800"/>
+              </a:spcBef>
+            </a:pPr>
+            <a:r>
+              <a:rPr sz="1400" dirty="0">
+                <a:solidFill>
+                  <a:srgbClr val="E2E8F0"/>
+                </a:solidFill>
+                <a:latin typeface="Times New Roman" panose="02020603050405020304" pitchFamily="18" charset="0"/>
+                <a:cs typeface="Times New Roman" panose="02020603050405020304" pitchFamily="18" charset="0"/>
+              </a:rPr>
+              <a:t>Organizes maintenance tasks into Pending, In Progress, Under Review, and Completed columns.</a:t>
+            </a:r>
+          </a:p>
+          <a:p>
+            <a:pPr algn="just">
+              <a:spcBef>
+                <a:spcPts val="800"/>
+              </a:spcBef>
+            </a:pPr>
+            <a:r>
+              <a:rPr sz="1400" b="1" dirty="0">
+                <a:solidFill>
+                  <a:srgbClr val="F59E0B"/>
+                </a:solidFill>
+                <a:latin typeface="Times New Roman" panose="02020603050405020304" pitchFamily="18" charset="0"/>
+                <a:cs typeface="Times New Roman" panose="02020603050405020304" pitchFamily="18" charset="0"/>
+              </a:rPr>
+              <a:t>• Priority Level Badges: </a:t>
+            </a:r>
+            <a:endParaRPr lang="en-US" sz="1400" b="1" dirty="0">
+              <a:solidFill>
+                <a:srgbClr val="F59E0B"/>
+              </a:solidFill>
+              <a:latin typeface="Times New Roman" panose="02020603050405020304" pitchFamily="18" charset="0"/>
+              <a:cs typeface="Times New Roman" panose="02020603050405020304" pitchFamily="18" charset="0"/>
+            </a:endParaRPr>
+          </a:p>
+          <a:p>
+            <a:pPr algn="just">
+              <a:spcBef>
+                <a:spcPts val="800"/>
+              </a:spcBef>
+            </a:pPr>
+            <a:r>
+              <a:rPr sz="1400" dirty="0">
+                <a:solidFill>
+                  <a:srgbClr val="E2E8F0"/>
+                </a:solidFill>
+                <a:latin typeface="Times New Roman" panose="02020603050405020304" pitchFamily="18" charset="0"/>
+                <a:cs typeface="Times New Roman" panose="02020603050405020304" pitchFamily="18" charset="0"/>
+              </a:rPr>
+              <a:t>High-visibility categorization for Emergency, High, Medium, and Routine maintenance jobs.</a:t>
+            </a:r>
+          </a:p>
+          <a:p>
+            <a:pPr algn="just">
+              <a:spcBef>
+                <a:spcPts val="800"/>
+              </a:spcBef>
+            </a:pPr>
+            <a:r>
+              <a:rPr sz="1400" b="1" dirty="0">
+                <a:solidFill>
+                  <a:srgbClr val="F59E0B"/>
+                </a:solidFill>
+                <a:latin typeface="Times New Roman" panose="02020603050405020304" pitchFamily="18" charset="0"/>
+                <a:cs typeface="Times New Roman" panose="02020603050405020304" pitchFamily="18" charset="0"/>
+              </a:rPr>
+              <a:t>• Technician Assignment: </a:t>
+            </a:r>
+            <a:endParaRPr lang="en-US" sz="1400" b="1" dirty="0">
+              <a:solidFill>
+                <a:srgbClr val="F59E0B"/>
+              </a:solidFill>
+              <a:latin typeface="Times New Roman" panose="02020603050405020304" pitchFamily="18" charset="0"/>
+              <a:cs typeface="Times New Roman" panose="02020603050405020304" pitchFamily="18" charset="0"/>
+            </a:endParaRPr>
+          </a:p>
+          <a:p>
+            <a:pPr algn="just">
+              <a:spcBef>
+                <a:spcPts val="800"/>
+              </a:spcBef>
+            </a:pPr>
+            <a:r>
+              <a:rPr sz="1400" dirty="0">
+                <a:solidFill>
+                  <a:srgbClr val="E2E8F0"/>
+                </a:solidFill>
+                <a:latin typeface="Times New Roman" panose="02020603050405020304" pitchFamily="18" charset="0"/>
+                <a:cs typeface="Times New Roman" panose="02020603050405020304" pitchFamily="18" charset="0"/>
+              </a:rPr>
+              <a:t>Maps work orders directly to assigned field engineers with expected completion timelines.</a:t>
+            </a:r>
+          </a:p>
+          <a:p>
+            <a:pPr algn="just">
+              <a:spcBef>
+                <a:spcPts val="800"/>
+              </a:spcBef>
+            </a:pPr>
+            <a:r>
+              <a:rPr sz="1400" b="1" dirty="0">
+                <a:solidFill>
+                  <a:srgbClr val="F59E0B"/>
+                </a:solidFill>
+                <a:latin typeface="Times New Roman" panose="02020603050405020304" pitchFamily="18" charset="0"/>
+                <a:cs typeface="Times New Roman" panose="02020603050405020304" pitchFamily="18" charset="0"/>
+              </a:rPr>
+              <a:t>• Audit Logging &amp; Tracking: </a:t>
+            </a:r>
+            <a:endParaRPr lang="en-US" sz="1400" b="1" dirty="0">
+              <a:solidFill>
+                <a:srgbClr val="F59E0B"/>
+              </a:solidFill>
+              <a:latin typeface="Times New Roman" panose="02020603050405020304" pitchFamily="18" charset="0"/>
+              <a:cs typeface="Times New Roman" panose="02020603050405020304" pitchFamily="18" charset="0"/>
+            </a:endParaRPr>
+          </a:p>
+          <a:p>
+            <a:pPr algn="just">
+              <a:spcBef>
+                <a:spcPts val="800"/>
+              </a:spcBef>
+            </a:pPr>
+            <a:r>
+              <a:rPr sz="1400" dirty="0">
+                <a:solidFill>
+                  <a:srgbClr val="E2E8F0"/>
+                </a:solidFill>
+                <a:latin typeface="Times New Roman" panose="02020603050405020304" pitchFamily="18" charset="0"/>
+                <a:cs typeface="Times New Roman" panose="02020603050405020304" pitchFamily="18" charset="0"/>
+              </a:rPr>
+              <a:t>Stores historical maintenance actions for compliance reporting and reliability auditing.</a:t>
+            </a:r>
+          </a:p>
+        </p:txBody>
+      </p:sp>
     </p:spTree>
   </p:cSld>
   <p:clrMapOvr>
@@ -4647,13 +7693,13 @@
 </p:sld>
 </file>
 
-<file path=ppt/slides/slide14.xml><?xml version="1.0" encoding="utf-8"?>
-<p:sld xmlns:a="http://schemas.openxmlformats.org/drawingml/2006/main" xmlns:p="http://schemas.openxmlformats.org/presentationml/2006/main" xmlns:r="http://schemas.openxmlformats.org/officeDocument/2006/relationships">
+<file path=ppt/slides/slide8.xml><?xml version="1.0" encoding="utf-8"?>
+<p:sld xmlns:a="http://schemas.openxmlformats.org/drawingml/2006/main" xmlns:r="http://schemas.openxmlformats.org/officeDocument/2006/relationships" xmlns:p="http://schemas.openxmlformats.org/presentationml/2006/main">
   <p:cSld>
     <p:bg>
       <p:bgPr>
         <a:solidFill>
-          <a:srgbClr val="0F172A"/>
+          <a:srgbClr val="0B132B"/>
         </a:solidFill>
         <a:effectLst/>
       </p:bgPr>
@@ -4664,7 +7710,14 @@
         <p:cNvGrpSpPr/>
         <p:nvPr/>
       </p:nvGrpSpPr>
-      <p:grpSpPr/>
+      <p:grpSpPr>
+        <a:xfrm>
+          <a:off x="0" y="0"/>
+          <a:ext cx="0" cy="0"/>
+          <a:chOff x="0" y="0"/>
+          <a:chExt cx="0" cy="0"/>
+        </a:xfrm>
+      </p:grpSpPr>
       <p:sp>
         <p:nvSpPr>
           <p:cNvPr id="2" name="Rectangle 1"/>
@@ -4673,18 +7726,18 @@
         </p:nvSpPr>
         <p:spPr>
           <a:xfrm>
-            <a:off x="731520" y="365760"/>
-            <a:ext cx="10728655" cy="777240"/>
+            <a:off x="334298" y="320040"/>
+            <a:ext cx="11543070" cy="822960"/>
           </a:xfrm>
           <a:prstGeom prst="rect">
             <a:avLst/>
           </a:prstGeom>
           <a:solidFill>
-            <a:srgbClr val="1E293B"/>
+            <a:srgbClr val="152238"/>
           </a:solidFill>
           <a:ln w="12700">
             <a:solidFill>
-              <a:srgbClr val="334155"/>
+              <a:srgbClr val="2A3C5A"/>
             </a:solidFill>
           </a:ln>
         </p:spPr>
@@ -4707,6 +7760,7 @@
           <a:lstStyle/>
           <a:p>
             <a:pPr algn="ctr"/>
+            <a:endParaRPr/>
           </a:p>
         </p:txBody>
       </p:sp>
@@ -4718,8 +7772,8 @@
         </p:nvSpPr>
         <p:spPr>
           <a:xfrm>
-            <a:off x="914400" y="384048"/>
-            <a:ext cx="10332720" cy="731520"/>
+            <a:off x="914400" y="492203"/>
+            <a:ext cx="10362895" cy="477054"/>
           </a:xfrm>
           <a:prstGeom prst="rect">
             <a:avLst/>
@@ -4732,29 +7786,31 @@
           </a:bodyPr>
           <a:lstStyle/>
           <a:p>
-            <a:pPr>
-              <a:defRPr sz="1000" b="1">
-                <a:solidFill>
-                  <a:srgbClr val="00F2FE"/>
+            <a:pPr algn="ctr">
+              <a:defRPr sz="2000" b="1">
+                <a:solidFill>
+                  <a:srgbClr val="FFFFFF"/>
                 </a:solidFill>
                 <a:latin typeface="Arial"/>
               </a:defRPr>
             </a:pPr>
             <a:r>
-              <a:t>U21CS504 - WEB TECHNOLOGIES LABORATORY</a:t>
-            </a:r>
-          </a:p>
-          <a:p>
-            <a:pPr>
-              <a:defRPr sz="2000" b="1">
-                <a:solidFill>
-                  <a:srgbClr val="FFFFFF"/>
+              <a:rPr dirty="0"/>
+              <a:t>Spare Parts Inventory &amp; Procurement Control</a:t>
+            </a:r>
+          </a:p>
+          <a:p>
+            <a:pPr algn="ctr">
+              <a:defRPr sz="1100" b="1">
+                <a:solidFill>
+                  <a:srgbClr val="F59E0B"/>
                 </a:solidFill>
                 <a:latin typeface="Arial"/>
               </a:defRPr>
             </a:pPr>
             <a:r>
-              <a:t>13. Relational MySQL Database Schema (plantpulse_db)</a:t>
+              <a:rPr dirty="0"/>
+              <a:t>Automated Stock Level Monitoring &amp; Intelligent Reorder Threshold Triggers</a:t>
             </a:r>
           </a:p>
         </p:txBody>
@@ -4767,18 +7823,18 @@
         </p:nvSpPr>
         <p:spPr>
           <a:xfrm>
-            <a:off x="731520" y="1325880"/>
-            <a:ext cx="5120640" cy="5120640"/>
+            <a:off x="334297" y="1325880"/>
+            <a:ext cx="7561006" cy="5029200"/>
           </a:xfrm>
           <a:prstGeom prst="rect">
             <a:avLst/>
           </a:prstGeom>
           <a:solidFill>
-            <a:srgbClr val="1E293B"/>
+            <a:srgbClr val="152238"/>
           </a:solidFill>
           <a:ln w="12700">
             <a:solidFill>
-              <a:srgbClr val="334155"/>
+              <a:srgbClr val="38BDF8"/>
             </a:solidFill>
           </a:ln>
         </p:spPr>
@@ -4801,2552 +7857,13 @@
           <a:lstStyle/>
           <a:p>
             <a:pPr algn="ctr"/>
-          </a:p>
-        </p:txBody>
-      </p:sp>
-      <p:sp>
-        <p:nvSpPr>
-          <p:cNvPr id="5" name="TextBox 4"/>
-          <p:cNvSpPr txBox="1"/>
-          <p:nvPr/>
-        </p:nvSpPr>
-        <p:spPr>
-          <a:xfrm>
-            <a:off x="914400" y="1508760"/>
-            <a:ext cx="4754880" cy="4754880"/>
-          </a:xfrm>
-          <a:prstGeom prst="rect">
-            <a:avLst/>
-          </a:prstGeom>
-          <a:noFill/>
-        </p:spPr>
-        <p:txBody>
-          <a:bodyPr wrap="square">
-            <a:spAutoFit/>
-          </a:bodyPr>
-          <a:lstStyle/>
-          <a:p>
-            <a:pPr>
-              <a:defRPr sz="1600" b="1">
-                <a:solidFill>
-                  <a:srgbClr val="00F2FE"/>
-                </a:solidFill>
-                <a:latin typeface="Arial"/>
-              </a:defRPr>
-            </a:pPr>
-            <a:r>
-              <a:t>9 Relational MySQL Tables</a:t>
-            </a:r>
-          </a:p>
-          <a:p>
-            <a:pPr>
-              <a:spcBef>
-                <a:spcPts val="800"/>
-              </a:spcBef>
-              <a:defRPr sz="1300">
-                <a:solidFill>
-                  <a:srgbClr val="CBD5E1"/>
-                </a:solidFill>
-                <a:latin typeface="Arial"/>
-              </a:defRPr>
-            </a:pPr>
-            <a:r>
-              <a:t>• users: User accounts &amp; RBAC role keys.</a:t>
-            </a:r>
-          </a:p>
-          <a:p>
-            <a:pPr>
-              <a:spcBef>
-                <a:spcPts val="800"/>
-              </a:spcBef>
-              <a:defRPr sz="1300">
-                <a:solidFill>
-                  <a:srgbClr val="CBD5E1"/>
-                </a:solidFill>
-                <a:latin typeface="Arial"/>
-              </a:defRPr>
-            </a:pPr>
-            <a:r>
-              <a:t>• assets: Machine records, health &amp; telemetry.</a:t>
-            </a:r>
-          </a:p>
-          <a:p>
-            <a:pPr>
-              <a:spcBef>
-                <a:spcPts val="800"/>
-              </a:spcBef>
-              <a:defRPr sz="1300">
-                <a:solidFill>
-                  <a:srgbClr val="CBD5E1"/>
-                </a:solidFill>
-                <a:latin typeface="Arial"/>
-              </a:defRPr>
-            </a:pPr>
-            <a:r>
-              <a:t>• maintenance: Scheduled preventive &amp; corrective PM.</a:t>
-            </a:r>
-          </a:p>
-          <a:p>
-            <a:pPr>
-              <a:spcBef>
-                <a:spcPts val="800"/>
-              </a:spcBef>
-              <a:defRPr sz="1300">
-                <a:solidFill>
-                  <a:srgbClr val="CBD5E1"/>
-                </a:solidFill>
-                <a:latin typeface="Arial"/>
-              </a:defRPr>
-            </a:pPr>
-            <a:r>
-              <a:t>• work_orders: Work order lifecycle &amp; assignments.</a:t>
-            </a:r>
-          </a:p>
-          <a:p>
-            <a:pPr>
-              <a:spcBef>
-                <a:spcPts val="800"/>
-              </a:spcBef>
-              <a:defRPr sz="1300">
-                <a:solidFill>
-                  <a:srgbClr val="CBD5E1"/>
-                </a:solidFill>
-                <a:latin typeface="Arial"/>
-              </a:defRPr>
-            </a:pPr>
-            <a:r>
-              <a:t>• technicians: Technician directory &amp; workload.</a:t>
-            </a:r>
-          </a:p>
-          <a:p>
-            <a:pPr>
-              <a:spcBef>
-                <a:spcPts val="800"/>
-              </a:spcBef>
-              <a:defRPr sz="1300">
-                <a:solidFill>
-                  <a:srgbClr val="CBD5E1"/>
-                </a:solidFill>
-                <a:latin typeface="Arial"/>
-              </a:defRPr>
-            </a:pPr>
-            <a:r>
-              <a:t>• spare_parts: Inventory quantities &amp; costs.</a:t>
-            </a:r>
-          </a:p>
-          <a:p>
-            <a:pPr>
-              <a:spcBef>
-                <a:spcPts val="800"/>
-              </a:spcBef>
-              <a:defRPr sz="1300">
-                <a:solidFill>
-                  <a:srgbClr val="CBD5E1"/>
-                </a:solidFill>
-                <a:latin typeface="Arial"/>
-              </a:defRPr>
-            </a:pPr>
-            <a:r>
-              <a:t>• alerts: Telemetry alarms &amp; notifications.</a:t>
-            </a:r>
-          </a:p>
-          <a:p>
-            <a:pPr>
-              <a:spcBef>
-                <a:spcPts val="800"/>
-              </a:spcBef>
-              <a:defRPr sz="1300">
-                <a:solidFill>
-                  <a:srgbClr val="CBD5E1"/>
-                </a:solidFill>
-                <a:latin typeface="Arial"/>
-              </a:defRPr>
-            </a:pPr>
-            <a:r>
-              <a:t>• activity_log: Audit trail of all plant actions.</a:t>
-            </a:r>
-          </a:p>
-          <a:p>
-            <a:pPr>
-              <a:spcBef>
-                <a:spcPts val="800"/>
-              </a:spcBef>
-              <a:defRPr sz="1300">
-                <a:solidFill>
-                  <a:srgbClr val="CBD5E1"/>
-                </a:solidFill>
-                <a:latin typeface="Arial"/>
-              </a:defRPr>
-            </a:pPr>
-            <a:r>
-              <a:t>• stock_movements: IN/OUT stock transaction history.</a:t>
-            </a:r>
-          </a:p>
-        </p:txBody>
-      </p:sp>
-      <p:sp>
-        <p:nvSpPr>
-          <p:cNvPr id="6" name="Rectangle 5"/>
-          <p:cNvSpPr/>
-          <p:nvPr/>
-        </p:nvSpPr>
-        <p:spPr>
-          <a:xfrm>
-            <a:off x="6309360" y="1325880"/>
-            <a:ext cx="5120640" cy="5120640"/>
-          </a:xfrm>
-          <a:prstGeom prst="rect">
-            <a:avLst/>
-          </a:prstGeom>
-          <a:solidFill>
-            <a:srgbClr val="1E293B"/>
-          </a:solidFill>
-          <a:ln w="12700">
-            <a:solidFill>
-              <a:srgbClr val="334155"/>
-            </a:solidFill>
-          </a:ln>
-        </p:spPr>
-        <p:style>
-          <a:lnRef idx="1">
-            <a:schemeClr val="accent1"/>
-          </a:lnRef>
-          <a:fillRef idx="3">
-            <a:schemeClr val="accent1"/>
-          </a:fillRef>
-          <a:effectRef idx="2">
-            <a:schemeClr val="accent1"/>
-          </a:effectRef>
-          <a:fontRef idx="minor">
-            <a:schemeClr val="lt1"/>
-          </a:fontRef>
-        </p:style>
-        <p:txBody>
-          <a:bodyPr rtlCol="0" anchor="ctr"/>
-          <a:lstStyle/>
-          <a:p>
-            <a:pPr algn="ctr"/>
-          </a:p>
-        </p:txBody>
-      </p:sp>
-      <p:sp>
-        <p:nvSpPr>
-          <p:cNvPr id="7" name="TextBox 6"/>
-          <p:cNvSpPr txBox="1"/>
-          <p:nvPr/>
-        </p:nvSpPr>
-        <p:spPr>
-          <a:xfrm>
-            <a:off x="6492240" y="1508760"/>
-            <a:ext cx="4754880" cy="4754880"/>
-          </a:xfrm>
-          <a:prstGeom prst="rect">
-            <a:avLst/>
-          </a:prstGeom>
-          <a:noFill/>
-        </p:spPr>
-        <p:txBody>
-          <a:bodyPr wrap="square">
-            <a:spAutoFit/>
-          </a:bodyPr>
-          <a:lstStyle/>
-          <a:p>
-            <a:pPr>
-              <a:defRPr sz="1600" b="1">
-                <a:solidFill>
-                  <a:srgbClr val="00F2FE"/>
-                </a:solidFill>
-                <a:latin typeface="Arial"/>
-              </a:defRPr>
-            </a:pPr>
-            <a:r>
-              <a:t>Security &amp; Data Integrity</a:t>
-            </a:r>
-          </a:p>
-          <a:p>
-            <a:pPr>
-              <a:spcBef>
-                <a:spcPts val="800"/>
-              </a:spcBef>
-              <a:defRPr sz="1300">
-                <a:solidFill>
-                  <a:srgbClr val="CBD5E1"/>
-                </a:solidFill>
-                <a:latin typeface="Arial"/>
-              </a:defRPr>
-            </a:pPr>
-            <a:r>
-              <a:t>• PDO Prepared Statements: Parameterized queries protect against 100% of SQL Injection attacks.</a:t>
-            </a:r>
-          </a:p>
-          <a:p>
-            <a:pPr>
-              <a:spcBef>
-                <a:spcPts val="800"/>
-              </a:spcBef>
-              <a:defRPr sz="1300">
-                <a:solidFill>
-                  <a:srgbClr val="CBD5E1"/>
-                </a:solidFill>
-                <a:latin typeface="Arial"/>
-              </a:defRPr>
-            </a:pPr>
-            <a:r>
-              <a:t>• Referential Integrity: Primary Keys &amp; Foreign Keys with CASCADE / SET NULL rules.</a:t>
-            </a:r>
-          </a:p>
-          <a:p>
-            <a:pPr>
-              <a:spcBef>
-                <a:spcPts val="800"/>
-              </a:spcBef>
-              <a:defRPr sz="1300">
-                <a:solidFill>
-                  <a:srgbClr val="CBD5E1"/>
-                </a:solidFill>
-                <a:latin typeface="Arial"/>
-              </a:defRPr>
-            </a:pPr>
-            <a:r>
-              <a:t>• Prepared Schema Script: plantpulse_schema.sql handles database setup &amp; seed data.</a:t>
-            </a:r>
-          </a:p>
-          <a:p>
-            <a:pPr>
-              <a:spcBef>
-                <a:spcPts val="800"/>
-              </a:spcBef>
-              <a:defRPr sz="1300">
-                <a:solidFill>
-                  <a:srgbClr val="CBD5E1"/>
-                </a:solidFill>
-                <a:latin typeface="Arial"/>
-              </a:defRPr>
-            </a:pPr>
-            <a:r>
-              <a:t>• REST API Layer: api/*.php endpoints format clean JSON responses.</a:t>
-            </a:r>
-          </a:p>
-        </p:txBody>
-      </p:sp>
-    </p:spTree>
-  </p:cSld>
-  <p:clrMapOvr>
-    <a:masterClrMapping/>
-  </p:clrMapOvr>
-</p:sld>
-</file>
-
-<file path=ppt/slides/slide15.xml><?xml version="1.0" encoding="utf-8"?>
-<p:sld xmlns:a="http://schemas.openxmlformats.org/drawingml/2006/main" xmlns:p="http://schemas.openxmlformats.org/presentationml/2006/main" xmlns:r="http://schemas.openxmlformats.org/officeDocument/2006/relationships">
-  <p:cSld>
-    <p:bg>
-      <p:bgPr>
-        <a:solidFill>
-          <a:srgbClr val="0F172A"/>
-        </a:solidFill>
-        <a:effectLst/>
-      </p:bgPr>
-    </p:bg>
-    <p:spTree>
-      <p:nvGrpSpPr>
-        <p:cNvPr id="1" name=""/>
-        <p:cNvGrpSpPr/>
-        <p:nvPr/>
-      </p:nvGrpSpPr>
-      <p:grpSpPr/>
-      <p:sp>
-        <p:nvSpPr>
-          <p:cNvPr id="2" name="Rectangle 1"/>
-          <p:cNvSpPr/>
-          <p:nvPr/>
-        </p:nvSpPr>
-        <p:spPr>
-          <a:xfrm>
-            <a:off x="731520" y="365760"/>
-            <a:ext cx="10728655" cy="777240"/>
-          </a:xfrm>
-          <a:prstGeom prst="rect">
-            <a:avLst/>
-          </a:prstGeom>
-          <a:solidFill>
-            <a:srgbClr val="1E293B"/>
-          </a:solidFill>
-          <a:ln w="12700">
-            <a:solidFill>
-              <a:srgbClr val="334155"/>
-            </a:solidFill>
-          </a:ln>
-        </p:spPr>
-        <p:style>
-          <a:lnRef idx="1">
-            <a:schemeClr val="accent1"/>
-          </a:lnRef>
-          <a:fillRef idx="3">
-            <a:schemeClr val="accent1"/>
-          </a:fillRef>
-          <a:effectRef idx="2">
-            <a:schemeClr val="accent1"/>
-          </a:effectRef>
-          <a:fontRef idx="minor">
-            <a:schemeClr val="lt1"/>
-          </a:fontRef>
-        </p:style>
-        <p:txBody>
-          <a:bodyPr rtlCol="0" anchor="ctr"/>
-          <a:lstStyle/>
-          <a:p>
-            <a:pPr algn="ctr"/>
-          </a:p>
-        </p:txBody>
-      </p:sp>
-      <p:sp>
-        <p:nvSpPr>
-          <p:cNvPr id="3" name="TextBox 2"/>
-          <p:cNvSpPr txBox="1"/>
-          <p:nvPr/>
-        </p:nvSpPr>
-        <p:spPr>
-          <a:xfrm>
-            <a:off x="914400" y="384048"/>
-            <a:ext cx="10332720" cy="731520"/>
-          </a:xfrm>
-          <a:prstGeom prst="rect">
-            <a:avLst/>
-          </a:prstGeom>
-          <a:noFill/>
-        </p:spPr>
-        <p:txBody>
-          <a:bodyPr wrap="square" tIns="0" bIns="0">
-            <a:spAutoFit/>
-          </a:bodyPr>
-          <a:lstStyle/>
-          <a:p>
-            <a:pPr>
-              <a:defRPr sz="1000" b="1">
-                <a:solidFill>
-                  <a:srgbClr val="00F2FE"/>
-                </a:solidFill>
-                <a:latin typeface="Arial"/>
-              </a:defRPr>
-            </a:pPr>
-            <a:r>
-              <a:t>U21CS504 - WEB TECHNOLOGIES LABORATORY</a:t>
-            </a:r>
-          </a:p>
-          <a:p>
-            <a:pPr>
-              <a:defRPr sz="2000" b="1">
-                <a:solidFill>
-                  <a:srgbClr val="FFFFFF"/>
-                </a:solidFill>
-                <a:latin typeface="Arial"/>
-              </a:defRPr>
-            </a:pPr>
-            <a:r>
-              <a:t>14. Conclusion &amp; Future Roadmap</a:t>
-            </a:r>
-          </a:p>
-        </p:txBody>
-      </p:sp>
-      <p:sp>
-        <p:nvSpPr>
-          <p:cNvPr id="4" name="Rectangle 3"/>
-          <p:cNvSpPr/>
-          <p:nvPr/>
-        </p:nvSpPr>
-        <p:spPr>
-          <a:xfrm>
-            <a:off x="731520" y="1325880"/>
-            <a:ext cx="5120640" cy="5120640"/>
-          </a:xfrm>
-          <a:prstGeom prst="rect">
-            <a:avLst/>
-          </a:prstGeom>
-          <a:solidFill>
-            <a:srgbClr val="1E293B"/>
-          </a:solidFill>
-          <a:ln w="12700">
-            <a:solidFill>
-              <a:srgbClr val="334155"/>
-            </a:solidFill>
-          </a:ln>
-        </p:spPr>
-        <p:style>
-          <a:lnRef idx="1">
-            <a:schemeClr val="accent1"/>
-          </a:lnRef>
-          <a:fillRef idx="3">
-            <a:schemeClr val="accent1"/>
-          </a:fillRef>
-          <a:effectRef idx="2">
-            <a:schemeClr val="accent1"/>
-          </a:effectRef>
-          <a:fontRef idx="minor">
-            <a:schemeClr val="lt1"/>
-          </a:fontRef>
-        </p:style>
-        <p:txBody>
-          <a:bodyPr rtlCol="0" anchor="ctr"/>
-          <a:lstStyle/>
-          <a:p>
-            <a:pPr algn="ctr"/>
-          </a:p>
-        </p:txBody>
-      </p:sp>
-      <p:sp>
-        <p:nvSpPr>
-          <p:cNvPr id="5" name="TextBox 4"/>
-          <p:cNvSpPr txBox="1"/>
-          <p:nvPr/>
-        </p:nvSpPr>
-        <p:spPr>
-          <a:xfrm>
-            <a:off x="914400" y="1508760"/>
-            <a:ext cx="4754880" cy="4754880"/>
-          </a:xfrm>
-          <a:prstGeom prst="rect">
-            <a:avLst/>
-          </a:prstGeom>
-          <a:noFill/>
-        </p:spPr>
-        <p:txBody>
-          <a:bodyPr wrap="square">
-            <a:spAutoFit/>
-          </a:bodyPr>
-          <a:lstStyle/>
-          <a:p>
-            <a:pPr>
-              <a:defRPr sz="1600" b="1">
-                <a:solidFill>
-                  <a:srgbClr val="00F2FE"/>
-                </a:solidFill>
-                <a:latin typeface="Arial"/>
-              </a:defRPr>
-            </a:pPr>
-            <a:r>
-              <a:t>Project Achievements</a:t>
-            </a:r>
-          </a:p>
-          <a:p>
-            <a:pPr>
-              <a:spcBef>
-                <a:spcPts val="800"/>
-              </a:spcBef>
-              <a:defRPr sz="1300">
-                <a:solidFill>
-                  <a:srgbClr val="CBD5E1"/>
-                </a:solidFill>
-                <a:latin typeface="Arial"/>
-              </a:defRPr>
-            </a:pPr>
-            <a:r>
-              <a:t>• Delivered full Stage 1 (Static Web App) &amp; Stage 2 (PHP + MySQL Backend) requirements.</a:t>
-            </a:r>
-          </a:p>
-          <a:p>
-            <a:pPr>
-              <a:spcBef>
-                <a:spcPts val="800"/>
-              </a:spcBef>
-              <a:defRPr sz="1300">
-                <a:solidFill>
-                  <a:srgbClr val="CBD5E1"/>
-                </a:solidFill>
-                <a:latin typeface="Arial"/>
-              </a:defRPr>
-            </a:pPr>
-            <a:r>
-              <a:t>• Eliminated paper work order dispatch delays and reduced maintenance response times.</a:t>
-            </a:r>
-          </a:p>
-          <a:p>
-            <a:pPr>
-              <a:spcBef>
-                <a:spcPts val="800"/>
-              </a:spcBef>
-              <a:defRPr sz="1300">
-                <a:solidFill>
-                  <a:srgbClr val="CBD5E1"/>
-                </a:solidFill>
-                <a:latin typeface="Arial"/>
-              </a:defRPr>
-            </a:pPr>
-            <a:r>
-              <a:t>• Achieved zero-flicker dual-theme stability and high-contrast accessibility.</a:t>
-            </a:r>
-          </a:p>
-          <a:p>
-            <a:pPr>
-              <a:spcBef>
-                <a:spcPts val="800"/>
-              </a:spcBef>
-              <a:defRPr sz="1300">
-                <a:solidFill>
-                  <a:srgbClr val="CBD5E1"/>
-                </a:solidFill>
-                <a:latin typeface="Arial"/>
-              </a:defRPr>
-            </a:pPr>
-            <a:r>
-              <a:t>• Demonstrated real-time data flow between browser UI and MySQL Server 8.0.</a:t>
-            </a:r>
-          </a:p>
-        </p:txBody>
-      </p:sp>
-      <p:sp>
-        <p:nvSpPr>
-          <p:cNvPr id="6" name="Rectangle 5"/>
-          <p:cNvSpPr/>
-          <p:nvPr/>
-        </p:nvSpPr>
-        <p:spPr>
-          <a:xfrm>
-            <a:off x="6309360" y="1325880"/>
-            <a:ext cx="5120640" cy="5120640"/>
-          </a:xfrm>
-          <a:prstGeom prst="rect">
-            <a:avLst/>
-          </a:prstGeom>
-          <a:solidFill>
-            <a:srgbClr val="1E293B"/>
-          </a:solidFill>
-          <a:ln w="12700">
-            <a:solidFill>
-              <a:srgbClr val="334155"/>
-            </a:solidFill>
-          </a:ln>
-        </p:spPr>
-        <p:style>
-          <a:lnRef idx="1">
-            <a:schemeClr val="accent1"/>
-          </a:lnRef>
-          <a:fillRef idx="3">
-            <a:schemeClr val="accent1"/>
-          </a:fillRef>
-          <a:effectRef idx="2">
-            <a:schemeClr val="accent1"/>
-          </a:effectRef>
-          <a:fontRef idx="minor">
-            <a:schemeClr val="lt1"/>
-          </a:fontRef>
-        </p:style>
-        <p:txBody>
-          <a:bodyPr rtlCol="0" anchor="ctr"/>
-          <a:lstStyle/>
-          <a:p>
-            <a:pPr algn="ctr"/>
-          </a:p>
-        </p:txBody>
-      </p:sp>
-      <p:sp>
-        <p:nvSpPr>
-          <p:cNvPr id="7" name="TextBox 6"/>
-          <p:cNvSpPr txBox="1"/>
-          <p:nvPr/>
-        </p:nvSpPr>
-        <p:spPr>
-          <a:xfrm>
-            <a:off x="6492240" y="1508760"/>
-            <a:ext cx="4754880" cy="4754880"/>
-          </a:xfrm>
-          <a:prstGeom prst="rect">
-            <a:avLst/>
-          </a:prstGeom>
-          <a:noFill/>
-        </p:spPr>
-        <p:txBody>
-          <a:bodyPr wrap="square">
-            <a:spAutoFit/>
-          </a:bodyPr>
-          <a:lstStyle/>
-          <a:p>
-            <a:pPr>
-              <a:defRPr sz="1600" b="1">
-                <a:solidFill>
-                  <a:srgbClr val="00F2FE"/>
-                </a:solidFill>
-                <a:latin typeface="Arial"/>
-              </a:defRPr>
-            </a:pPr>
-            <a:r>
-              <a:t>Future Scalability Roadmap</a:t>
-            </a:r>
-          </a:p>
-          <a:p>
-            <a:pPr>
-              <a:spcBef>
-                <a:spcPts val="800"/>
-              </a:spcBef>
-              <a:defRPr sz="1300">
-                <a:solidFill>
-                  <a:srgbClr val="CBD5E1"/>
-                </a:solidFill>
-                <a:latin typeface="Arial"/>
-              </a:defRPr>
-            </a:pPr>
-            <a:r>
-              <a:t>• IoT Sensor Integration: Connect physical MQTT vibration and thermal sensors for live hardware feeds.</a:t>
-            </a:r>
-          </a:p>
-          <a:p>
-            <a:pPr>
-              <a:spcBef>
-                <a:spcPts val="800"/>
-              </a:spcBef>
-              <a:defRPr sz="1300">
-                <a:solidFill>
-                  <a:srgbClr val="CBD5E1"/>
-                </a:solidFill>
-                <a:latin typeface="Arial"/>
-              </a:defRPr>
-            </a:pPr>
-            <a:r>
-              <a:t>• AI Deep Learning Models: Implement Python TensorFlow predictive failure forecasting.</a:t>
-            </a:r>
-          </a:p>
-          <a:p>
-            <a:pPr>
-              <a:spcBef>
-                <a:spcPts val="800"/>
-              </a:spcBef>
-              <a:defRPr sz="1300">
-                <a:solidFill>
-                  <a:srgbClr val="CBD5E1"/>
-                </a:solidFill>
-                <a:latin typeface="Arial"/>
-              </a:defRPr>
-            </a:pPr>
-            <a:r>
-              <a:t>• Mobile App Companion: Build a mobile PWA companion for field maintenance technicians.</a:t>
-            </a:r>
-          </a:p>
-        </p:txBody>
-      </p:sp>
-    </p:spTree>
-  </p:cSld>
-  <p:clrMapOvr>
-    <a:masterClrMapping/>
-  </p:clrMapOvr>
-</p:sld>
-</file>
-
-<file path=ppt/slides/slide2.xml><?xml version="1.0" encoding="utf-8"?>
-<p:sld xmlns:a="http://schemas.openxmlformats.org/drawingml/2006/main" xmlns:p="http://schemas.openxmlformats.org/presentationml/2006/main" xmlns:r="http://schemas.openxmlformats.org/officeDocument/2006/relationships">
-  <p:cSld>
-    <p:bg>
-      <p:bgPr>
-        <a:solidFill>
-          <a:srgbClr val="0F172A"/>
-        </a:solidFill>
-        <a:effectLst/>
-      </p:bgPr>
-    </p:bg>
-    <p:spTree>
-      <p:nvGrpSpPr>
-        <p:cNvPr id="1" name=""/>
-        <p:cNvGrpSpPr/>
-        <p:nvPr/>
-      </p:nvGrpSpPr>
-      <p:grpSpPr/>
-      <p:sp>
-        <p:nvSpPr>
-          <p:cNvPr id="2" name="Rectangle 1"/>
-          <p:cNvSpPr/>
-          <p:nvPr/>
-        </p:nvSpPr>
-        <p:spPr>
-          <a:xfrm>
-            <a:off x="731520" y="365760"/>
-            <a:ext cx="10728655" cy="777240"/>
-          </a:xfrm>
-          <a:prstGeom prst="rect">
-            <a:avLst/>
-          </a:prstGeom>
-          <a:solidFill>
-            <a:srgbClr val="1E293B"/>
-          </a:solidFill>
-          <a:ln w="12700">
-            <a:solidFill>
-              <a:srgbClr val="334155"/>
-            </a:solidFill>
-          </a:ln>
-        </p:spPr>
-        <p:style>
-          <a:lnRef idx="1">
-            <a:schemeClr val="accent1"/>
-          </a:lnRef>
-          <a:fillRef idx="3">
-            <a:schemeClr val="accent1"/>
-          </a:fillRef>
-          <a:effectRef idx="2">
-            <a:schemeClr val="accent1"/>
-          </a:effectRef>
-          <a:fontRef idx="minor">
-            <a:schemeClr val="lt1"/>
-          </a:fontRef>
-        </p:style>
-        <p:txBody>
-          <a:bodyPr rtlCol="0" anchor="ctr"/>
-          <a:lstStyle/>
-          <a:p>
-            <a:pPr algn="ctr"/>
-          </a:p>
-        </p:txBody>
-      </p:sp>
-      <p:sp>
-        <p:nvSpPr>
-          <p:cNvPr id="3" name="TextBox 2"/>
-          <p:cNvSpPr txBox="1"/>
-          <p:nvPr/>
-        </p:nvSpPr>
-        <p:spPr>
-          <a:xfrm>
-            <a:off x="914400" y="384048"/>
-            <a:ext cx="10332720" cy="731520"/>
-          </a:xfrm>
-          <a:prstGeom prst="rect">
-            <a:avLst/>
-          </a:prstGeom>
-          <a:noFill/>
-        </p:spPr>
-        <p:txBody>
-          <a:bodyPr wrap="square" tIns="0" bIns="0">
-            <a:spAutoFit/>
-          </a:bodyPr>
-          <a:lstStyle/>
-          <a:p>
-            <a:pPr>
-              <a:defRPr sz="1000" b="1">
-                <a:solidFill>
-                  <a:srgbClr val="00F2FE"/>
-                </a:solidFill>
-                <a:latin typeface="Arial"/>
-              </a:defRPr>
-            </a:pPr>
-            <a:r>
-              <a:t>U21CS504 - WEB TECHNOLOGIES LABORATORY</a:t>
-            </a:r>
-          </a:p>
-          <a:p>
-            <a:pPr>
-              <a:defRPr sz="2000" b="1">
-                <a:solidFill>
-                  <a:srgbClr val="FFFFFF"/>
-                </a:solidFill>
-                <a:latin typeface="Arial"/>
-              </a:defRPr>
-            </a:pPr>
-            <a:r>
-              <a:t>1. Project Overview &amp; Industrial Problem Statement</a:t>
-            </a:r>
-          </a:p>
-        </p:txBody>
-      </p:sp>
-      <p:sp>
-        <p:nvSpPr>
-          <p:cNvPr id="4" name="Rectangle 3"/>
-          <p:cNvSpPr/>
-          <p:nvPr/>
-        </p:nvSpPr>
-        <p:spPr>
-          <a:xfrm>
-            <a:off x="731520" y="1325880"/>
-            <a:ext cx="5120640" cy="5120640"/>
-          </a:xfrm>
-          <a:prstGeom prst="rect">
-            <a:avLst/>
-          </a:prstGeom>
-          <a:solidFill>
-            <a:srgbClr val="1E293B"/>
-          </a:solidFill>
-          <a:ln w="12700">
-            <a:solidFill>
-              <a:srgbClr val="334155"/>
-            </a:solidFill>
-          </a:ln>
-        </p:spPr>
-        <p:style>
-          <a:lnRef idx="1">
-            <a:schemeClr val="accent1"/>
-          </a:lnRef>
-          <a:fillRef idx="3">
-            <a:schemeClr val="accent1"/>
-          </a:fillRef>
-          <a:effectRef idx="2">
-            <a:schemeClr val="accent1"/>
-          </a:effectRef>
-          <a:fontRef idx="minor">
-            <a:schemeClr val="lt1"/>
-          </a:fontRef>
-        </p:style>
-        <p:txBody>
-          <a:bodyPr rtlCol="0" anchor="ctr"/>
-          <a:lstStyle/>
-          <a:p>
-            <a:pPr algn="ctr"/>
-          </a:p>
-        </p:txBody>
-      </p:sp>
-      <p:sp>
-        <p:nvSpPr>
-          <p:cNvPr id="5" name="TextBox 4"/>
-          <p:cNvSpPr txBox="1"/>
-          <p:nvPr/>
-        </p:nvSpPr>
-        <p:spPr>
-          <a:xfrm>
-            <a:off x="914400" y="1508760"/>
-            <a:ext cx="4754880" cy="4754880"/>
-          </a:xfrm>
-          <a:prstGeom prst="rect">
-            <a:avLst/>
-          </a:prstGeom>
-          <a:noFill/>
-        </p:spPr>
-        <p:txBody>
-          <a:bodyPr wrap="square">
-            <a:spAutoFit/>
-          </a:bodyPr>
-          <a:lstStyle/>
-          <a:p>
-            <a:pPr>
-              <a:defRPr sz="1600" b="1">
-                <a:solidFill>
-                  <a:srgbClr val="00F2FE"/>
-                </a:solidFill>
-                <a:latin typeface="Arial"/>
-              </a:defRPr>
-            </a:pPr>
-            <a:r>
-              <a:t>Industrial Background</a:t>
-            </a:r>
-          </a:p>
-          <a:p>
-            <a:pPr>
-              <a:spcBef>
-                <a:spcPts val="800"/>
-              </a:spcBef>
-              <a:defRPr sz="1300">
-                <a:solidFill>
-                  <a:srgbClr val="CBD5E1"/>
-                </a:solidFill>
-                <a:latin typeface="Arial"/>
-              </a:defRPr>
-            </a:pPr>
-            <a:r>
-              <a:t>• Industry 4.0 smart manufacturing relies on continuous machinery visibility.</a:t>
-            </a:r>
-          </a:p>
-          <a:p>
-            <a:pPr>
-              <a:spcBef>
-                <a:spcPts val="800"/>
-              </a:spcBef>
-              <a:defRPr sz="1300">
-                <a:solidFill>
-                  <a:srgbClr val="CBD5E1"/>
-                </a:solidFill>
-                <a:latin typeface="Arial"/>
-              </a:defRPr>
-            </a:pPr>
-            <a:r>
-              <a:t>• Capital-intensive equipment (5-Axis CNC Mills, Robotic Arms, Stamping Presses) operates under extreme thermal and mechanical stress.</a:t>
-            </a:r>
-          </a:p>
-          <a:p>
-            <a:pPr>
-              <a:spcBef>
-                <a:spcPts val="800"/>
-              </a:spcBef>
-              <a:defRPr sz="1300">
-                <a:solidFill>
-                  <a:srgbClr val="CBD5E1"/>
-                </a:solidFill>
-                <a:latin typeface="Arial"/>
-              </a:defRPr>
-            </a:pPr>
-            <a:r>
-              <a:t>• Unplanned breakdowns result in thousands of dollars in lost hourly production.</a:t>
-            </a:r>
-          </a:p>
-          <a:p>
-            <a:pPr>
-              <a:spcBef>
-                <a:spcPts val="800"/>
-              </a:spcBef>
-              <a:defRPr sz="1300">
-                <a:solidFill>
-                  <a:srgbClr val="CBD5E1"/>
-                </a:solidFill>
-                <a:latin typeface="Arial"/>
-              </a:defRPr>
-            </a:pPr>
-            <a:r>
-              <a:t>• Conventional plants rely on reactive 'break-fix' repairs or manual paper logbooks.</a:t>
-            </a:r>
-          </a:p>
-        </p:txBody>
-      </p:sp>
-      <p:sp>
-        <p:nvSpPr>
-          <p:cNvPr id="6" name="Rectangle 5"/>
-          <p:cNvSpPr/>
-          <p:nvPr/>
-        </p:nvSpPr>
-        <p:spPr>
-          <a:xfrm>
-            <a:off x="6309360" y="1325880"/>
-            <a:ext cx="5120640" cy="5120640"/>
-          </a:xfrm>
-          <a:prstGeom prst="rect">
-            <a:avLst/>
-          </a:prstGeom>
-          <a:solidFill>
-            <a:srgbClr val="1E293B"/>
-          </a:solidFill>
-          <a:ln w="12700">
-            <a:solidFill>
-              <a:srgbClr val="334155"/>
-            </a:solidFill>
-          </a:ln>
-        </p:spPr>
-        <p:style>
-          <a:lnRef idx="1">
-            <a:schemeClr val="accent1"/>
-          </a:lnRef>
-          <a:fillRef idx="3">
-            <a:schemeClr val="accent1"/>
-          </a:fillRef>
-          <a:effectRef idx="2">
-            <a:schemeClr val="accent1"/>
-          </a:effectRef>
-          <a:fontRef idx="minor">
-            <a:schemeClr val="lt1"/>
-          </a:fontRef>
-        </p:style>
-        <p:txBody>
-          <a:bodyPr rtlCol="0" anchor="ctr"/>
-          <a:lstStyle/>
-          <a:p>
-            <a:pPr algn="ctr"/>
-          </a:p>
-        </p:txBody>
-      </p:sp>
-      <p:sp>
-        <p:nvSpPr>
-          <p:cNvPr id="7" name="TextBox 6"/>
-          <p:cNvSpPr txBox="1"/>
-          <p:nvPr/>
-        </p:nvSpPr>
-        <p:spPr>
-          <a:xfrm>
-            <a:off x="6492240" y="1508760"/>
-            <a:ext cx="4754880" cy="4754880"/>
-          </a:xfrm>
-          <a:prstGeom prst="rect">
-            <a:avLst/>
-          </a:prstGeom>
-          <a:noFill/>
-        </p:spPr>
-        <p:txBody>
-          <a:bodyPr wrap="square">
-            <a:spAutoFit/>
-          </a:bodyPr>
-          <a:lstStyle/>
-          <a:p>
-            <a:pPr>
-              <a:defRPr sz="1600" b="1">
-                <a:solidFill>
-                  <a:srgbClr val="00F2FE"/>
-                </a:solidFill>
-                <a:latin typeface="Arial"/>
-              </a:defRPr>
-            </a:pPr>
-            <a:r>
-              <a:t>Core Problem Statement</a:t>
-            </a:r>
-          </a:p>
-          <a:p>
-            <a:pPr>
-              <a:spcBef>
-                <a:spcPts val="800"/>
-              </a:spcBef>
-              <a:defRPr sz="1300">
-                <a:solidFill>
-                  <a:srgbClr val="CBD5E1"/>
-                </a:solidFill>
-                <a:latin typeface="Arial"/>
-              </a:defRPr>
-            </a:pPr>
-            <a:r>
-              <a:t>• Manual telemetry recording leads to unnoticed vibration and temperature spikes.</a:t>
-            </a:r>
-          </a:p>
-          <a:p>
-            <a:pPr>
-              <a:spcBef>
-                <a:spcPts val="800"/>
-              </a:spcBef>
-              <a:defRPr sz="1300">
-                <a:solidFill>
-                  <a:srgbClr val="CBD5E1"/>
-                </a:solidFill>
-                <a:latin typeface="Arial"/>
-              </a:defRPr>
-            </a:pPr>
-            <a:r>
-              <a:t>• Paper work order dispatches get delayed, misallocated, or lost.</a:t>
-            </a:r>
-          </a:p>
-          <a:p>
-            <a:pPr>
-              <a:spcBef>
-                <a:spcPts val="800"/>
-              </a:spcBef>
-              <a:defRPr sz="1300">
-                <a:solidFill>
-                  <a:srgbClr val="CBD5E1"/>
-                </a:solidFill>
-                <a:latin typeface="Arial"/>
-              </a:defRPr>
-            </a:pPr>
-            <a:r>
-              <a:t>• Unmonitored spare parts inventory leads to critical stockouts during repairs.</a:t>
-            </a:r>
-          </a:p>
-          <a:p>
-            <a:pPr>
-              <a:spcBef>
-                <a:spcPts val="800"/>
-              </a:spcBef>
-              <a:defRPr sz="1300">
-                <a:solidFill>
-                  <a:srgbClr val="CBD5E1"/>
-                </a:solidFill>
-                <a:latin typeface="Arial"/>
-              </a:defRPr>
-            </a:pPr>
-            <a:r>
-              <a:t>• Existing software lacks role-aware navigation and suffers from severe dark/light theme flickering during user interaction.</a:t>
-            </a:r>
-          </a:p>
-        </p:txBody>
-      </p:sp>
-    </p:spTree>
-  </p:cSld>
-  <p:clrMapOvr>
-    <a:masterClrMapping/>
-  </p:clrMapOvr>
-</p:sld>
-</file>
-
-<file path=ppt/slides/slide3.xml><?xml version="1.0" encoding="utf-8"?>
-<p:sld xmlns:a="http://schemas.openxmlformats.org/drawingml/2006/main" xmlns:p="http://schemas.openxmlformats.org/presentationml/2006/main" xmlns:r="http://schemas.openxmlformats.org/officeDocument/2006/relationships">
-  <p:cSld>
-    <p:bg>
-      <p:bgPr>
-        <a:solidFill>
-          <a:srgbClr val="0F172A"/>
-        </a:solidFill>
-        <a:effectLst/>
-      </p:bgPr>
-    </p:bg>
-    <p:spTree>
-      <p:nvGrpSpPr>
-        <p:cNvPr id="1" name=""/>
-        <p:cNvGrpSpPr/>
-        <p:nvPr/>
-      </p:nvGrpSpPr>
-      <p:grpSpPr/>
-      <p:sp>
-        <p:nvSpPr>
-          <p:cNvPr id="2" name="Rectangle 1"/>
-          <p:cNvSpPr/>
-          <p:nvPr/>
-        </p:nvSpPr>
-        <p:spPr>
-          <a:xfrm>
-            <a:off x="731520" y="365760"/>
-            <a:ext cx="10728655" cy="777240"/>
-          </a:xfrm>
-          <a:prstGeom prst="rect">
-            <a:avLst/>
-          </a:prstGeom>
-          <a:solidFill>
-            <a:srgbClr val="1E293B"/>
-          </a:solidFill>
-          <a:ln w="12700">
-            <a:solidFill>
-              <a:srgbClr val="334155"/>
-            </a:solidFill>
-          </a:ln>
-        </p:spPr>
-        <p:style>
-          <a:lnRef idx="1">
-            <a:schemeClr val="accent1"/>
-          </a:lnRef>
-          <a:fillRef idx="3">
-            <a:schemeClr val="accent1"/>
-          </a:fillRef>
-          <a:effectRef idx="2">
-            <a:schemeClr val="accent1"/>
-          </a:effectRef>
-          <a:fontRef idx="minor">
-            <a:schemeClr val="lt1"/>
-          </a:fontRef>
-        </p:style>
-        <p:txBody>
-          <a:bodyPr rtlCol="0" anchor="ctr"/>
-          <a:lstStyle/>
-          <a:p>
-            <a:pPr algn="ctr"/>
-          </a:p>
-        </p:txBody>
-      </p:sp>
-      <p:sp>
-        <p:nvSpPr>
-          <p:cNvPr id="3" name="TextBox 2"/>
-          <p:cNvSpPr txBox="1"/>
-          <p:nvPr/>
-        </p:nvSpPr>
-        <p:spPr>
-          <a:xfrm>
-            <a:off x="914400" y="384048"/>
-            <a:ext cx="10332720" cy="731520"/>
-          </a:xfrm>
-          <a:prstGeom prst="rect">
-            <a:avLst/>
-          </a:prstGeom>
-          <a:noFill/>
-        </p:spPr>
-        <p:txBody>
-          <a:bodyPr wrap="square" tIns="0" bIns="0">
-            <a:spAutoFit/>
-          </a:bodyPr>
-          <a:lstStyle/>
-          <a:p>
-            <a:pPr>
-              <a:defRPr sz="1000" b="1">
-                <a:solidFill>
-                  <a:srgbClr val="00F2FE"/>
-                </a:solidFill>
-                <a:latin typeface="Arial"/>
-              </a:defRPr>
-            </a:pPr>
-            <a:r>
-              <a:t>U21CS504 - WEB TECHNOLOGIES LABORATORY</a:t>
-            </a:r>
-          </a:p>
-          <a:p>
-            <a:pPr>
-              <a:defRPr sz="2000" b="1">
-                <a:solidFill>
-                  <a:srgbClr val="FFFFFF"/>
-                </a:solidFill>
-                <a:latin typeface="Arial"/>
-              </a:defRPr>
-            </a:pPr>
-            <a:r>
-              <a:t>2. Project Objectives &amp; UNSDG Alignment</a:t>
-            </a:r>
-          </a:p>
-        </p:txBody>
-      </p:sp>
-      <p:sp>
-        <p:nvSpPr>
-          <p:cNvPr id="4" name="Rectangle 3"/>
-          <p:cNvSpPr/>
-          <p:nvPr/>
-        </p:nvSpPr>
-        <p:spPr>
-          <a:xfrm>
-            <a:off x="731520" y="1325880"/>
-            <a:ext cx="5120640" cy="5120640"/>
-          </a:xfrm>
-          <a:prstGeom prst="rect">
-            <a:avLst/>
-          </a:prstGeom>
-          <a:solidFill>
-            <a:srgbClr val="1E293B"/>
-          </a:solidFill>
-          <a:ln w="12700">
-            <a:solidFill>
-              <a:srgbClr val="334155"/>
-            </a:solidFill>
-          </a:ln>
-        </p:spPr>
-        <p:style>
-          <a:lnRef idx="1">
-            <a:schemeClr val="accent1"/>
-          </a:lnRef>
-          <a:fillRef idx="3">
-            <a:schemeClr val="accent1"/>
-          </a:fillRef>
-          <a:effectRef idx="2">
-            <a:schemeClr val="accent1"/>
-          </a:effectRef>
-          <a:fontRef idx="minor">
-            <a:schemeClr val="lt1"/>
-          </a:fontRef>
-        </p:style>
-        <p:txBody>
-          <a:bodyPr rtlCol="0" anchor="ctr"/>
-          <a:lstStyle/>
-          <a:p>
-            <a:pPr algn="ctr"/>
-          </a:p>
-        </p:txBody>
-      </p:sp>
-      <p:sp>
-        <p:nvSpPr>
-          <p:cNvPr id="5" name="TextBox 4"/>
-          <p:cNvSpPr txBox="1"/>
-          <p:nvPr/>
-        </p:nvSpPr>
-        <p:spPr>
-          <a:xfrm>
-            <a:off x="914400" y="1508760"/>
-            <a:ext cx="4754880" cy="4754880"/>
-          </a:xfrm>
-          <a:prstGeom prst="rect">
-            <a:avLst/>
-          </a:prstGeom>
-          <a:noFill/>
-        </p:spPr>
-        <p:txBody>
-          <a:bodyPr wrap="square">
-            <a:spAutoFit/>
-          </a:bodyPr>
-          <a:lstStyle/>
-          <a:p>
-            <a:pPr>
-              <a:defRPr sz="1600" b="1">
-                <a:solidFill>
-                  <a:srgbClr val="00F2FE"/>
-                </a:solidFill>
-                <a:latin typeface="Arial"/>
-              </a:defRPr>
-            </a:pPr>
-            <a:r>
-              <a:t>Project Objectives</a:t>
-            </a:r>
-          </a:p>
-          <a:p>
-            <a:pPr>
-              <a:spcBef>
-                <a:spcPts val="800"/>
-              </a:spcBef>
-              <a:defRPr sz="1300">
-                <a:solidFill>
-                  <a:srgbClr val="CBD5E1"/>
-                </a:solidFill>
-                <a:latin typeface="Arial"/>
-              </a:defRPr>
-            </a:pPr>
-            <a:r>
-              <a:t>• Develop a multi-role industrial platform supporting 4 distinct roles.</a:t>
-            </a:r>
-          </a:p>
-          <a:p>
-            <a:pPr>
-              <a:spcBef>
-                <a:spcPts val="800"/>
-              </a:spcBef>
-              <a:defRPr sz="1300">
-                <a:solidFill>
-                  <a:srgbClr val="CBD5E1"/>
-                </a:solidFill>
-                <a:latin typeface="Arial"/>
-              </a:defRPr>
-            </a:pPr>
-            <a:r>
-              <a:t>• Implement Role-Based Access Control (RBAC) with route security guards.</a:t>
-            </a:r>
-          </a:p>
-          <a:p>
-            <a:pPr>
-              <a:spcBef>
-                <a:spcPts val="800"/>
-              </a:spcBef>
-              <a:defRPr sz="1300">
-                <a:solidFill>
-                  <a:srgbClr val="CBD5E1"/>
-                </a:solidFill>
-                <a:latin typeface="Arial"/>
-              </a:defRPr>
-            </a:pPr>
-            <a:r>
-              <a:t>• Engineered a zero-flicker dual-theme design system (Dark &amp; Light) adhering to WCAG 2.1 AAA contrast.</a:t>
-            </a:r>
-          </a:p>
-          <a:p>
-            <a:pPr>
-              <a:spcBef>
-                <a:spcPts val="800"/>
-              </a:spcBef>
-              <a:defRPr sz="1300">
-                <a:solidFill>
-                  <a:srgbClr val="CBD5E1"/>
-                </a:solidFill>
-                <a:latin typeface="Arial"/>
-              </a:defRPr>
-            </a:pPr>
-            <a:r>
-              <a:t>• Implement automated predictive telemetry health scoring algorithms.</a:t>
-            </a:r>
-          </a:p>
-          <a:p>
-            <a:pPr>
-              <a:spcBef>
-                <a:spcPts val="800"/>
-              </a:spcBef>
-              <a:defRPr sz="1300">
-                <a:solidFill>
-                  <a:srgbClr val="CBD5E1"/>
-                </a:solidFill>
-                <a:latin typeface="Arial"/>
-              </a:defRPr>
-            </a:pPr>
-            <a:r>
-              <a:t>• Build a native PHP 8.x PDO REST API connected to MySQL Server 8.0.</a:t>
-            </a:r>
-          </a:p>
-        </p:txBody>
-      </p:sp>
-      <p:sp>
-        <p:nvSpPr>
-          <p:cNvPr id="6" name="Rectangle 5"/>
-          <p:cNvSpPr/>
-          <p:nvPr/>
-        </p:nvSpPr>
-        <p:spPr>
-          <a:xfrm>
-            <a:off x="6309360" y="1325880"/>
-            <a:ext cx="5120640" cy="5120640"/>
-          </a:xfrm>
-          <a:prstGeom prst="rect">
-            <a:avLst/>
-          </a:prstGeom>
-          <a:solidFill>
-            <a:srgbClr val="1E293B"/>
-          </a:solidFill>
-          <a:ln w="12700">
-            <a:solidFill>
-              <a:srgbClr val="334155"/>
-            </a:solidFill>
-          </a:ln>
-        </p:spPr>
-        <p:style>
-          <a:lnRef idx="1">
-            <a:schemeClr val="accent1"/>
-          </a:lnRef>
-          <a:fillRef idx="3">
-            <a:schemeClr val="accent1"/>
-          </a:fillRef>
-          <a:effectRef idx="2">
-            <a:schemeClr val="accent1"/>
-          </a:effectRef>
-          <a:fontRef idx="minor">
-            <a:schemeClr val="lt1"/>
-          </a:fontRef>
-        </p:style>
-        <p:txBody>
-          <a:bodyPr rtlCol="0" anchor="ctr"/>
-          <a:lstStyle/>
-          <a:p>
-            <a:pPr algn="ctr"/>
-          </a:p>
-        </p:txBody>
-      </p:sp>
-      <p:sp>
-        <p:nvSpPr>
-          <p:cNvPr id="7" name="TextBox 6"/>
-          <p:cNvSpPr txBox="1"/>
-          <p:nvPr/>
-        </p:nvSpPr>
-        <p:spPr>
-          <a:xfrm>
-            <a:off x="6492240" y="1508760"/>
-            <a:ext cx="4754880" cy="4754880"/>
-          </a:xfrm>
-          <a:prstGeom prst="rect">
-            <a:avLst/>
-          </a:prstGeom>
-          <a:noFill/>
-        </p:spPr>
-        <p:txBody>
-          <a:bodyPr wrap="square">
-            <a:spAutoFit/>
-          </a:bodyPr>
-          <a:lstStyle/>
-          <a:p>
-            <a:pPr>
-              <a:defRPr sz="1600" b="1">
-                <a:solidFill>
-                  <a:srgbClr val="00F2FE"/>
-                </a:solidFill>
-                <a:latin typeface="Arial"/>
-              </a:defRPr>
-            </a:pPr>
-            <a:r>
-              <a:t>UN Sustainable Development Goals</a:t>
-            </a:r>
-          </a:p>
-          <a:p>
-            <a:pPr>
-              <a:spcBef>
-                <a:spcPts val="800"/>
-              </a:spcBef>
-              <a:defRPr sz="1300">
-                <a:solidFill>
-                  <a:srgbClr val="CBD5E1"/>
-                </a:solidFill>
-                <a:latin typeface="Arial"/>
-              </a:defRPr>
-            </a:pPr>
-            <a:r>
-              <a:t>• SDG 9: Industry, Innovation &amp; Infrastructure - Fosters resilient digital manufacturing infrastructure.</a:t>
-            </a:r>
-          </a:p>
-          <a:p>
-            <a:pPr>
-              <a:spcBef>
-                <a:spcPts val="800"/>
-              </a:spcBef>
-              <a:defRPr sz="1300">
-                <a:solidFill>
-                  <a:srgbClr val="CBD5E1"/>
-                </a:solidFill>
-                <a:latin typeface="Arial"/>
-              </a:defRPr>
-            </a:pPr>
-            <a:r>
-              <a:t>• SDG 11: Sustainable Cities &amp; Communities - Reduces industrial waste through machine health optimization.</a:t>
-            </a:r>
-          </a:p>
-          <a:p>
-            <a:pPr>
-              <a:spcBef>
-                <a:spcPts val="800"/>
-              </a:spcBef>
-              <a:defRPr sz="1300">
-                <a:solidFill>
-                  <a:srgbClr val="CBD5E1"/>
-                </a:solidFill>
-                <a:latin typeface="Arial"/>
-              </a:defRPr>
-            </a:pPr>
-            <a:r>
-              <a:t>• SDG 12: Responsible Consumption &amp; Production - Extends machine lifespans and optimizes spare parts utilization.</a:t>
-            </a:r>
-          </a:p>
-        </p:txBody>
-      </p:sp>
-    </p:spTree>
-  </p:cSld>
-  <p:clrMapOvr>
-    <a:masterClrMapping/>
-  </p:clrMapOvr>
-</p:sld>
-</file>
-
-<file path=ppt/slides/slide4.xml><?xml version="1.0" encoding="utf-8"?>
-<p:sld xmlns:a="http://schemas.openxmlformats.org/drawingml/2006/main" xmlns:p="http://schemas.openxmlformats.org/presentationml/2006/main" xmlns:r="http://schemas.openxmlformats.org/officeDocument/2006/relationships">
-  <p:cSld>
-    <p:bg>
-      <p:bgPr>
-        <a:solidFill>
-          <a:srgbClr val="0F172A"/>
-        </a:solidFill>
-        <a:effectLst/>
-      </p:bgPr>
-    </p:bg>
-    <p:spTree>
-      <p:nvGrpSpPr>
-        <p:cNvPr id="1" name=""/>
-        <p:cNvGrpSpPr/>
-        <p:nvPr/>
-      </p:nvGrpSpPr>
-      <p:grpSpPr/>
-      <p:sp>
-        <p:nvSpPr>
-          <p:cNvPr id="2" name="Rectangle 1"/>
-          <p:cNvSpPr/>
-          <p:nvPr/>
-        </p:nvSpPr>
-        <p:spPr>
-          <a:xfrm>
-            <a:off x="731520" y="365760"/>
-            <a:ext cx="10728655" cy="777240"/>
-          </a:xfrm>
-          <a:prstGeom prst="rect">
-            <a:avLst/>
-          </a:prstGeom>
-          <a:solidFill>
-            <a:srgbClr val="1E293B"/>
-          </a:solidFill>
-          <a:ln w="12700">
-            <a:solidFill>
-              <a:srgbClr val="334155"/>
-            </a:solidFill>
-          </a:ln>
-        </p:spPr>
-        <p:style>
-          <a:lnRef idx="1">
-            <a:schemeClr val="accent1"/>
-          </a:lnRef>
-          <a:fillRef idx="3">
-            <a:schemeClr val="accent1"/>
-          </a:fillRef>
-          <a:effectRef idx="2">
-            <a:schemeClr val="accent1"/>
-          </a:effectRef>
-          <a:fontRef idx="minor">
-            <a:schemeClr val="lt1"/>
-          </a:fontRef>
-        </p:style>
-        <p:txBody>
-          <a:bodyPr rtlCol="0" anchor="ctr"/>
-          <a:lstStyle/>
-          <a:p>
-            <a:pPr algn="ctr"/>
-          </a:p>
-        </p:txBody>
-      </p:sp>
-      <p:sp>
-        <p:nvSpPr>
-          <p:cNvPr id="3" name="TextBox 2"/>
-          <p:cNvSpPr txBox="1"/>
-          <p:nvPr/>
-        </p:nvSpPr>
-        <p:spPr>
-          <a:xfrm>
-            <a:off x="914400" y="384048"/>
-            <a:ext cx="10332720" cy="731520"/>
-          </a:xfrm>
-          <a:prstGeom prst="rect">
-            <a:avLst/>
-          </a:prstGeom>
-          <a:noFill/>
-        </p:spPr>
-        <p:txBody>
-          <a:bodyPr wrap="square" tIns="0" bIns="0">
-            <a:spAutoFit/>
-          </a:bodyPr>
-          <a:lstStyle/>
-          <a:p>
-            <a:pPr>
-              <a:defRPr sz="1000" b="1">
-                <a:solidFill>
-                  <a:srgbClr val="00F2FE"/>
-                </a:solidFill>
-                <a:latin typeface="Arial"/>
-              </a:defRPr>
-            </a:pPr>
-            <a:r>
-              <a:t>U21CS504 - WEB TECHNOLOGIES LABORATORY</a:t>
-            </a:r>
-          </a:p>
-          <a:p>
-            <a:pPr>
-              <a:defRPr sz="2000" b="1">
-                <a:solidFill>
-                  <a:srgbClr val="FFFFFF"/>
-                </a:solidFill>
-                <a:latin typeface="Arial"/>
-              </a:defRPr>
-            </a:pPr>
-            <a:r>
-              <a:t>3. 3-Tier System Architecture &amp; Data Flow</a:t>
-            </a:r>
-          </a:p>
-        </p:txBody>
-      </p:sp>
-      <p:sp>
-        <p:nvSpPr>
-          <p:cNvPr id="4" name="Rectangle 3"/>
-          <p:cNvSpPr/>
-          <p:nvPr/>
-        </p:nvSpPr>
-        <p:spPr>
-          <a:xfrm>
-            <a:off x="731520" y="1325880"/>
-            <a:ext cx="10728655" cy="5120640"/>
-          </a:xfrm>
-          <a:prstGeom prst="rect">
-            <a:avLst/>
-          </a:prstGeom>
-          <a:solidFill>
-            <a:srgbClr val="1E293B"/>
-          </a:solidFill>
-          <a:ln w="12700">
-            <a:solidFill>
-              <a:srgbClr val="334155"/>
-            </a:solidFill>
-          </a:ln>
-        </p:spPr>
-        <p:style>
-          <a:lnRef idx="1">
-            <a:schemeClr val="accent1"/>
-          </a:lnRef>
-          <a:fillRef idx="3">
-            <a:schemeClr val="accent1"/>
-          </a:fillRef>
-          <a:effectRef idx="2">
-            <a:schemeClr val="accent1"/>
-          </a:effectRef>
-          <a:fontRef idx="minor">
-            <a:schemeClr val="lt1"/>
-          </a:fontRef>
-        </p:style>
-        <p:txBody>
-          <a:bodyPr rtlCol="0" anchor="ctr"/>
-          <a:lstStyle/>
-          <a:p>
-            <a:pPr algn="ctr"/>
-          </a:p>
-        </p:txBody>
-      </p:sp>
-      <p:sp>
-        <p:nvSpPr>
-          <p:cNvPr id="5" name="TextBox 4"/>
-          <p:cNvSpPr txBox="1"/>
-          <p:nvPr/>
-        </p:nvSpPr>
-        <p:spPr>
-          <a:xfrm>
-            <a:off x="914400" y="1508760"/>
-            <a:ext cx="10362895" cy="4754880"/>
-          </a:xfrm>
-          <a:prstGeom prst="rect">
-            <a:avLst/>
-          </a:prstGeom>
-          <a:noFill/>
-        </p:spPr>
-        <p:txBody>
-          <a:bodyPr wrap="square">
-            <a:spAutoFit/>
-          </a:bodyPr>
-          <a:lstStyle/>
-          <a:p>
-            <a:pPr>
-              <a:defRPr sz="1600" b="1">
-                <a:solidFill>
-                  <a:srgbClr val="00F2FE"/>
-                </a:solidFill>
-                <a:latin typeface="Arial"/>
-              </a:defRPr>
-            </a:pPr>
-            <a:r>
-              <a:t>Architectural Layers &amp; Data Synchronization</a:t>
-            </a:r>
-          </a:p>
-          <a:p>
-            <a:pPr>
-              <a:spcBef>
-                <a:spcPts val="800"/>
-              </a:spcBef>
-              <a:defRPr sz="1300">
-                <a:solidFill>
-                  <a:srgbClr val="CBD5E1"/>
-                </a:solidFill>
-                <a:latin typeface="Arial"/>
-              </a:defRPr>
-            </a:pPr>
-            <a:r>
-              <a:t>• Presentation Layer: Semantic HTML5, Vanilla CSS3 Design Tokens, ES6 JavaScript UI Controllers, and Chart.js 4.x visualizations.</a:t>
-            </a:r>
-          </a:p>
-          <a:p>
-            <a:pPr>
-              <a:spcBef>
-                <a:spcPts val="800"/>
-              </a:spcBef>
-              <a:defRPr sz="1300">
-                <a:solidFill>
-                  <a:srgbClr val="CBD5E1"/>
-                </a:solidFill>
-                <a:latin typeface="Arial"/>
-              </a:defRPr>
-            </a:pPr>
-            <a:r>
-              <a:t>• Application API Layer: Central Event Bus (js/store.js), RBAC Guard (js/auth.js), and native PHP 8.x REST API endpoints (api/*.php).</a:t>
-            </a:r>
-          </a:p>
-          <a:p>
-            <a:pPr>
-              <a:spcBef>
-                <a:spcPts val="800"/>
-              </a:spcBef>
-              <a:defRPr sz="1300">
-                <a:solidFill>
-                  <a:srgbClr val="CBD5E1"/>
-                </a:solidFill>
-                <a:latin typeface="Arial"/>
-              </a:defRPr>
-            </a:pPr>
-            <a:r>
-              <a:t>• Database Persistence Layer: Relational MySQL Server 8.0 database (plantpulse_db) with 9 normalized tables and foreign key constraints.</a:t>
-            </a:r>
-          </a:p>
-          <a:p>
-            <a:pPr>
-              <a:spcBef>
-                <a:spcPts val="800"/>
-              </a:spcBef>
-              <a:defRPr sz="1300">
-                <a:solidFill>
-                  <a:srgbClr val="CBD5E1"/>
-                </a:solidFill>
-                <a:latin typeface="Arial"/>
-              </a:defRPr>
-            </a:pPr>
-            <a:r>
-              <a:t>• Hybrid Auto-Sync Engine: Automatically syncs frontend state with MySQL REST API when live, with seamless fallback to LocalStorage.</a:t>
-            </a:r>
-          </a:p>
-        </p:txBody>
-      </p:sp>
-    </p:spTree>
-  </p:cSld>
-  <p:clrMapOvr>
-    <a:masterClrMapping/>
-  </p:clrMapOvr>
-</p:sld>
-</file>
-
-<file path=ppt/slides/slide5.xml><?xml version="1.0" encoding="utf-8"?>
-<p:sld xmlns:a="http://schemas.openxmlformats.org/drawingml/2006/main" xmlns:p="http://schemas.openxmlformats.org/presentationml/2006/main" xmlns:r="http://schemas.openxmlformats.org/officeDocument/2006/relationships">
-  <p:cSld>
-    <p:bg>
-      <p:bgPr>
-        <a:solidFill>
-          <a:srgbClr val="0F172A"/>
-        </a:solidFill>
-        <a:effectLst/>
-      </p:bgPr>
-    </p:bg>
-    <p:spTree>
-      <p:nvGrpSpPr>
-        <p:cNvPr id="1" name=""/>
-        <p:cNvGrpSpPr/>
-        <p:nvPr/>
-      </p:nvGrpSpPr>
-      <p:grpSpPr/>
-      <p:sp>
-        <p:nvSpPr>
-          <p:cNvPr id="2" name="Rectangle 1"/>
-          <p:cNvSpPr/>
-          <p:nvPr/>
-        </p:nvSpPr>
-        <p:spPr>
-          <a:xfrm>
-            <a:off x="731520" y="365760"/>
-            <a:ext cx="10728655" cy="777240"/>
-          </a:xfrm>
-          <a:prstGeom prst="rect">
-            <a:avLst/>
-          </a:prstGeom>
-          <a:solidFill>
-            <a:srgbClr val="1E293B"/>
-          </a:solidFill>
-          <a:ln w="12700">
-            <a:solidFill>
-              <a:srgbClr val="334155"/>
-            </a:solidFill>
-          </a:ln>
-        </p:spPr>
-        <p:style>
-          <a:lnRef idx="1">
-            <a:schemeClr val="accent1"/>
-          </a:lnRef>
-          <a:fillRef idx="3">
-            <a:schemeClr val="accent1"/>
-          </a:fillRef>
-          <a:effectRef idx="2">
-            <a:schemeClr val="accent1"/>
-          </a:effectRef>
-          <a:fontRef idx="minor">
-            <a:schemeClr val="lt1"/>
-          </a:fontRef>
-        </p:style>
-        <p:txBody>
-          <a:bodyPr rtlCol="0" anchor="ctr"/>
-          <a:lstStyle/>
-          <a:p>
-            <a:pPr algn="ctr"/>
-          </a:p>
-        </p:txBody>
-      </p:sp>
-      <p:sp>
-        <p:nvSpPr>
-          <p:cNvPr id="3" name="TextBox 2"/>
-          <p:cNvSpPr txBox="1"/>
-          <p:nvPr/>
-        </p:nvSpPr>
-        <p:spPr>
-          <a:xfrm>
-            <a:off x="914400" y="384048"/>
-            <a:ext cx="10332720" cy="731520"/>
-          </a:xfrm>
-          <a:prstGeom prst="rect">
-            <a:avLst/>
-          </a:prstGeom>
-          <a:noFill/>
-        </p:spPr>
-        <p:txBody>
-          <a:bodyPr wrap="square" tIns="0" bIns="0">
-            <a:spAutoFit/>
-          </a:bodyPr>
-          <a:lstStyle/>
-          <a:p>
-            <a:pPr>
-              <a:defRPr sz="1000" b="1">
-                <a:solidFill>
-                  <a:srgbClr val="00F2FE"/>
-                </a:solidFill>
-                <a:latin typeface="Arial"/>
-              </a:defRPr>
-            </a:pPr>
-            <a:r>
-              <a:t>U21CS504 - WEB TECHNOLOGIES LABORATORY</a:t>
-            </a:r>
-          </a:p>
-          <a:p>
-            <a:pPr>
-              <a:defRPr sz="2000" b="1">
-                <a:solidFill>
-                  <a:srgbClr val="FFFFFF"/>
-                </a:solidFill>
-                <a:latin typeface="Arial"/>
-              </a:defRPr>
-            </a:pPr>
-            <a:r>
-              <a:t>4. Technology Stack &amp; Academic Constraints</a:t>
-            </a:r>
-          </a:p>
-        </p:txBody>
-      </p:sp>
-      <p:sp>
-        <p:nvSpPr>
-          <p:cNvPr id="4" name="Rectangle 3"/>
-          <p:cNvSpPr/>
-          <p:nvPr/>
-        </p:nvSpPr>
-        <p:spPr>
-          <a:xfrm>
-            <a:off x="731520" y="1325880"/>
-            <a:ext cx="5120640" cy="5120640"/>
-          </a:xfrm>
-          <a:prstGeom prst="rect">
-            <a:avLst/>
-          </a:prstGeom>
-          <a:solidFill>
-            <a:srgbClr val="1E293B"/>
-          </a:solidFill>
-          <a:ln w="12700">
-            <a:solidFill>
-              <a:srgbClr val="334155"/>
-            </a:solidFill>
-          </a:ln>
-        </p:spPr>
-        <p:style>
-          <a:lnRef idx="1">
-            <a:schemeClr val="accent1"/>
-          </a:lnRef>
-          <a:fillRef idx="3">
-            <a:schemeClr val="accent1"/>
-          </a:fillRef>
-          <a:effectRef idx="2">
-            <a:schemeClr val="accent1"/>
-          </a:effectRef>
-          <a:fontRef idx="minor">
-            <a:schemeClr val="lt1"/>
-          </a:fontRef>
-        </p:style>
-        <p:txBody>
-          <a:bodyPr rtlCol="0" anchor="ctr"/>
-          <a:lstStyle/>
-          <a:p>
-            <a:pPr algn="ctr"/>
-          </a:p>
-        </p:txBody>
-      </p:sp>
-      <p:sp>
-        <p:nvSpPr>
-          <p:cNvPr id="5" name="TextBox 4"/>
-          <p:cNvSpPr txBox="1"/>
-          <p:nvPr/>
-        </p:nvSpPr>
-        <p:spPr>
-          <a:xfrm>
-            <a:off x="914400" y="1508760"/>
-            <a:ext cx="4754880" cy="4754880"/>
-          </a:xfrm>
-          <a:prstGeom prst="rect">
-            <a:avLst/>
-          </a:prstGeom>
-          <a:noFill/>
-        </p:spPr>
-        <p:txBody>
-          <a:bodyPr wrap="square">
-            <a:spAutoFit/>
-          </a:bodyPr>
-          <a:lstStyle/>
-          <a:p>
-            <a:pPr>
-              <a:defRPr sz="1600" b="1">
-                <a:solidFill>
-                  <a:srgbClr val="00F2FE"/>
-                </a:solidFill>
-                <a:latin typeface="Arial"/>
-              </a:defRPr>
-            </a:pPr>
-            <a:r>
-              <a:t>Stage 1 &amp; Stage 2 Tech Stack</a:t>
-            </a:r>
-          </a:p>
-          <a:p>
-            <a:pPr>
-              <a:spcBef>
-                <a:spcPts val="800"/>
-              </a:spcBef>
-              <a:defRPr sz="1300">
-                <a:solidFill>
-                  <a:srgbClr val="CBD5E1"/>
-                </a:solidFill>
-                <a:latin typeface="Arial"/>
-              </a:defRPr>
-            </a:pPr>
-            <a:r>
-              <a:t>• Structure: Semantic HTML5 Layouts &amp; Validation Modals.</a:t>
-            </a:r>
-          </a:p>
-          <a:p>
-            <a:pPr>
-              <a:spcBef>
-                <a:spcPts val="800"/>
-              </a:spcBef>
-              <a:defRPr sz="1300">
-                <a:solidFill>
-                  <a:srgbClr val="CBD5E1"/>
-                </a:solidFill>
-                <a:latin typeface="Arial"/>
-              </a:defRPr>
-            </a:pPr>
-            <a:r>
-              <a:t>• Styling: Vanilla CSS3 Tokens, Flexbox, CSS Grid, Glassmorphism.</a:t>
-            </a:r>
-          </a:p>
-          <a:p>
-            <a:pPr>
-              <a:spcBef>
-                <a:spcPts val="800"/>
-              </a:spcBef>
-              <a:defRPr sz="1300">
-                <a:solidFill>
-                  <a:srgbClr val="CBD5E1"/>
-                </a:solidFill>
-                <a:latin typeface="Arial"/>
-              </a:defRPr>
-            </a:pPr>
-            <a:r>
-              <a:t>• Client Scripting: Vanilla ES6 JavaScript (No frameworks).</a:t>
-            </a:r>
-          </a:p>
-          <a:p>
-            <a:pPr>
-              <a:spcBef>
-                <a:spcPts val="800"/>
-              </a:spcBef>
-              <a:defRPr sz="1300">
-                <a:solidFill>
-                  <a:srgbClr val="CBD5E1"/>
-                </a:solidFill>
-                <a:latin typeface="Arial"/>
-              </a:defRPr>
-            </a:pPr>
-            <a:r>
-              <a:t>• Backend API: Native PHP 8.x PDO Object-Oriented REST API.</a:t>
-            </a:r>
-          </a:p>
-          <a:p>
-            <a:pPr>
-              <a:spcBef>
-                <a:spcPts val="800"/>
-              </a:spcBef>
-              <a:defRPr sz="1300">
-                <a:solidFill>
-                  <a:srgbClr val="CBD5E1"/>
-                </a:solidFill>
-                <a:latin typeface="Arial"/>
-              </a:defRPr>
-            </a:pPr>
-            <a:r>
-              <a:t>• Database: MySQL Server 8.0 (plantpulse_db) with 9 tables.</a:t>
-            </a:r>
-          </a:p>
-        </p:txBody>
-      </p:sp>
-      <p:sp>
-        <p:nvSpPr>
-          <p:cNvPr id="6" name="Rectangle 5"/>
-          <p:cNvSpPr/>
-          <p:nvPr/>
-        </p:nvSpPr>
-        <p:spPr>
-          <a:xfrm>
-            <a:off x="6309360" y="1325880"/>
-            <a:ext cx="5120640" cy="5120640"/>
-          </a:xfrm>
-          <a:prstGeom prst="rect">
-            <a:avLst/>
-          </a:prstGeom>
-          <a:solidFill>
-            <a:srgbClr val="1E293B"/>
-          </a:solidFill>
-          <a:ln w="12700">
-            <a:solidFill>
-              <a:srgbClr val="334155"/>
-            </a:solidFill>
-          </a:ln>
-        </p:spPr>
-        <p:style>
-          <a:lnRef idx="1">
-            <a:schemeClr val="accent1"/>
-          </a:lnRef>
-          <a:fillRef idx="3">
-            <a:schemeClr val="accent1"/>
-          </a:fillRef>
-          <a:effectRef idx="2">
-            <a:schemeClr val="accent1"/>
-          </a:effectRef>
-          <a:fontRef idx="minor">
-            <a:schemeClr val="lt1"/>
-          </a:fontRef>
-        </p:style>
-        <p:txBody>
-          <a:bodyPr rtlCol="0" anchor="ctr"/>
-          <a:lstStyle/>
-          <a:p>
-            <a:pPr algn="ctr"/>
-          </a:p>
-        </p:txBody>
-      </p:sp>
-      <p:sp>
-        <p:nvSpPr>
-          <p:cNvPr id="7" name="TextBox 6"/>
-          <p:cNvSpPr txBox="1"/>
-          <p:nvPr/>
-        </p:nvSpPr>
-        <p:spPr>
-          <a:xfrm>
-            <a:off x="6492240" y="1508760"/>
-            <a:ext cx="4754880" cy="4754880"/>
-          </a:xfrm>
-          <a:prstGeom prst="rect">
-            <a:avLst/>
-          </a:prstGeom>
-          <a:noFill/>
-        </p:spPr>
-        <p:txBody>
-          <a:bodyPr wrap="square">
-            <a:spAutoFit/>
-          </a:bodyPr>
-          <a:lstStyle/>
-          <a:p>
-            <a:pPr>
-              <a:defRPr sz="1600" b="1">
-                <a:solidFill>
-                  <a:srgbClr val="00F2FE"/>
-                </a:solidFill>
-                <a:latin typeface="Arial"/>
-              </a:defRPr>
-            </a:pPr>
-            <a:r>
-              <a:t>Academic Constraints Enforced</a:t>
-            </a:r>
-          </a:p>
-          <a:p>
-            <a:pPr>
-              <a:spcBef>
-                <a:spcPts val="800"/>
-              </a:spcBef>
-              <a:defRPr sz="1300">
-                <a:solidFill>
-                  <a:srgbClr val="CBD5E1"/>
-                </a:solidFill>
-                <a:latin typeface="Arial"/>
-              </a:defRPr>
-            </a:pPr>
-            <a:r>
-              <a:t>• STRICT COMPLIANCE: React, Angular, Vue, Node.js, Express, MongoDB, Firebase, and PostgreSQL are NOT used.</a:t>
-            </a:r>
-          </a:p>
-          <a:p>
-            <a:pPr>
-              <a:spcBef>
-                <a:spcPts val="800"/>
-              </a:spcBef>
-              <a:defRPr sz="1300">
-                <a:solidFill>
-                  <a:srgbClr val="CBD5E1"/>
-                </a:solidFill>
-                <a:latin typeface="Arial"/>
-              </a:defRPr>
-            </a:pPr>
-            <a:r>
-              <a:t>• PDO Prepared Statements: 100% protection against SQL Injection attacks.</a:t>
-            </a:r>
-          </a:p>
-          <a:p>
-            <a:pPr>
-              <a:spcBef>
-                <a:spcPts val="800"/>
-              </a:spcBef>
-              <a:defRPr sz="1300">
-                <a:solidFill>
-                  <a:srgbClr val="CBD5E1"/>
-                </a:solidFill>
-                <a:latin typeface="Arial"/>
-              </a:defRPr>
-            </a:pPr>
-            <a:r>
-              <a:t>• Zero-Flicker Early Script: Head script prevents FOUC in Light mode.</a:t>
-            </a:r>
-          </a:p>
-          <a:p>
-            <a:pPr>
-              <a:spcBef>
-                <a:spcPts val="800"/>
-              </a:spcBef>
-              <a:defRPr sz="1300">
-                <a:solidFill>
-                  <a:srgbClr val="CBD5E1"/>
-                </a:solidFill>
-                <a:latin typeface="Arial"/>
-              </a:defRPr>
-            </a:pPr>
-            <a:r>
-              <a:t>• Responsive Grid: Optimized for Desktop, Tablet, and Mobile devices.</a:t>
-            </a:r>
-          </a:p>
-        </p:txBody>
-      </p:sp>
-    </p:spTree>
-  </p:cSld>
-  <p:clrMapOvr>
-    <a:masterClrMapping/>
-  </p:clrMapOvr>
-</p:sld>
-</file>
-
-<file path=ppt/slides/slide6.xml><?xml version="1.0" encoding="utf-8"?>
-<p:sld xmlns:a="http://schemas.openxmlformats.org/drawingml/2006/main" xmlns:p="http://schemas.openxmlformats.org/presentationml/2006/main" xmlns:r="http://schemas.openxmlformats.org/officeDocument/2006/relationships">
-  <p:cSld>
-    <p:bg>
-      <p:bgPr>
-        <a:solidFill>
-          <a:srgbClr val="0F172A"/>
-        </a:solidFill>
-        <a:effectLst/>
-      </p:bgPr>
-    </p:bg>
-    <p:spTree>
-      <p:nvGrpSpPr>
-        <p:cNvPr id="1" name=""/>
-        <p:cNvGrpSpPr/>
-        <p:nvPr/>
-      </p:nvGrpSpPr>
-      <p:grpSpPr/>
-      <p:sp>
-        <p:nvSpPr>
-          <p:cNvPr id="2" name="Rectangle 1"/>
-          <p:cNvSpPr/>
-          <p:nvPr/>
-        </p:nvSpPr>
-        <p:spPr>
-          <a:xfrm>
-            <a:off x="731520" y="365760"/>
-            <a:ext cx="10728655" cy="777240"/>
-          </a:xfrm>
-          <a:prstGeom prst="rect">
-            <a:avLst/>
-          </a:prstGeom>
-          <a:solidFill>
-            <a:srgbClr val="1E293B"/>
-          </a:solidFill>
-          <a:ln w="12700">
-            <a:solidFill>
-              <a:srgbClr val="334155"/>
-            </a:solidFill>
-          </a:ln>
-        </p:spPr>
-        <p:style>
-          <a:lnRef idx="1">
-            <a:schemeClr val="accent1"/>
-          </a:lnRef>
-          <a:fillRef idx="3">
-            <a:schemeClr val="accent1"/>
-          </a:fillRef>
-          <a:effectRef idx="2">
-            <a:schemeClr val="accent1"/>
-          </a:effectRef>
-          <a:fontRef idx="minor">
-            <a:schemeClr val="lt1"/>
-          </a:fontRef>
-        </p:style>
-        <p:txBody>
-          <a:bodyPr rtlCol="0" anchor="ctr"/>
-          <a:lstStyle/>
-          <a:p>
-            <a:pPr algn="ctr"/>
-          </a:p>
-        </p:txBody>
-      </p:sp>
-      <p:sp>
-        <p:nvSpPr>
-          <p:cNvPr id="3" name="TextBox 2"/>
-          <p:cNvSpPr txBox="1"/>
-          <p:nvPr/>
-        </p:nvSpPr>
-        <p:spPr>
-          <a:xfrm>
-            <a:off x="914400" y="384048"/>
-            <a:ext cx="10332720" cy="731520"/>
-          </a:xfrm>
-          <a:prstGeom prst="rect">
-            <a:avLst/>
-          </a:prstGeom>
-          <a:noFill/>
-        </p:spPr>
-        <p:txBody>
-          <a:bodyPr wrap="square" tIns="0" bIns="0">
-            <a:spAutoFit/>
-          </a:bodyPr>
-          <a:lstStyle/>
-          <a:p>
-            <a:pPr>
-              <a:defRPr sz="1000" b="1">
-                <a:solidFill>
-                  <a:srgbClr val="00F2FE"/>
-                </a:solidFill>
-                <a:latin typeface="Arial"/>
-              </a:defRPr>
-            </a:pPr>
-            <a:r>
-              <a:t>U21CS504 - WEB TECHNOLOGIES LABORATORY</a:t>
-            </a:r>
-          </a:p>
-          <a:p>
-            <a:pPr>
-              <a:defRPr sz="2000" b="1">
-                <a:solidFill>
-                  <a:srgbClr val="FFFFFF"/>
-                </a:solidFill>
-                <a:latin typeface="Arial"/>
-              </a:defRPr>
-            </a:pPr>
-            <a:r>
-              <a:t>5. Multi-Role Authentication Gateway</a:t>
-            </a:r>
-          </a:p>
-        </p:txBody>
-      </p:sp>
-      <p:sp>
-        <p:nvSpPr>
-          <p:cNvPr id="4" name="Rectangle 3"/>
-          <p:cNvSpPr/>
-          <p:nvPr/>
-        </p:nvSpPr>
-        <p:spPr>
-          <a:xfrm>
-            <a:off x="731520" y="1325880"/>
-            <a:ext cx="4114800" cy="5120640"/>
-          </a:xfrm>
-          <a:prstGeom prst="rect">
-            <a:avLst/>
-          </a:prstGeom>
-          <a:solidFill>
-            <a:srgbClr val="1E293B"/>
-          </a:solidFill>
-          <a:ln w="12700">
-            <a:solidFill>
-              <a:srgbClr val="334155"/>
-            </a:solidFill>
-          </a:ln>
-        </p:spPr>
-        <p:style>
-          <a:lnRef idx="1">
-            <a:schemeClr val="accent1"/>
-          </a:lnRef>
-          <a:fillRef idx="3">
-            <a:schemeClr val="accent1"/>
-          </a:fillRef>
-          <a:effectRef idx="2">
-            <a:schemeClr val="accent1"/>
-          </a:effectRef>
-          <a:fontRef idx="minor">
-            <a:schemeClr val="lt1"/>
-          </a:fontRef>
-        </p:style>
-        <p:txBody>
-          <a:bodyPr rtlCol="0" anchor="ctr"/>
-          <a:lstStyle/>
-          <a:p>
-            <a:pPr algn="ctr"/>
-          </a:p>
-        </p:txBody>
-      </p:sp>
-      <p:sp>
-        <p:nvSpPr>
-          <p:cNvPr id="5" name="TextBox 4"/>
-          <p:cNvSpPr txBox="1"/>
-          <p:nvPr/>
-        </p:nvSpPr>
-        <p:spPr>
-          <a:xfrm>
-            <a:off x="914400" y="1508760"/>
-            <a:ext cx="3749040" cy="4754880"/>
-          </a:xfrm>
-          <a:prstGeom prst="rect">
-            <a:avLst/>
-          </a:prstGeom>
-          <a:noFill/>
-        </p:spPr>
-        <p:txBody>
-          <a:bodyPr wrap="square">
-            <a:spAutoFit/>
-          </a:bodyPr>
-          <a:lstStyle/>
-          <a:p>
-            <a:pPr>
-              <a:defRPr sz="1600" b="1">
-                <a:solidFill>
-                  <a:srgbClr val="00F2FE"/>
-                </a:solidFill>
-                <a:latin typeface="Arial"/>
-              </a:defRPr>
-            </a:pPr>
-            <a:r>
-              <a:t>Key Capabilities &amp; Details</a:t>
-            </a:r>
-          </a:p>
-          <a:p>
-            <a:pPr>
-              <a:spcBef>
-                <a:spcPts val="800"/>
-              </a:spcBef>
-              <a:defRPr sz="1300">
-                <a:solidFill>
-                  <a:srgbClr val="CBD5E1"/>
-                </a:solidFill>
-                <a:latin typeface="Arial"/>
-              </a:defRPr>
-            </a:pPr>
-            <a:r>
-              <a:t>• Split-screen desktop gateway with industrial backdrop.</a:t>
-            </a:r>
-          </a:p>
-          <a:p>
-            <a:pPr>
-              <a:spcBef>
-                <a:spcPts val="800"/>
-              </a:spcBef>
-              <a:defRPr sz="1300">
-                <a:solidFill>
-                  <a:srgbClr val="CBD5E1"/>
-                </a:solidFill>
-                <a:latin typeface="Arial"/>
-              </a:defRPr>
-            </a:pPr>
-            <a:r>
-              <a:t>• Supports 4 distinct roles: Plant Manager (Admin), Technician, Supervisor, and Inventory Manager.</a:t>
-            </a:r>
-          </a:p>
-          <a:p>
-            <a:pPr>
-              <a:spcBef>
-                <a:spcPts val="800"/>
-              </a:spcBef>
-              <a:defRPr sz="1300">
-                <a:solidFill>
-                  <a:srgbClr val="CBD5E1"/>
-                </a:solidFill>
-                <a:latin typeface="Arial"/>
-              </a:defRPr>
-            </a:pPr>
-            <a:r>
-              <a:t>• Features quick-fill demo credentials chips for 1-click evaluation.</a:t>
-            </a:r>
-          </a:p>
-          <a:p>
-            <a:pPr>
-              <a:spcBef>
-                <a:spcPts val="800"/>
-              </a:spcBef>
-              <a:defRPr sz="1300">
-                <a:solidFill>
-                  <a:srgbClr val="CBD5E1"/>
-                </a:solidFill>
-                <a:latin typeface="Arial"/>
-              </a:defRPr>
-            </a:pPr>
-            <a:r>
-              <a:t>• Includes live theme toggle, password eye visibility toggle, and loading button spinners.</a:t>
-            </a:r>
-          </a:p>
-        </p:txBody>
-      </p:sp>
-      <p:sp>
-        <p:nvSpPr>
-          <p:cNvPr id="6" name="Rectangle 5"/>
-          <p:cNvSpPr/>
-          <p:nvPr/>
-        </p:nvSpPr>
-        <p:spPr>
-          <a:xfrm>
-            <a:off x="5029200" y="1325880"/>
-            <a:ext cx="6430975" cy="5120640"/>
-          </a:xfrm>
-          <a:prstGeom prst="rect">
-            <a:avLst/>
-          </a:prstGeom>
-          <a:solidFill>
-            <a:srgbClr val="1E293B"/>
-          </a:solidFill>
-          <a:ln w="12700">
-            <a:solidFill>
-              <a:srgbClr val="00F2FE"/>
-            </a:solidFill>
-          </a:ln>
-        </p:spPr>
-        <p:style>
-          <a:lnRef idx="1">
-            <a:schemeClr val="accent1"/>
-          </a:lnRef>
-          <a:fillRef idx="3">
-            <a:schemeClr val="accent1"/>
-          </a:fillRef>
-          <a:effectRef idx="2">
-            <a:schemeClr val="accent1"/>
-          </a:effectRef>
-          <a:fontRef idx="minor">
-            <a:schemeClr val="lt1"/>
-          </a:fontRef>
-        </p:style>
-        <p:txBody>
-          <a:bodyPr rtlCol="0" anchor="ctr"/>
-          <a:lstStyle/>
-          <a:p>
-            <a:pPr algn="ctr"/>
+            <a:endParaRPr/>
           </a:p>
         </p:txBody>
       </p:sp>
       <p:pic>
         <p:nvPicPr>
-          <p:cNvPr id="7" name="Picture 6" descr="01_login_portal.png"/>
+          <p:cNvPr id="5" name="Picture 4" descr="05_spareparts_inventory.png"/>
           <p:cNvPicPr>
             <a:picLocks noChangeAspect="1"/>
           </p:cNvPicPr>
@@ -7360,14 +7877,301 @@
         </p:blipFill>
         <p:spPr>
           <a:xfrm>
-            <a:off x="5120640" y="1417320"/>
-            <a:ext cx="6248095" cy="4937760"/>
+            <a:off x="422787" y="1399032"/>
+            <a:ext cx="7374194" cy="4736592"/>
           </a:xfrm>
           <a:prstGeom prst="rect">
             <a:avLst/>
           </a:prstGeom>
         </p:spPr>
       </p:pic>
+      <p:sp>
+        <p:nvSpPr>
+          <p:cNvPr id="6" name="TextBox 5"/>
+          <p:cNvSpPr txBox="1"/>
+          <p:nvPr/>
+        </p:nvSpPr>
+        <p:spPr>
+          <a:xfrm>
+            <a:off x="1179872" y="6155288"/>
+            <a:ext cx="5852160" cy="256032"/>
+          </a:xfrm>
+          <a:prstGeom prst="rect">
+            <a:avLst/>
+          </a:prstGeom>
+          <a:noFill/>
+        </p:spPr>
+        <p:txBody>
+          <a:bodyPr wrap="square" tIns="0">
+            <a:spAutoFit/>
+          </a:bodyPr>
+          <a:lstStyle/>
+          <a:p>
+            <a:pPr algn="ctr">
+              <a:defRPr sz="1000" b="1">
+                <a:solidFill>
+                  <a:srgbClr val="94A3B8"/>
+                </a:solidFill>
+                <a:latin typeface="Arial"/>
+              </a:defRPr>
+            </a:pPr>
+            <a:r>
+              <a:rPr dirty="0"/>
+              <a:t>Spare Parts Inventory Tracking &amp; Low Stock Alerts</a:t>
+            </a:r>
+          </a:p>
+        </p:txBody>
+      </p:sp>
+      <p:sp>
+        <p:nvSpPr>
+          <p:cNvPr id="7" name="Rectangle 6"/>
+          <p:cNvSpPr/>
+          <p:nvPr/>
+        </p:nvSpPr>
+        <p:spPr>
+          <a:xfrm>
+            <a:off x="8086049" y="1315137"/>
+            <a:ext cx="3793285" cy="5039917"/>
+          </a:xfrm>
+          <a:prstGeom prst="rect">
+            <a:avLst/>
+          </a:prstGeom>
+          <a:solidFill>
+            <a:srgbClr val="152238"/>
+          </a:solidFill>
+          <a:ln w="12700">
+            <a:solidFill>
+              <a:srgbClr val="2A3C5A"/>
+            </a:solidFill>
+          </a:ln>
+        </p:spPr>
+        <p:style>
+          <a:lnRef idx="1">
+            <a:schemeClr val="accent1"/>
+          </a:lnRef>
+          <a:fillRef idx="3">
+            <a:schemeClr val="accent1"/>
+          </a:fillRef>
+          <a:effectRef idx="2">
+            <a:schemeClr val="accent1"/>
+          </a:effectRef>
+          <a:fontRef idx="minor">
+            <a:schemeClr val="lt1"/>
+          </a:fontRef>
+        </p:style>
+        <p:txBody>
+          <a:bodyPr rtlCol="0" anchor="ctr"/>
+          <a:lstStyle/>
+          <a:p>
+            <a:pPr algn="ctr"/>
+            <a:endParaRPr/>
+          </a:p>
+        </p:txBody>
+      </p:sp>
+      <p:sp>
+        <p:nvSpPr>
+          <p:cNvPr id="8" name="TextBox 7"/>
+          <p:cNvSpPr txBox="1"/>
+          <p:nvPr/>
+        </p:nvSpPr>
+        <p:spPr>
+          <a:xfrm>
+            <a:off x="8177489" y="1487941"/>
+            <a:ext cx="3610404" cy="4052391"/>
+          </a:xfrm>
+          <a:prstGeom prst="rect">
+            <a:avLst/>
+          </a:prstGeom>
+          <a:noFill/>
+        </p:spPr>
+        <p:txBody>
+          <a:bodyPr wrap="square" tIns="0" bIns="0">
+            <a:spAutoFit/>
+          </a:bodyPr>
+          <a:lstStyle/>
+          <a:p>
+            <a:pPr algn="just">
+              <a:defRPr sz="1500" b="1">
+                <a:solidFill>
+                  <a:srgbClr val="38BDF8"/>
+                </a:solidFill>
+                <a:latin typeface="Arial"/>
+              </a:defRPr>
+            </a:pPr>
+            <a:r>
+              <a:rPr sz="1500" dirty="0">
+                <a:latin typeface="Arial" panose="020B0604020202020204" pitchFamily="34" charset="0"/>
+                <a:cs typeface="Arial" panose="020B0604020202020204" pitchFamily="34" charset="0"/>
+              </a:rPr>
+              <a:t>Inventory Control Features</a:t>
+            </a:r>
+          </a:p>
+          <a:p>
+            <a:pPr algn="just">
+              <a:spcBef>
+                <a:spcPts val="800"/>
+              </a:spcBef>
+            </a:pPr>
+            <a:r>
+              <a:rPr sz="1400" b="1" dirty="0">
+                <a:solidFill>
+                  <a:srgbClr val="F59E0B"/>
+                </a:solidFill>
+                <a:latin typeface="Times New Roman" panose="02020603050405020304" pitchFamily="18" charset="0"/>
+                <a:cs typeface="Times New Roman" panose="02020603050405020304" pitchFamily="18" charset="0"/>
+              </a:rPr>
+              <a:t>• Live Stock Tracking: </a:t>
+            </a:r>
+            <a:endParaRPr lang="en-US" sz="1400" b="1" dirty="0">
+              <a:solidFill>
+                <a:srgbClr val="F59E0B"/>
+              </a:solidFill>
+              <a:latin typeface="Times New Roman" panose="02020603050405020304" pitchFamily="18" charset="0"/>
+              <a:cs typeface="Times New Roman" panose="02020603050405020304" pitchFamily="18" charset="0"/>
+            </a:endParaRPr>
+          </a:p>
+          <a:p>
+            <a:pPr algn="just">
+              <a:spcBef>
+                <a:spcPts val="800"/>
+              </a:spcBef>
+            </a:pPr>
+            <a:r>
+              <a:rPr sz="1400" dirty="0">
+                <a:solidFill>
+                  <a:srgbClr val="E2E8F0"/>
+                </a:solidFill>
+                <a:latin typeface="Times New Roman" panose="02020603050405020304" pitchFamily="18" charset="0"/>
+                <a:cs typeface="Times New Roman" panose="02020603050405020304" pitchFamily="18" charset="0"/>
+              </a:rPr>
+              <a:t>Real-time count management for bearings, seals, hydraulic fluid, valves, and circuit boards.</a:t>
+            </a:r>
+          </a:p>
+          <a:p>
+            <a:pPr algn="just">
+              <a:spcBef>
+                <a:spcPts val="800"/>
+              </a:spcBef>
+            </a:pPr>
+            <a:r>
+              <a:rPr sz="1400" b="1" dirty="0">
+                <a:solidFill>
+                  <a:srgbClr val="F59E0B"/>
+                </a:solidFill>
+                <a:latin typeface="Times New Roman" panose="02020603050405020304" pitchFamily="18" charset="0"/>
+                <a:cs typeface="Times New Roman" panose="02020603050405020304" pitchFamily="18" charset="0"/>
+              </a:rPr>
+              <a:t>• Automated Reorder Alerts: </a:t>
+            </a:r>
+            <a:endParaRPr lang="en-US" sz="1400" b="1" dirty="0">
+              <a:solidFill>
+                <a:srgbClr val="F59E0B"/>
+              </a:solidFill>
+              <a:latin typeface="Times New Roman" panose="02020603050405020304" pitchFamily="18" charset="0"/>
+              <a:cs typeface="Times New Roman" panose="02020603050405020304" pitchFamily="18" charset="0"/>
+            </a:endParaRPr>
+          </a:p>
+          <a:p>
+            <a:pPr algn="just">
+              <a:spcBef>
+                <a:spcPts val="800"/>
+              </a:spcBef>
+            </a:pPr>
+            <a:r>
+              <a:rPr sz="1400" dirty="0">
+                <a:solidFill>
+                  <a:srgbClr val="E2E8F0"/>
+                </a:solidFill>
+                <a:latin typeface="Times New Roman" panose="02020603050405020304" pitchFamily="18" charset="0"/>
+                <a:cs typeface="Times New Roman" panose="02020603050405020304" pitchFamily="18" charset="0"/>
+              </a:rPr>
+              <a:t>Triggers low-stock warnings when inventory drops below configured minimum thresholds.</a:t>
+            </a:r>
+          </a:p>
+          <a:p>
+            <a:pPr algn="just">
+              <a:spcBef>
+                <a:spcPts val="800"/>
+              </a:spcBef>
+            </a:pPr>
+            <a:r>
+              <a:rPr sz="1400" b="1" dirty="0">
+                <a:solidFill>
+                  <a:srgbClr val="F59E0B"/>
+                </a:solidFill>
+                <a:latin typeface="Times New Roman" panose="02020603050405020304" pitchFamily="18" charset="0"/>
+                <a:cs typeface="Times New Roman" panose="02020603050405020304" pitchFamily="18" charset="0"/>
+              </a:rPr>
+              <a:t>• Asset Compatibility Mapping: </a:t>
+            </a:r>
+            <a:endParaRPr lang="en-US" sz="1400" b="1" dirty="0">
+              <a:solidFill>
+                <a:srgbClr val="F59E0B"/>
+              </a:solidFill>
+              <a:latin typeface="Times New Roman" panose="02020603050405020304" pitchFamily="18" charset="0"/>
+              <a:cs typeface="Times New Roman" panose="02020603050405020304" pitchFamily="18" charset="0"/>
+            </a:endParaRPr>
+          </a:p>
+          <a:p>
+            <a:pPr algn="just">
+              <a:spcBef>
+                <a:spcPts val="800"/>
+              </a:spcBef>
+            </a:pPr>
+            <a:r>
+              <a:rPr sz="1400" dirty="0">
+                <a:solidFill>
+                  <a:srgbClr val="E2E8F0"/>
+                </a:solidFill>
+                <a:latin typeface="Times New Roman" panose="02020603050405020304" pitchFamily="18" charset="0"/>
+                <a:cs typeface="Times New Roman" panose="02020603050405020304" pitchFamily="18" charset="0"/>
+              </a:rPr>
+              <a:t>Links spare parts directly to specific equipment models to prevent maintenance delays.</a:t>
+            </a:r>
+          </a:p>
+          <a:p>
+            <a:pPr algn="just">
+              <a:spcBef>
+                <a:spcPts val="800"/>
+              </a:spcBef>
+            </a:pPr>
+            <a:r>
+              <a:rPr sz="1400" b="1" dirty="0">
+                <a:solidFill>
+                  <a:srgbClr val="F59E0B"/>
+                </a:solidFill>
+                <a:latin typeface="Times New Roman" panose="02020603050405020304" pitchFamily="18" charset="0"/>
+                <a:cs typeface="Times New Roman" panose="02020603050405020304" pitchFamily="18" charset="0"/>
+              </a:rPr>
+              <a:t>• Cost &amp; Supplier Insights: </a:t>
+            </a:r>
+            <a:endParaRPr lang="en-US" sz="1400" b="1" dirty="0">
+              <a:solidFill>
+                <a:srgbClr val="F59E0B"/>
+              </a:solidFill>
+              <a:latin typeface="Times New Roman" panose="02020603050405020304" pitchFamily="18" charset="0"/>
+              <a:cs typeface="Times New Roman" panose="02020603050405020304" pitchFamily="18" charset="0"/>
+            </a:endParaRPr>
+          </a:p>
+          <a:p>
+            <a:pPr algn="just">
+              <a:spcBef>
+                <a:spcPts val="800"/>
+              </a:spcBef>
+            </a:pPr>
+            <a:r>
+              <a:rPr sz="1400" dirty="0">
+                <a:solidFill>
+                  <a:srgbClr val="E2E8F0"/>
+                </a:solidFill>
+                <a:latin typeface="Times New Roman" panose="02020603050405020304" pitchFamily="18" charset="0"/>
+                <a:cs typeface="Times New Roman" panose="02020603050405020304" pitchFamily="18" charset="0"/>
+              </a:rPr>
+              <a:t>Tracks unit costs and supplier lead times to optimize procurement and minimize capital lockup.</a:t>
+            </a:r>
+          </a:p>
+        </p:txBody>
+      </p:sp>
     </p:spTree>
   </p:cSld>
   <p:clrMapOvr>
@@ -7376,13 +8180,13 @@
 </p:sld>
 </file>
 
-<file path=ppt/slides/slide7.xml><?xml version="1.0" encoding="utf-8"?>
-<p:sld xmlns:a="http://schemas.openxmlformats.org/drawingml/2006/main" xmlns:p="http://schemas.openxmlformats.org/presentationml/2006/main" xmlns:r="http://schemas.openxmlformats.org/officeDocument/2006/relationships">
+<file path=ppt/slides/slide9.xml><?xml version="1.0" encoding="utf-8"?>
+<p:sld xmlns:a="http://schemas.openxmlformats.org/drawingml/2006/main" xmlns:r="http://schemas.openxmlformats.org/officeDocument/2006/relationships" xmlns:p="http://schemas.openxmlformats.org/presentationml/2006/main">
   <p:cSld>
     <p:bg>
       <p:bgPr>
         <a:solidFill>
-          <a:srgbClr val="0F172A"/>
+          <a:srgbClr val="0B132B"/>
         </a:solidFill>
         <a:effectLst/>
       </p:bgPr>
@@ -7393,7 +8197,14 @@
         <p:cNvGrpSpPr/>
         <p:nvPr/>
       </p:nvGrpSpPr>
-      <p:grpSpPr/>
+      <p:grpSpPr>
+        <a:xfrm>
+          <a:off x="0" y="0"/>
+          <a:ext cx="0" cy="0"/>
+          <a:chOff x="0" y="0"/>
+          <a:chExt cx="0" cy="0"/>
+        </a:xfrm>
+      </p:grpSpPr>
       <p:sp>
         <p:nvSpPr>
           <p:cNvPr id="2" name="Rectangle 1"/>
@@ -7402,18 +8213,18 @@
         </p:nvSpPr>
         <p:spPr>
           <a:xfrm>
-            <a:off x="731520" y="365760"/>
-            <a:ext cx="10728655" cy="777240"/>
+            <a:off x="731520" y="320040"/>
+            <a:ext cx="10545775" cy="822960"/>
           </a:xfrm>
           <a:prstGeom prst="rect">
             <a:avLst/>
           </a:prstGeom>
           <a:solidFill>
-            <a:srgbClr val="1E293B"/>
+            <a:srgbClr val="152238"/>
           </a:solidFill>
           <a:ln w="12700">
             <a:solidFill>
-              <a:srgbClr val="334155"/>
+              <a:srgbClr val="2A3C5A"/>
             </a:solidFill>
           </a:ln>
         </p:spPr>
@@ -7436,6 +8247,7 @@
           <a:lstStyle/>
           <a:p>
             <a:pPr algn="ctr"/>
+            <a:endParaRPr/>
           </a:p>
         </p:txBody>
       </p:sp>
@@ -7447,8 +8259,8 @@
         </p:nvSpPr>
         <p:spPr>
           <a:xfrm>
-            <a:off x="914400" y="384048"/>
-            <a:ext cx="10332720" cy="731520"/>
+            <a:off x="914705" y="501558"/>
+            <a:ext cx="10362895" cy="477054"/>
           </a:xfrm>
           <a:prstGeom prst="rect">
             <a:avLst/>
@@ -7461,29 +8273,31 @@
           </a:bodyPr>
           <a:lstStyle/>
           <a:p>
-            <a:pPr>
-              <a:defRPr sz="1000" b="1">
-                <a:solidFill>
-                  <a:srgbClr val="00F2FE"/>
+            <a:pPr algn="ctr">
+              <a:defRPr sz="2000" b="1">
+                <a:solidFill>
+                  <a:srgbClr val="FFFFFF"/>
                 </a:solidFill>
                 <a:latin typeface="Arial"/>
               </a:defRPr>
             </a:pPr>
             <a:r>
-              <a:t>U21CS504 - WEB TECHNOLOGIES LABORATORY</a:t>
-            </a:r>
-          </a:p>
-          <a:p>
-            <a:pPr>
-              <a:defRPr sz="2000" b="1">
-                <a:solidFill>
-                  <a:srgbClr val="FFFFFF"/>
+              <a:rPr dirty="0"/>
+              <a:t>Failure Analytics &amp; Real-Time Alert Center</a:t>
+            </a:r>
+          </a:p>
+          <a:p>
+            <a:pPr algn="ctr">
+              <a:defRPr sz="1100" b="1">
+                <a:solidFill>
+                  <a:srgbClr val="F59E0B"/>
                 </a:solidFill>
                 <a:latin typeface="Arial"/>
               </a:defRPr>
             </a:pPr>
             <a:r>
-              <a:t>6. Industrial Command Center Dashboard</a:t>
+              <a:rPr dirty="0"/>
+              <a:t>Multi-Severity Event Triage &amp; Historical Equipment Reliability Trends</a:t>
             </a:r>
           </a:p>
         </p:txBody>
@@ -7497,17 +8311,17 @@
         <p:spPr>
           <a:xfrm>
             <a:off x="731520" y="1325880"/>
-            <a:ext cx="4114800" cy="5120640"/>
+            <a:ext cx="5852160" cy="2468880"/>
           </a:xfrm>
           <a:prstGeom prst="rect">
             <a:avLst/>
           </a:prstGeom>
           <a:solidFill>
-            <a:srgbClr val="1E293B"/>
+            <a:srgbClr val="152238"/>
           </a:solidFill>
           <a:ln w="12700">
             <a:solidFill>
-              <a:srgbClr val="334155"/>
+              <a:srgbClr val="38BDF8"/>
             </a:solidFill>
           </a:ln>
         </p:spPr>
@@ -7530,157 +8344,13 @@
           <a:lstStyle/>
           <a:p>
             <a:pPr algn="ctr"/>
-          </a:p>
-        </p:txBody>
-      </p:sp>
-      <p:sp>
-        <p:nvSpPr>
-          <p:cNvPr id="5" name="TextBox 4"/>
-          <p:cNvSpPr txBox="1"/>
-          <p:nvPr/>
-        </p:nvSpPr>
-        <p:spPr>
-          <a:xfrm>
-            <a:off x="914400" y="1508760"/>
-            <a:ext cx="3749040" cy="4754880"/>
-          </a:xfrm>
-          <a:prstGeom prst="rect">
-            <a:avLst/>
-          </a:prstGeom>
-          <a:noFill/>
-        </p:spPr>
-        <p:txBody>
-          <a:bodyPr wrap="square">
-            <a:spAutoFit/>
-          </a:bodyPr>
-          <a:lstStyle/>
-          <a:p>
-            <a:pPr>
-              <a:defRPr sz="1600" b="1">
-                <a:solidFill>
-                  <a:srgbClr val="00F2FE"/>
-                </a:solidFill>
-                <a:latin typeface="Arial"/>
-              </a:defRPr>
-            </a:pPr>
-            <a:r>
-              <a:t>Key Capabilities &amp; Details</a:t>
-            </a:r>
-          </a:p>
-          <a:p>
-            <a:pPr>
-              <a:spcBef>
-                <a:spcPts val="800"/>
-              </a:spcBef>
-              <a:defRPr sz="1300">
-                <a:solidFill>
-                  <a:srgbClr val="CBD5E1"/>
-                </a:solidFill>
-                <a:latin typeface="Arial"/>
-              </a:defRPr>
-            </a:pPr>
-            <a:r>
-              <a:t>• Overview of manufacturing assets, fleet uptime %, active alerts, and open work order counts.</a:t>
-            </a:r>
-          </a:p>
-          <a:p>
-            <a:pPr>
-              <a:spcBef>
-                <a:spcPts val="800"/>
-              </a:spcBef>
-              <a:defRPr sz="1300">
-                <a:solidFill>
-                  <a:srgbClr val="CBD5E1"/>
-                </a:solidFill>
-                <a:latin typeface="Arial"/>
-              </a:defRPr>
-            </a:pPr>
-            <a:r>
-              <a:t>• Real-time machine health telemetry overview cards.</a:t>
-            </a:r>
-          </a:p>
-          <a:p>
-            <a:pPr>
-              <a:spcBef>
-                <a:spcPts val="800"/>
-              </a:spcBef>
-              <a:defRPr sz="1300">
-                <a:solidFill>
-                  <a:srgbClr val="CBD5E1"/>
-                </a:solidFill>
-                <a:latin typeface="Arial"/>
-              </a:defRPr>
-            </a:pPr>
-            <a:r>
-              <a:t>• Machine Health Trend line chart built with Chart.js.</a:t>
-            </a:r>
-          </a:p>
-          <a:p>
-            <a:pPr>
-              <a:spcBef>
-                <a:spcPts val="800"/>
-              </a:spcBef>
-              <a:defRPr sz="1300">
-                <a:solidFill>
-                  <a:srgbClr val="CBD5E1"/>
-                </a:solidFill>
-                <a:latin typeface="Arial"/>
-              </a:defRPr>
-            </a:pPr>
-            <a:r>
-              <a:t>• Real-time activity audit feed with 10-second relative timestamp ticker ('Just now', '15 sec ago').</a:t>
-            </a:r>
-          </a:p>
-        </p:txBody>
-      </p:sp>
-      <p:sp>
-        <p:nvSpPr>
-          <p:cNvPr id="6" name="Rectangle 5"/>
-          <p:cNvSpPr/>
-          <p:nvPr/>
-        </p:nvSpPr>
-        <p:spPr>
-          <a:xfrm>
-            <a:off x="5029200" y="1325880"/>
-            <a:ext cx="6430975" cy="5120640"/>
-          </a:xfrm>
-          <a:prstGeom prst="rect">
-            <a:avLst/>
-          </a:prstGeom>
-          <a:solidFill>
-            <a:srgbClr val="1E293B"/>
-          </a:solidFill>
-          <a:ln w="12700">
-            <a:solidFill>
-              <a:srgbClr val="00F2FE"/>
-            </a:solidFill>
-          </a:ln>
-        </p:spPr>
-        <p:style>
-          <a:lnRef idx="1">
-            <a:schemeClr val="accent1"/>
-          </a:lnRef>
-          <a:fillRef idx="3">
-            <a:schemeClr val="accent1"/>
-          </a:fillRef>
-          <a:effectRef idx="2">
-            <a:schemeClr val="accent1"/>
-          </a:effectRef>
-          <a:fontRef idx="minor">
-            <a:schemeClr val="lt1"/>
-          </a:fontRef>
-        </p:style>
-        <p:txBody>
-          <a:bodyPr rtlCol="0" anchor="ctr"/>
-          <a:lstStyle/>
-          <a:p>
-            <a:pPr algn="ctr"/>
+            <a:endParaRPr/>
           </a:p>
         </p:txBody>
       </p:sp>
       <p:pic>
         <p:nvPicPr>
-          <p:cNvPr id="7" name="Picture 6" descr="02_admin_dashboard.png"/>
+          <p:cNvPr id="5" name="Picture 4" descr="06_analytics_dashboard.png"/>
           <p:cNvPicPr>
             <a:picLocks noChangeAspect="1"/>
           </p:cNvPicPr>
@@ -7694,60 +8364,71 @@
         </p:blipFill>
         <p:spPr>
           <a:xfrm>
-            <a:off x="5120640" y="1417320"/>
-            <a:ext cx="6248095" cy="4937760"/>
+            <a:off x="804672" y="1399032"/>
+            <a:ext cx="5705856" cy="2176272"/>
           </a:xfrm>
           <a:prstGeom prst="rect">
             <a:avLst/>
           </a:prstGeom>
         </p:spPr>
       </p:pic>
-    </p:spTree>
-  </p:cSld>
-  <p:clrMapOvr>
-    <a:masterClrMapping/>
-  </p:clrMapOvr>
-</p:sld>
-</file>
-
-<file path=ppt/slides/slide8.xml><?xml version="1.0" encoding="utf-8"?>
-<p:sld xmlns:a="http://schemas.openxmlformats.org/drawingml/2006/main" xmlns:p="http://schemas.openxmlformats.org/presentationml/2006/main" xmlns:r="http://schemas.openxmlformats.org/officeDocument/2006/relationships">
-  <p:cSld>
-    <p:bg>
-      <p:bgPr>
-        <a:solidFill>
-          <a:srgbClr val="0F172A"/>
-        </a:solidFill>
-        <a:effectLst/>
-      </p:bgPr>
-    </p:bg>
-    <p:spTree>
-      <p:nvGrpSpPr>
-        <p:cNvPr id="1" name=""/>
-        <p:cNvGrpSpPr/>
-        <p:nvPr/>
-      </p:nvGrpSpPr>
-      <p:grpSpPr/>
-      <p:sp>
-        <p:nvSpPr>
-          <p:cNvPr id="2" name="Rectangle 1"/>
+      <p:sp>
+        <p:nvSpPr>
+          <p:cNvPr id="6" name="TextBox 5"/>
+          <p:cNvSpPr txBox="1"/>
+          <p:nvPr/>
+        </p:nvSpPr>
+        <p:spPr>
+          <a:xfrm>
+            <a:off x="804672" y="3613256"/>
+            <a:ext cx="5852160" cy="256032"/>
+          </a:xfrm>
+          <a:prstGeom prst="rect">
+            <a:avLst/>
+          </a:prstGeom>
+          <a:noFill/>
+        </p:spPr>
+        <p:txBody>
+          <a:bodyPr wrap="square" tIns="0">
+            <a:spAutoFit/>
+          </a:bodyPr>
+          <a:lstStyle/>
+          <a:p>
+            <a:pPr algn="ctr">
+              <a:defRPr sz="1000" b="1">
+                <a:solidFill>
+                  <a:srgbClr val="94A3B8"/>
+                </a:solidFill>
+                <a:latin typeface="Arial"/>
+              </a:defRPr>
+            </a:pPr>
+            <a:r>
+              <a:rPr dirty="0"/>
+              <a:t>Reliability Trends &amp; Failure Mode Analytics</a:t>
+            </a:r>
+          </a:p>
+        </p:txBody>
+      </p:sp>
+      <p:sp>
+        <p:nvSpPr>
+          <p:cNvPr id="7" name="Rectangle 6"/>
           <p:cNvSpPr/>
           <p:nvPr/>
         </p:nvSpPr>
         <p:spPr>
           <a:xfrm>
-            <a:off x="731520" y="365760"/>
-            <a:ext cx="10728655" cy="777240"/>
+            <a:off x="731520" y="3886200"/>
+            <a:ext cx="5852160" cy="2468880"/>
           </a:xfrm>
           <a:prstGeom prst="rect">
             <a:avLst/>
           </a:prstGeom>
           <a:solidFill>
-            <a:srgbClr val="1E293B"/>
+            <a:srgbClr val="152238"/>
           </a:solidFill>
           <a:ln w="12700">
             <a:solidFill>
-              <a:srgbClr val="334155"/>
+              <a:srgbClr val="38BDF8"/>
             </a:solidFill>
           </a:ln>
         </p:spPr>
@@ -7770,318 +8451,97 @@
           <a:lstStyle/>
           <a:p>
             <a:pPr algn="ctr"/>
-          </a:p>
-        </p:txBody>
-      </p:sp>
-      <p:sp>
-        <p:nvSpPr>
-          <p:cNvPr id="3" name="TextBox 2"/>
-          <p:cNvSpPr txBox="1"/>
-          <p:nvPr/>
-        </p:nvSpPr>
-        <p:spPr>
-          <a:xfrm>
-            <a:off x="914400" y="384048"/>
-            <a:ext cx="10332720" cy="731520"/>
-          </a:xfrm>
-          <a:prstGeom prst="rect">
-            <a:avLst/>
-          </a:prstGeom>
-          <a:noFill/>
-        </p:spPr>
-        <p:txBody>
-          <a:bodyPr wrap="square" tIns="0" bIns="0">
-            <a:spAutoFit/>
-          </a:bodyPr>
-          <a:lstStyle/>
-          <a:p>
-            <a:pPr>
-              <a:defRPr sz="1000" b="1">
-                <a:solidFill>
-                  <a:srgbClr val="00F2FE"/>
-                </a:solidFill>
-                <a:latin typeface="Arial"/>
-              </a:defRPr>
-            </a:pPr>
-            <a:r>
-              <a:t>U21CS504 - WEB TECHNOLOGIES LABORATORY</a:t>
-            </a:r>
-          </a:p>
-          <a:p>
-            <a:pPr>
-              <a:defRPr sz="2000" b="1">
-                <a:solidFill>
-                  <a:srgbClr val="FFFFFF"/>
-                </a:solidFill>
-                <a:latin typeface="Arial"/>
-              </a:defRPr>
-            </a:pPr>
-            <a:r>
-              <a:t>7. Industrial Assets Directory &amp; Registration</a:t>
-            </a:r>
-          </a:p>
-        </p:txBody>
-      </p:sp>
-      <p:sp>
-        <p:nvSpPr>
-          <p:cNvPr id="4" name="Rectangle 3"/>
-          <p:cNvSpPr/>
-          <p:nvPr/>
-        </p:nvSpPr>
-        <p:spPr>
-          <a:xfrm>
-            <a:off x="731520" y="1325880"/>
-            <a:ext cx="4114800" cy="5120640"/>
-          </a:xfrm>
-          <a:prstGeom prst="rect">
-            <a:avLst/>
-          </a:prstGeom>
-          <a:solidFill>
-            <a:srgbClr val="1E293B"/>
-          </a:solidFill>
-          <a:ln w="12700">
-            <a:solidFill>
-              <a:srgbClr val="334155"/>
-            </a:solidFill>
-          </a:ln>
-        </p:spPr>
-        <p:style>
-          <a:lnRef idx="1">
-            <a:schemeClr val="accent1"/>
-          </a:lnRef>
-          <a:fillRef idx="3">
-            <a:schemeClr val="accent1"/>
-          </a:fillRef>
-          <a:effectRef idx="2">
-            <a:schemeClr val="accent1"/>
-          </a:effectRef>
-          <a:fontRef idx="minor">
-            <a:schemeClr val="lt1"/>
-          </a:fontRef>
-        </p:style>
-        <p:txBody>
-          <a:bodyPr rtlCol="0" anchor="ctr"/>
-          <a:lstStyle/>
-          <a:p>
-            <a:pPr algn="ctr"/>
-          </a:p>
-        </p:txBody>
-      </p:sp>
-      <p:sp>
-        <p:nvSpPr>
-          <p:cNvPr id="5" name="TextBox 4"/>
-          <p:cNvSpPr txBox="1"/>
-          <p:nvPr/>
-        </p:nvSpPr>
-        <p:spPr>
-          <a:xfrm>
-            <a:off x="914400" y="1508760"/>
-            <a:ext cx="3749040" cy="4754880"/>
-          </a:xfrm>
-          <a:prstGeom prst="rect">
-            <a:avLst/>
-          </a:prstGeom>
-          <a:noFill/>
-        </p:spPr>
-        <p:txBody>
-          <a:bodyPr wrap="square">
-            <a:spAutoFit/>
-          </a:bodyPr>
-          <a:lstStyle/>
-          <a:p>
-            <a:pPr>
-              <a:defRPr sz="1600" b="1">
-                <a:solidFill>
-                  <a:srgbClr val="00F2FE"/>
-                </a:solidFill>
-                <a:latin typeface="Arial"/>
-              </a:defRPr>
-            </a:pPr>
-            <a:r>
-              <a:t>Key Capabilities &amp; Details</a:t>
-            </a:r>
-          </a:p>
-          <a:p>
-            <a:pPr>
-              <a:spcBef>
-                <a:spcPts val="800"/>
-              </a:spcBef>
-              <a:defRPr sz="1300">
-                <a:solidFill>
-                  <a:srgbClr val="CBD5E1"/>
-                </a:solidFill>
-                <a:latin typeface="Arial"/>
-              </a:defRPr>
-            </a:pPr>
-            <a:r>
-              <a:t>• Comprehensive machine asset directory with health progress bars and status badges.</a:t>
-            </a:r>
-          </a:p>
-          <a:p>
-            <a:pPr>
-              <a:spcBef>
-                <a:spcPts val="800"/>
-              </a:spcBef>
-              <a:defRPr sz="1300">
-                <a:solidFill>
-                  <a:srgbClr val="CBD5E1"/>
-                </a:solidFill>
-                <a:latin typeface="Arial"/>
-              </a:defRPr>
-            </a:pPr>
-            <a:r>
-              <a:t>• Telemetry status indicators tracking vibration (mm/s) and operating temperature (°C).</a:t>
-            </a:r>
-          </a:p>
-          <a:p>
-            <a:pPr>
-              <a:spcBef>
-                <a:spcPts val="800"/>
-              </a:spcBef>
-              <a:defRPr sz="1300">
-                <a:solidFill>
-                  <a:srgbClr val="CBD5E1"/>
-                </a:solidFill>
-                <a:latin typeface="Arial"/>
-              </a:defRPr>
-            </a:pPr>
-            <a:r>
-              <a:t>• Interactive '+ Register New Asset' modal form with real-time validation.</a:t>
-            </a:r>
-          </a:p>
-          <a:p>
-            <a:pPr>
-              <a:spcBef>
-                <a:spcPts val="800"/>
-              </a:spcBef>
-              <a:defRPr sz="1300">
-                <a:solidFill>
-                  <a:srgbClr val="CBD5E1"/>
-                </a:solidFill>
-                <a:latin typeface="Arial"/>
-              </a:defRPr>
-            </a:pPr>
-            <a:r>
-              <a:t>• Executes POST/PUT/DELETE requests synced directly to MySQL database.</a:t>
-            </a:r>
-          </a:p>
-        </p:txBody>
-      </p:sp>
-      <p:sp>
-        <p:nvSpPr>
-          <p:cNvPr id="6" name="Rectangle 5"/>
-          <p:cNvSpPr/>
-          <p:nvPr/>
-        </p:nvSpPr>
-        <p:spPr>
-          <a:xfrm>
-            <a:off x="5029200" y="1325880"/>
-            <a:ext cx="6430975" cy="5120640"/>
-          </a:xfrm>
-          <a:prstGeom prst="rect">
-            <a:avLst/>
-          </a:prstGeom>
-          <a:solidFill>
-            <a:srgbClr val="1E293B"/>
-          </a:solidFill>
-          <a:ln w="12700">
-            <a:solidFill>
-              <a:srgbClr val="00F2FE"/>
-            </a:solidFill>
-          </a:ln>
-        </p:spPr>
-        <p:style>
-          <a:lnRef idx="1">
-            <a:schemeClr val="accent1"/>
-          </a:lnRef>
-          <a:fillRef idx="3">
-            <a:schemeClr val="accent1"/>
-          </a:fillRef>
-          <a:effectRef idx="2">
-            <a:schemeClr val="accent1"/>
-          </a:effectRef>
-          <a:fontRef idx="minor">
-            <a:schemeClr val="lt1"/>
-          </a:fontRef>
-        </p:style>
-        <p:txBody>
-          <a:bodyPr rtlCol="0" anchor="ctr"/>
-          <a:lstStyle/>
-          <a:p>
-            <a:pPr algn="ctr"/>
+            <a:endParaRPr/>
           </a:p>
         </p:txBody>
       </p:sp>
       <p:pic>
         <p:nvPicPr>
-          <p:cNvPr id="7" name="Picture 6" descr="03_assets_management.png"/>
+          <p:cNvPr id="8" name="Picture 7" descr="07_alert_center.png"/>
           <p:cNvPicPr>
             <a:picLocks noChangeAspect="1"/>
           </p:cNvPicPr>
           <p:nvPr/>
         </p:nvPicPr>
         <p:blipFill>
-          <a:blip r:embed="rId2"/>
+          <a:blip r:embed="rId3"/>
           <a:stretch>
             <a:fillRect/>
           </a:stretch>
         </p:blipFill>
         <p:spPr>
           <a:xfrm>
-            <a:off x="5120640" y="1417320"/>
-            <a:ext cx="6248095" cy="4937760"/>
+            <a:off x="804672" y="3929856"/>
+            <a:ext cx="5705856" cy="2242344"/>
           </a:xfrm>
           <a:prstGeom prst="rect">
             <a:avLst/>
           </a:prstGeom>
         </p:spPr>
       </p:pic>
-    </p:spTree>
-  </p:cSld>
-  <p:clrMapOvr>
-    <a:masterClrMapping/>
-  </p:clrMapOvr>
-</p:sld>
-</file>
-
-<file path=ppt/slides/slide9.xml><?xml version="1.0" encoding="utf-8"?>
-<p:sld xmlns:a="http://schemas.openxmlformats.org/drawingml/2006/main" xmlns:p="http://schemas.openxmlformats.org/presentationml/2006/main" xmlns:r="http://schemas.openxmlformats.org/officeDocument/2006/relationships">
-  <p:cSld>
-    <p:bg>
-      <p:bgPr>
-        <a:solidFill>
-          <a:srgbClr val="0F172A"/>
-        </a:solidFill>
-        <a:effectLst/>
-      </p:bgPr>
-    </p:bg>
-    <p:spTree>
-      <p:nvGrpSpPr>
-        <p:cNvPr id="1" name=""/>
-        <p:cNvGrpSpPr/>
-        <p:nvPr/>
-      </p:nvGrpSpPr>
-      <p:grpSpPr/>
-      <p:sp>
-        <p:nvSpPr>
-          <p:cNvPr id="2" name="Rectangle 1"/>
+      <p:sp>
+        <p:nvSpPr>
+          <p:cNvPr id="9" name="TextBox 8"/>
+          <p:cNvSpPr txBox="1"/>
+          <p:nvPr/>
+        </p:nvSpPr>
+        <p:spPr>
+          <a:xfrm>
+            <a:off x="731520" y="6182032"/>
+            <a:ext cx="5852160" cy="256032"/>
+          </a:xfrm>
+          <a:prstGeom prst="rect">
+            <a:avLst/>
+          </a:prstGeom>
+          <a:noFill/>
+        </p:spPr>
+        <p:txBody>
+          <a:bodyPr wrap="square" tIns="0">
+            <a:spAutoFit/>
+          </a:bodyPr>
+          <a:lstStyle/>
+          <a:p>
+            <a:pPr algn="ctr">
+              <a:defRPr sz="1000" b="1">
+                <a:solidFill>
+                  <a:srgbClr val="94A3B8"/>
+                </a:solidFill>
+                <a:latin typeface="Arial"/>
+              </a:defRPr>
+            </a:pPr>
+            <a:r>
+              <a:rPr dirty="0"/>
+              <a:t>Multi-Severity Alert &amp; Event Triage Console</a:t>
+            </a:r>
+          </a:p>
+        </p:txBody>
+      </p:sp>
+      <p:sp>
+        <p:nvSpPr>
+          <p:cNvPr id="12" name="Rectangle 11">
+            <a:extLst>
+              <a:ext uri="{FF2B5EF4-FFF2-40B4-BE49-F238E27FC236}">
+                <a16:creationId xmlns:a16="http://schemas.microsoft.com/office/drawing/2014/main" id="{01F51BED-6F88-D3ED-AFD8-CEA080CA8EBE}"/>
+              </a:ext>
+            </a:extLst>
+          </p:cNvPr>
           <p:cNvSpPr/>
           <p:nvPr/>
         </p:nvSpPr>
         <p:spPr>
           <a:xfrm>
-            <a:off x="731520" y="365760"/>
-            <a:ext cx="10728655" cy="777240"/>
+            <a:off x="6803924" y="1325880"/>
+            <a:ext cx="4473372" cy="5039917"/>
           </a:xfrm>
           <a:prstGeom prst="rect">
             <a:avLst/>
           </a:prstGeom>
           <a:solidFill>
-            <a:srgbClr val="1E293B"/>
+            <a:srgbClr val="152238"/>
           </a:solidFill>
           <a:ln w="12700">
             <a:solidFill>
-              <a:srgbClr val="334155"/>
+              <a:srgbClr val="2A3C5A"/>
             </a:solidFill>
           </a:ln>
         </p:spPr>
@@ -8104,19 +8564,20 @@
           <a:lstStyle/>
           <a:p>
             <a:pPr algn="ctr"/>
-          </a:p>
-        </p:txBody>
-      </p:sp>
-      <p:sp>
-        <p:nvSpPr>
-          <p:cNvPr id="3" name="TextBox 2"/>
+            <a:endParaRPr/>
+          </a:p>
+        </p:txBody>
+      </p:sp>
+      <p:sp>
+        <p:nvSpPr>
+          <p:cNvPr id="11" name="TextBox 10"/>
           <p:cNvSpPr txBox="1"/>
           <p:nvPr/>
         </p:nvSpPr>
         <p:spPr>
           <a:xfrm>
-            <a:off x="914400" y="384048"/>
-            <a:ext cx="10332720" cy="731520"/>
+            <a:off x="6877076" y="1509252"/>
+            <a:ext cx="4321866" cy="3621504"/>
           </a:xfrm>
           <a:prstGeom prst="rect">
             <a:avLst/>
@@ -8130,109 +8591,60 @@
           <a:lstStyle/>
           <a:p>
             <a:pPr>
-              <a:defRPr sz="1000" b="1">
-                <a:solidFill>
-                  <a:srgbClr val="00F2FE"/>
+              <a:defRPr sz="1500" b="1">
+                <a:solidFill>
+                  <a:srgbClr val="38BDF8"/>
                 </a:solidFill>
                 <a:latin typeface="Arial"/>
               </a:defRPr>
             </a:pPr>
             <a:r>
-              <a:t>U21CS504 - WEB TECHNOLOGIES LABORATORY</a:t>
+              <a:rPr sz="1500" dirty="0">
+                <a:latin typeface="Arial" panose="020B0604020202020204" pitchFamily="34" charset="0"/>
+                <a:cs typeface="Arial" panose="020B0604020202020204" pitchFamily="34" charset="0"/>
+              </a:rPr>
+              <a:t>Analytics &amp; Alert Features</a:t>
             </a:r>
           </a:p>
           <a:p>
             <a:pPr>
-              <a:defRPr sz="2000" b="1">
-                <a:solidFill>
-                  <a:srgbClr val="FFFFFF"/>
-                </a:solidFill>
-                <a:latin typeface="Arial"/>
-              </a:defRPr>
-            </a:pPr>
-            <a:r>
-              <a:t>8. Work Orders Kanban Lifecycle &amp; Queue</a:t>
-            </a:r>
-          </a:p>
-        </p:txBody>
-      </p:sp>
-      <p:sp>
-        <p:nvSpPr>
-          <p:cNvPr id="4" name="Rectangle 3"/>
-          <p:cNvSpPr/>
-          <p:nvPr/>
-        </p:nvSpPr>
-        <p:spPr>
-          <a:xfrm>
-            <a:off x="731520" y="1325880"/>
-            <a:ext cx="4114800" cy="5120640"/>
-          </a:xfrm>
-          <a:prstGeom prst="rect">
-            <a:avLst/>
-          </a:prstGeom>
-          <a:solidFill>
-            <a:srgbClr val="1E293B"/>
-          </a:solidFill>
-          <a:ln w="12700">
-            <a:solidFill>
-              <a:srgbClr val="334155"/>
-            </a:solidFill>
-          </a:ln>
-        </p:spPr>
-        <p:style>
-          <a:lnRef idx="1">
-            <a:schemeClr val="accent1"/>
-          </a:lnRef>
-          <a:fillRef idx="3">
-            <a:schemeClr val="accent1"/>
-          </a:fillRef>
-          <a:effectRef idx="2">
-            <a:schemeClr val="accent1"/>
-          </a:effectRef>
-          <a:fontRef idx="minor">
-            <a:schemeClr val="lt1"/>
-          </a:fontRef>
-        </p:style>
-        <p:txBody>
-          <a:bodyPr rtlCol="0" anchor="ctr"/>
-          <a:lstStyle/>
-          <a:p>
-            <a:pPr algn="ctr"/>
-          </a:p>
-        </p:txBody>
-      </p:sp>
-      <p:sp>
-        <p:nvSpPr>
-          <p:cNvPr id="5" name="TextBox 4"/>
-          <p:cNvSpPr txBox="1"/>
-          <p:nvPr/>
-        </p:nvSpPr>
-        <p:spPr>
-          <a:xfrm>
-            <a:off x="914400" y="1508760"/>
-            <a:ext cx="3749040" cy="4754880"/>
-          </a:xfrm>
-          <a:prstGeom prst="rect">
-            <a:avLst/>
-          </a:prstGeom>
-          <a:noFill/>
-        </p:spPr>
-        <p:txBody>
-          <a:bodyPr wrap="square">
-            <a:spAutoFit/>
-          </a:bodyPr>
-          <a:lstStyle/>
+              <a:spcBef>
+                <a:spcPts val="800"/>
+              </a:spcBef>
+            </a:pPr>
+            <a:r>
+              <a:rPr sz="1400" b="1" dirty="0">
+                <a:solidFill>
+                  <a:srgbClr val="F59E0B"/>
+                </a:solidFill>
+                <a:latin typeface="Times New Roman" panose="02020603050405020304" pitchFamily="18" charset="0"/>
+                <a:cs typeface="Times New Roman" panose="02020603050405020304" pitchFamily="18" charset="0"/>
+              </a:rPr>
+              <a:t>• Multi-Severity Alert Triage: </a:t>
+            </a:r>
+            <a:endParaRPr lang="en-US" sz="1400" b="1" dirty="0">
+              <a:solidFill>
+                <a:srgbClr val="F59E0B"/>
+              </a:solidFill>
+              <a:latin typeface="Times New Roman" panose="02020603050405020304" pitchFamily="18" charset="0"/>
+              <a:cs typeface="Times New Roman" panose="02020603050405020304" pitchFamily="18" charset="0"/>
+            </a:endParaRPr>
+          </a:p>
           <a:p>
             <a:pPr>
-              <a:defRPr sz="1600" b="1">
-                <a:solidFill>
-                  <a:srgbClr val="00F2FE"/>
-                </a:solidFill>
-                <a:latin typeface="Arial"/>
-              </a:defRPr>
-            </a:pPr>
-            <a:r>
-              <a:t>Key Capabilities &amp; Details</a:t>
+              <a:spcBef>
+                <a:spcPts val="800"/>
+              </a:spcBef>
+            </a:pPr>
+            <a:r>
+              <a:rPr sz="1400" dirty="0">
+                <a:solidFill>
+                  <a:srgbClr val="E2E8F0"/>
+                </a:solidFill>
+                <a:latin typeface="Times New Roman" panose="02020603050405020304" pitchFamily="18" charset="0"/>
+                <a:cs typeface="Times New Roman" panose="02020603050405020304" pitchFamily="18" charset="0"/>
+              </a:rPr>
+              <a:t>Categorizes incoming events into Critical (Red), Warning (Amber), and Info (Blue).</a:t>
             </a:r>
           </a:p>
           <a:p>
@@ -8240,31 +8652,40 @@
               <a:spcBef>
                 <a:spcPts val="800"/>
               </a:spcBef>
-              <a:defRPr sz="1300">
-                <a:solidFill>
-                  <a:srgbClr val="CBD5E1"/>
-                </a:solidFill>
-                <a:latin typeface="Arial"/>
-              </a:defRPr>
-            </a:pPr>
-            <a:r>
-              <a:t>• Interactive Kanban board managing work orders across OPEN, ASSIGNED, IN PROGRESS, RESOLVED, and CLOSED status columns.</a:t>
-            </a:r>
+            </a:pPr>
+            <a:r>
+              <a:rPr sz="1400" b="1" dirty="0">
+                <a:solidFill>
+                  <a:srgbClr val="F59E0B"/>
+                </a:solidFill>
+                <a:latin typeface="Times New Roman" panose="02020603050405020304" pitchFamily="18" charset="0"/>
+                <a:cs typeface="Times New Roman" panose="02020603050405020304" pitchFamily="18" charset="0"/>
+              </a:rPr>
+              <a:t>• Sensor Threshold Monitoring: </a:t>
+            </a:r>
+            <a:endParaRPr lang="en-US" sz="1400" b="1" dirty="0">
+              <a:solidFill>
+                <a:srgbClr val="F59E0B"/>
+              </a:solidFill>
+              <a:latin typeface="Times New Roman" panose="02020603050405020304" pitchFamily="18" charset="0"/>
+              <a:cs typeface="Times New Roman" panose="02020603050405020304" pitchFamily="18" charset="0"/>
+            </a:endParaRPr>
           </a:p>
           <a:p>
             <a:pPr>
               <a:spcBef>
                 <a:spcPts val="800"/>
               </a:spcBef>
-              <a:defRPr sz="1300">
-                <a:solidFill>
-                  <a:srgbClr val="CBD5E1"/>
-                </a:solidFill>
-                <a:latin typeface="Arial"/>
-              </a:defRPr>
-            </a:pPr>
-            <a:r>
-              <a:t>• Technician assignment and supervisor dispatch workflow.</a:t>
+            </a:pPr>
+            <a:r>
+              <a:rPr sz="1400" dirty="0">
+                <a:solidFill>
+                  <a:srgbClr val="E2E8F0"/>
+                </a:solidFill>
+                <a:latin typeface="Times New Roman" panose="02020603050405020304" pitchFamily="18" charset="0"/>
+                <a:cs typeface="Times New Roman" panose="02020603050405020304" pitchFamily="18" charset="0"/>
+              </a:rPr>
+              <a:t>Real-time notifications triggered when temperature, pressure, or vibration exceeds limits.</a:t>
             </a:r>
           </a:p>
           <a:p>
@@ -8272,104 +8693,85 @@
               <a:spcBef>
                 <a:spcPts val="800"/>
               </a:spcBef>
-              <a:defRPr sz="1300">
-                <a:solidFill>
-                  <a:srgbClr val="CBD5E1"/>
-                </a:solidFill>
-                <a:latin typeface="Arial"/>
-              </a:defRPr>
-            </a:pPr>
-            <a:r>
-              <a:t>• Technicians can mark work started, enter completion notes, and advance status.</a:t>
-            </a:r>
+            </a:pPr>
+            <a:r>
+              <a:rPr sz="1400" b="1" dirty="0">
+                <a:solidFill>
+                  <a:srgbClr val="F59E0B"/>
+                </a:solidFill>
+                <a:latin typeface="Times New Roman" panose="02020603050405020304" pitchFamily="18" charset="0"/>
+                <a:cs typeface="Times New Roman" panose="02020603050405020304" pitchFamily="18" charset="0"/>
+              </a:rPr>
+              <a:t>• Failure Mode Analytics: </a:t>
+            </a:r>
+            <a:endParaRPr lang="en-US" sz="1400" b="1" dirty="0">
+              <a:solidFill>
+                <a:srgbClr val="F59E0B"/>
+              </a:solidFill>
+              <a:latin typeface="Times New Roman" panose="02020603050405020304" pitchFamily="18" charset="0"/>
+              <a:cs typeface="Times New Roman" panose="02020603050405020304" pitchFamily="18" charset="0"/>
+            </a:endParaRPr>
           </a:p>
           <a:p>
             <a:pPr>
               <a:spcBef>
                 <a:spcPts val="800"/>
               </a:spcBef>
-              <a:defRPr sz="1300">
-                <a:solidFill>
-                  <a:srgbClr val="CBD5E1"/>
-                </a:solidFill>
-                <a:latin typeface="Arial"/>
-              </a:defRPr>
-            </a:pPr>
-            <a:r>
-              <a:t>• Live sync with MySQL work_orders table.</a:t>
-            </a:r>
-          </a:p>
-        </p:txBody>
-      </p:sp>
-      <p:sp>
-        <p:nvSpPr>
-          <p:cNvPr id="6" name="Rectangle 5"/>
-          <p:cNvSpPr/>
-          <p:nvPr/>
-        </p:nvSpPr>
-        <p:spPr>
-          <a:xfrm>
-            <a:off x="5029200" y="1325880"/>
-            <a:ext cx="6430975" cy="5120640"/>
-          </a:xfrm>
-          <a:prstGeom prst="rect">
-            <a:avLst/>
-          </a:prstGeom>
-          <a:solidFill>
-            <a:srgbClr val="1E293B"/>
-          </a:solidFill>
-          <a:ln w="12700">
-            <a:solidFill>
-              <a:srgbClr val="00F2FE"/>
-            </a:solidFill>
-          </a:ln>
-        </p:spPr>
-        <p:style>
-          <a:lnRef idx="1">
-            <a:schemeClr val="accent1"/>
-          </a:lnRef>
-          <a:fillRef idx="3">
-            <a:schemeClr val="accent1"/>
-          </a:fillRef>
-          <a:effectRef idx="2">
-            <a:schemeClr val="accent1"/>
-          </a:effectRef>
-          <a:fontRef idx="minor">
-            <a:schemeClr val="lt1"/>
-          </a:fontRef>
-        </p:style>
-        <p:txBody>
-          <a:bodyPr rtlCol="0" anchor="ctr"/>
-          <a:lstStyle/>
-          <a:p>
-            <a:pPr algn="ctr"/>
-          </a:p>
-        </p:txBody>
-      </p:sp>
-      <p:pic>
-        <p:nvPicPr>
-          <p:cNvPr id="7" name="Picture 6" descr="04_workorders_kanban.png"/>
-          <p:cNvPicPr>
-            <a:picLocks noChangeAspect="1"/>
-          </p:cNvPicPr>
-          <p:nvPr/>
-        </p:nvPicPr>
-        <p:blipFill>
-          <a:blip r:embed="rId2"/>
-          <a:stretch>
-            <a:fillRect/>
-          </a:stretch>
-        </p:blipFill>
-        <p:spPr>
-          <a:xfrm>
-            <a:off x="5120640" y="1417320"/>
-            <a:ext cx="6248095" cy="4937760"/>
-          </a:xfrm>
-          <a:prstGeom prst="rect">
-            <a:avLst/>
-          </a:prstGeom>
-        </p:spPr>
-      </p:pic>
+            </a:pPr>
+            <a:r>
+              <a:rPr sz="1400" dirty="0">
+                <a:solidFill>
+                  <a:srgbClr val="E2E8F0"/>
+                </a:solidFill>
+                <a:latin typeface="Times New Roman" panose="02020603050405020304" pitchFamily="18" charset="0"/>
+                <a:cs typeface="Times New Roman" panose="02020603050405020304" pitchFamily="18" charset="0"/>
+              </a:rPr>
+              <a:t>Visual chart breakdowns of failure root causes to assist predictive engineering decisions.</a:t>
+            </a:r>
+          </a:p>
+          <a:p>
+            <a:pPr>
+              <a:spcBef>
+                <a:spcPts val="800"/>
+              </a:spcBef>
+            </a:pPr>
+            <a:r>
+              <a:rPr sz="1400" b="1" dirty="0">
+                <a:solidFill>
+                  <a:srgbClr val="F59E0B"/>
+                </a:solidFill>
+                <a:latin typeface="Times New Roman" panose="02020603050405020304" pitchFamily="18" charset="0"/>
+                <a:cs typeface="Times New Roman" panose="02020603050405020304" pitchFamily="18" charset="0"/>
+              </a:rPr>
+              <a:t>• Resolution Workflows: </a:t>
+            </a:r>
+            <a:endParaRPr lang="en-US" sz="1400" b="1" dirty="0">
+              <a:solidFill>
+                <a:srgbClr val="F59E0B"/>
+              </a:solidFill>
+              <a:latin typeface="Times New Roman" panose="02020603050405020304" pitchFamily="18" charset="0"/>
+              <a:cs typeface="Times New Roman" panose="02020603050405020304" pitchFamily="18" charset="0"/>
+            </a:endParaRPr>
+          </a:p>
+          <a:p>
+            <a:pPr>
+              <a:spcBef>
+                <a:spcPts val="800"/>
+              </a:spcBef>
+            </a:pPr>
+            <a:r>
+              <a:rPr sz="1400" dirty="0">
+                <a:solidFill>
+                  <a:srgbClr val="E2E8F0"/>
+                </a:solidFill>
+                <a:latin typeface="Times New Roman" panose="02020603050405020304" pitchFamily="18" charset="0"/>
+                <a:cs typeface="Times New Roman" panose="02020603050405020304" pitchFamily="18" charset="0"/>
+              </a:rPr>
+              <a:t>Allows technicians to acknowledge, investigate, and clear active alerts with timestamped logs.</a:t>
+            </a:r>
+          </a:p>
+        </p:txBody>
+      </p:sp>
     </p:spTree>
   </p:cSld>
   <p:clrMapOvr>
